--- a/assets/format.pptx
+++ b/assets/format.pptx
@@ -1,28 +1,28 @@
 
 <file path=ppt/presentation.xml><?xml version="1.0" encoding="utf-8"?>
-<p:presentation xmlns:a="http://schemas.openxmlformats.org/drawingml/2006/main" xmlns:r="http://schemas.openxmlformats.org/officeDocument/2006/relationships" xmlns:p="http://schemas.openxmlformats.org/presentationml/2006/main" saveSubsetFonts="1">
+<p:presentation xmlns:a="http://schemas.openxmlformats.org/drawingml/2006/main" xmlns:r="http://schemas.openxmlformats.org/officeDocument/2006/relationships" xmlns:p="http://schemas.openxmlformats.org/presentationml/2006/main">
   <p:sldMasterIdLst>
     <p:sldMasterId id="2147483648" r:id="rId1"/>
   </p:sldMasterIdLst>
   <p:notesMasterIdLst>
-    <p:notesMasterId r:id="rId17"/>
+    <p:notesMasterId r:id="rId18"/>
   </p:notesMasterIdLst>
   <p:sldIdLst>
-    <p:sldId id="256" r:id="rId2"/>
-    <p:sldId id="257" r:id="rId3"/>
-    <p:sldId id="259" r:id="rId4"/>
-    <p:sldId id="260" r:id="rId5"/>
-    <p:sldId id="261" r:id="rId6"/>
-    <p:sldId id="262" r:id="rId7"/>
-    <p:sldId id="263" r:id="rId8"/>
-    <p:sldId id="264" r:id="rId9"/>
-    <p:sldId id="265" r:id="rId10"/>
-    <p:sldId id="258" r:id="rId11"/>
-    <p:sldId id="266" r:id="rId12"/>
-    <p:sldId id="267" r:id="rId13"/>
-    <p:sldId id="268" r:id="rId14"/>
-    <p:sldId id="269" r:id="rId15"/>
-    <p:sldId id="270" r:id="rId16"/>
+    <p:sldId id="256" r:id="rId3"/>
+    <p:sldId id="257" r:id="rId4"/>
+    <p:sldId id="259" r:id="rId5"/>
+    <p:sldId id="260" r:id="rId6"/>
+    <p:sldId id="261" r:id="rId7"/>
+    <p:sldId id="262" r:id="rId8"/>
+    <p:sldId id="263" r:id="rId9"/>
+    <p:sldId id="264" r:id="rId10"/>
+    <p:sldId id="265" r:id="rId11"/>
+    <p:sldId id="258" r:id="rId12"/>
+    <p:sldId id="266" r:id="rId13"/>
+    <p:sldId id="267" r:id="rId14"/>
+    <p:sldId id="268" r:id="rId15"/>
+    <p:sldId id="269" r:id="rId16"/>
+    <p:sldId id="270" r:id="rId17"/>
   </p:sldIdLst>
   <p:sldSz cx="12192000" cy="6858000"/>
   <p:notesSz cx="6858000" cy="9144000"/>
@@ -206,7 +206,6 @@
           <a:p>
             <a:fld id="{8315DF48-8557-4309-BA00-95C153F013A7}" type="datetimeFigureOut">
               <a:rPr lang="en-US" smtClean="0"/>
-              <a:t>18-Sep-26</a:t>
             </a:fld>
             <a:endParaRPr lang="en-US"/>
           </a:p>
@@ -273,6 +272,7 @@
               <a:rPr lang="en-US"/>
               <a:t>Click to edit Master text styles</a:t>
             </a:r>
+            <a:endParaRPr lang="en-US"/>
           </a:p>
           <a:p>
             <a:pPr lvl="1"/>
@@ -280,6 +280,7 @@
               <a:rPr lang="en-US"/>
               <a:t>Second level</a:t>
             </a:r>
+            <a:endParaRPr lang="en-US"/>
           </a:p>
           <a:p>
             <a:pPr lvl="2"/>
@@ -287,6 +288,7 @@
               <a:rPr lang="en-US"/>
               <a:t>Third level</a:t>
             </a:r>
+            <a:endParaRPr lang="en-US"/>
           </a:p>
           <a:p>
             <a:pPr lvl="3"/>
@@ -294,6 +296,7 @@
               <a:rPr lang="en-US"/>
               <a:t>Fourth level</a:t>
             </a:r>
+            <a:endParaRPr lang="en-US"/>
           </a:p>
           <a:p>
             <a:pPr lvl="4"/>
@@ -301,6 +304,7 @@
               <a:rPr lang="en-US"/>
               <a:t>Fifth level</a:t>
             </a:r>
+            <a:endParaRPr lang="en-US"/>
           </a:p>
         </p:txBody>
       </p:sp>
@@ -364,18 +368,12 @@
           <a:p>
             <a:fld id="{6A221C97-D3D6-4DF5-A824-0F913DEBE005}" type="slidenum">
               <a:rPr lang="en-US" smtClean="0"/>
-              <a:t>‹#›</a:t>
             </a:fld>
             <a:endParaRPr lang="en-US"/>
           </a:p>
         </p:txBody>
       </p:sp>
     </p:spTree>
-    <p:extLst>
-      <p:ext uri="{BB962C8B-B14F-4D97-AF65-F5344CB8AC3E}">
-        <p14:creationId xmlns:p14="http://schemas.microsoft.com/office/powerpoint/2010/main" val="630811356"/>
-      </p:ext>
-    </p:extLst>
   </p:cSld>
   <p:clrMap bg1="lt1" tx1="dk1" bg2="lt2" tx2="dk2" accent1="accent1" accent2="accent2" accent3="accent3" accent4="accent4" accent5="accent5" accent6="accent6" hlink="hlink" folHlink="folHlink"/>
   <p:notesStyle>
@@ -492,13 +490,7 @@
       </p:grpSpPr>
       <p:sp>
         <p:nvSpPr>
-          <p:cNvPr id="2" name="Title 1">
-            <a:extLst>
-              <a:ext uri="{FF2B5EF4-FFF2-40B4-BE49-F238E27FC236}">
-                <a16:creationId xmlns:a16="http://schemas.microsoft.com/office/drawing/2014/main" id="{097DABFB-0776-CE44-C21E-A3791F5566C8}"/>
-              </a:ext>
-            </a:extLst>
-          </p:cNvPr>
+          <p:cNvPr id="2" name="Title 1"/>
           <p:cNvSpPr>
             <a:spLocks noGrp="1"/>
           </p:cNvSpPr>
@@ -524,18 +516,13 @@
               <a:rPr lang="en-US"/>
               <a:t>Click to edit Master title style</a:t>
             </a:r>
-          </a:p>
-        </p:txBody>
-      </p:sp>
-      <p:sp>
-        <p:nvSpPr>
-          <p:cNvPr id="3" name="Subtitle 2">
-            <a:extLst>
-              <a:ext uri="{FF2B5EF4-FFF2-40B4-BE49-F238E27FC236}">
-                <a16:creationId xmlns:a16="http://schemas.microsoft.com/office/drawing/2014/main" id="{61744888-454B-0551-C107-4EC0094D4A27}"/>
-              </a:ext>
-            </a:extLst>
-          </p:cNvPr>
+            <a:endParaRPr lang="en-US"/>
+          </a:p>
+        </p:txBody>
+      </p:sp>
+      <p:sp>
+        <p:nvSpPr>
+          <p:cNvPr id="3" name="Subtitle 2"/>
           <p:cNvSpPr>
             <a:spLocks noGrp="1"/>
           </p:cNvSpPr>
@@ -594,18 +581,13 @@
               <a:rPr lang="en-US"/>
               <a:t>Click to edit Master subtitle style</a:t>
             </a:r>
-          </a:p>
-        </p:txBody>
-      </p:sp>
-      <p:sp>
-        <p:nvSpPr>
-          <p:cNvPr id="4" name="Date Placeholder 3">
-            <a:extLst>
-              <a:ext uri="{FF2B5EF4-FFF2-40B4-BE49-F238E27FC236}">
-                <a16:creationId xmlns:a16="http://schemas.microsoft.com/office/drawing/2014/main" id="{B25937FE-84A2-F099-2F53-5ADB9DF06A70}"/>
-              </a:ext>
-            </a:extLst>
-          </p:cNvPr>
+            <a:endParaRPr lang="en-US"/>
+          </a:p>
+        </p:txBody>
+      </p:sp>
+      <p:sp>
+        <p:nvSpPr>
+          <p:cNvPr id="4" name="Date Placeholder 3"/>
           <p:cNvSpPr>
             <a:spLocks noGrp="1"/>
           </p:cNvSpPr>
@@ -620,7 +602,6 @@
           <a:p>
             <a:fld id="{A6797769-11AF-4B13-9480-5464F4E8F14E}" type="datetimeFigureOut">
               <a:rPr lang="en-US" smtClean="0"/>
-              <a:t>18-Sep-26</a:t>
             </a:fld>
             <a:endParaRPr lang="en-US" dirty="0"/>
           </a:p>
@@ -628,13 +609,7 @@
       </p:sp>
       <p:sp>
         <p:nvSpPr>
-          <p:cNvPr id="5" name="Footer Placeholder 4">
-            <a:extLst>
-              <a:ext uri="{FF2B5EF4-FFF2-40B4-BE49-F238E27FC236}">
-                <a16:creationId xmlns:a16="http://schemas.microsoft.com/office/drawing/2014/main" id="{650D33D9-7DC6-16BB-D2E6-632A4F103CF3}"/>
-              </a:ext>
-            </a:extLst>
-          </p:cNvPr>
+          <p:cNvPr id="5" name="Footer Placeholder 4"/>
           <p:cNvSpPr>
             <a:spLocks noGrp="1"/>
           </p:cNvSpPr>
@@ -653,13 +628,7 @@
       </p:sp>
       <p:sp>
         <p:nvSpPr>
-          <p:cNvPr id="6" name="Slide Number Placeholder 5">
-            <a:extLst>
-              <a:ext uri="{FF2B5EF4-FFF2-40B4-BE49-F238E27FC236}">
-                <a16:creationId xmlns:a16="http://schemas.microsoft.com/office/drawing/2014/main" id="{D26F8DD2-ACC0-A31C-2394-E15F64B38456}"/>
-              </a:ext>
-            </a:extLst>
-          </p:cNvPr>
+          <p:cNvPr id="6" name="Slide Number Placeholder 5"/>
           <p:cNvSpPr>
             <a:spLocks noGrp="1"/>
           </p:cNvSpPr>
@@ -674,18 +643,12 @@
           <a:p>
             <a:fld id="{BB466C3F-FEFB-43B6-A316-8E9E30C0FA08}" type="slidenum">
               <a:rPr lang="en-US" smtClean="0"/>
-              <a:t>‹#›</a:t>
             </a:fld>
             <a:endParaRPr lang="en-US" dirty="0"/>
           </a:p>
         </p:txBody>
       </p:sp>
     </p:spTree>
-    <p:extLst>
-      <p:ext uri="{BB962C8B-B14F-4D97-AF65-F5344CB8AC3E}">
-        <p14:creationId xmlns:p14="http://schemas.microsoft.com/office/powerpoint/2010/main" val="14314103"/>
-      </p:ext>
-    </p:extLst>
   </p:cSld>
   <p:clrMapOvr>
     <a:masterClrMapping/>
@@ -712,13 +675,7 @@
       </p:grpSpPr>
       <p:sp>
         <p:nvSpPr>
-          <p:cNvPr id="2" name="Title 1">
-            <a:extLst>
-              <a:ext uri="{FF2B5EF4-FFF2-40B4-BE49-F238E27FC236}">
-                <a16:creationId xmlns:a16="http://schemas.microsoft.com/office/drawing/2014/main" id="{DAF57F48-0933-D1BB-DF02-59BB1244C8E8}"/>
-              </a:ext>
-            </a:extLst>
-          </p:cNvPr>
+          <p:cNvPr id="2" name="Title 1"/>
           <p:cNvSpPr>
             <a:spLocks noGrp="1"/>
           </p:cNvSpPr>
@@ -735,18 +692,13 @@
               <a:rPr lang="en-US"/>
               <a:t>Click to edit Master title style</a:t>
             </a:r>
-          </a:p>
-        </p:txBody>
-      </p:sp>
-      <p:sp>
-        <p:nvSpPr>
-          <p:cNvPr id="3" name="Vertical Text Placeholder 2">
-            <a:extLst>
-              <a:ext uri="{FF2B5EF4-FFF2-40B4-BE49-F238E27FC236}">
-                <a16:creationId xmlns:a16="http://schemas.microsoft.com/office/drawing/2014/main" id="{D0B2BB52-253B-09B1-A6FB-BB8E367D5B4C}"/>
-              </a:ext>
-            </a:extLst>
-          </p:cNvPr>
+            <a:endParaRPr lang="en-US"/>
+          </a:p>
+        </p:txBody>
+      </p:sp>
+      <p:sp>
+        <p:nvSpPr>
+          <p:cNvPr id="3" name="Vertical Text Placeholder 2"/>
           <p:cNvSpPr>
             <a:spLocks noGrp="1"/>
           </p:cNvSpPr>
@@ -764,6 +716,7 @@
               <a:rPr lang="en-US"/>
               <a:t>Click to edit Master text styles</a:t>
             </a:r>
+            <a:endParaRPr lang="en-US"/>
           </a:p>
           <a:p>
             <a:pPr lvl="1"/>
@@ -771,6 +724,7 @@
               <a:rPr lang="en-US"/>
               <a:t>Second level</a:t>
             </a:r>
+            <a:endParaRPr lang="en-US"/>
           </a:p>
           <a:p>
             <a:pPr lvl="2"/>
@@ -778,6 +732,7 @@
               <a:rPr lang="en-US"/>
               <a:t>Third level</a:t>
             </a:r>
+            <a:endParaRPr lang="en-US"/>
           </a:p>
           <a:p>
             <a:pPr lvl="3"/>
@@ -785,6 +740,7 @@
               <a:rPr lang="en-US"/>
               <a:t>Fourth level</a:t>
             </a:r>
+            <a:endParaRPr lang="en-US"/>
           </a:p>
           <a:p>
             <a:pPr lvl="4"/>
@@ -792,18 +748,13 @@
               <a:rPr lang="en-US"/>
               <a:t>Fifth level</a:t>
             </a:r>
-          </a:p>
-        </p:txBody>
-      </p:sp>
-      <p:sp>
-        <p:nvSpPr>
-          <p:cNvPr id="4" name="Date Placeholder 3">
-            <a:extLst>
-              <a:ext uri="{FF2B5EF4-FFF2-40B4-BE49-F238E27FC236}">
-                <a16:creationId xmlns:a16="http://schemas.microsoft.com/office/drawing/2014/main" id="{C02AF948-D669-9A44-F0BD-765A0A849759}"/>
-              </a:ext>
-            </a:extLst>
-          </p:cNvPr>
+            <a:endParaRPr lang="en-US"/>
+          </a:p>
+        </p:txBody>
+      </p:sp>
+      <p:sp>
+        <p:nvSpPr>
+          <p:cNvPr id="4" name="Date Placeholder 3"/>
           <p:cNvSpPr>
             <a:spLocks noGrp="1"/>
           </p:cNvSpPr>
@@ -818,7 +769,6 @@
           <a:p>
             <a:fld id="{A6797769-11AF-4B13-9480-5464F4E8F14E}" type="datetimeFigureOut">
               <a:rPr lang="en-US" smtClean="0"/>
-              <a:t>18-Sep-26</a:t>
             </a:fld>
             <a:endParaRPr lang="en-US" dirty="0"/>
           </a:p>
@@ -826,13 +776,7 @@
       </p:sp>
       <p:sp>
         <p:nvSpPr>
-          <p:cNvPr id="5" name="Footer Placeholder 4">
-            <a:extLst>
-              <a:ext uri="{FF2B5EF4-FFF2-40B4-BE49-F238E27FC236}">
-                <a16:creationId xmlns:a16="http://schemas.microsoft.com/office/drawing/2014/main" id="{847A7005-B124-9CF5-57C7-610FA5D505E9}"/>
-              </a:ext>
-            </a:extLst>
-          </p:cNvPr>
+          <p:cNvPr id="5" name="Footer Placeholder 4"/>
           <p:cNvSpPr>
             <a:spLocks noGrp="1"/>
           </p:cNvSpPr>
@@ -851,13 +795,7 @@
       </p:sp>
       <p:sp>
         <p:nvSpPr>
-          <p:cNvPr id="6" name="Slide Number Placeholder 5">
-            <a:extLst>
-              <a:ext uri="{FF2B5EF4-FFF2-40B4-BE49-F238E27FC236}">
-                <a16:creationId xmlns:a16="http://schemas.microsoft.com/office/drawing/2014/main" id="{7A193C09-35AD-D0EA-7094-5F242CC52A99}"/>
-              </a:ext>
-            </a:extLst>
-          </p:cNvPr>
+          <p:cNvPr id="6" name="Slide Number Placeholder 5"/>
           <p:cNvSpPr>
             <a:spLocks noGrp="1"/>
           </p:cNvSpPr>
@@ -872,18 +810,12 @@
           <a:p>
             <a:fld id="{BB466C3F-FEFB-43B6-A316-8E9E30C0FA08}" type="slidenum">
               <a:rPr lang="en-US" smtClean="0"/>
-              <a:t>‹#›</a:t>
             </a:fld>
             <a:endParaRPr lang="en-US" dirty="0"/>
           </a:p>
         </p:txBody>
       </p:sp>
     </p:spTree>
-    <p:extLst>
-      <p:ext uri="{BB962C8B-B14F-4D97-AF65-F5344CB8AC3E}">
-        <p14:creationId xmlns:p14="http://schemas.microsoft.com/office/powerpoint/2010/main" val="2609184896"/>
-      </p:ext>
-    </p:extLst>
   </p:cSld>
   <p:clrMapOvr>
     <a:masterClrMapping/>
@@ -910,13 +842,7 @@
       </p:grpSpPr>
       <p:sp>
         <p:nvSpPr>
-          <p:cNvPr id="2" name="Vertical Title 1">
-            <a:extLst>
-              <a:ext uri="{FF2B5EF4-FFF2-40B4-BE49-F238E27FC236}">
-                <a16:creationId xmlns:a16="http://schemas.microsoft.com/office/drawing/2014/main" id="{5F915E26-E492-37B9-3171-E053DA9A302C}"/>
-              </a:ext>
-            </a:extLst>
-          </p:cNvPr>
+          <p:cNvPr id="2" name="Vertical Title 1"/>
           <p:cNvSpPr>
             <a:spLocks noGrp="1"/>
           </p:cNvSpPr>
@@ -938,18 +864,13 @@
               <a:rPr lang="en-US"/>
               <a:t>Click to edit Master title style</a:t>
             </a:r>
-          </a:p>
-        </p:txBody>
-      </p:sp>
-      <p:sp>
-        <p:nvSpPr>
-          <p:cNvPr id="3" name="Vertical Text Placeholder 2">
-            <a:extLst>
-              <a:ext uri="{FF2B5EF4-FFF2-40B4-BE49-F238E27FC236}">
-                <a16:creationId xmlns:a16="http://schemas.microsoft.com/office/drawing/2014/main" id="{F3B93C38-EA30-ABC4-DA8F-7BAD8BA7051D}"/>
-              </a:ext>
-            </a:extLst>
-          </p:cNvPr>
+            <a:endParaRPr lang="en-US"/>
+          </a:p>
+        </p:txBody>
+      </p:sp>
+      <p:sp>
+        <p:nvSpPr>
+          <p:cNvPr id="3" name="Vertical Text Placeholder 2"/>
           <p:cNvSpPr>
             <a:spLocks noGrp="1"/>
           </p:cNvSpPr>
@@ -972,6 +893,7 @@
               <a:rPr lang="en-US"/>
               <a:t>Click to edit Master text styles</a:t>
             </a:r>
+            <a:endParaRPr lang="en-US"/>
           </a:p>
           <a:p>
             <a:pPr lvl="1"/>
@@ -979,6 +901,7 @@
               <a:rPr lang="en-US"/>
               <a:t>Second level</a:t>
             </a:r>
+            <a:endParaRPr lang="en-US"/>
           </a:p>
           <a:p>
             <a:pPr lvl="2"/>
@@ -986,6 +909,7 @@
               <a:rPr lang="en-US"/>
               <a:t>Third level</a:t>
             </a:r>
+            <a:endParaRPr lang="en-US"/>
           </a:p>
           <a:p>
             <a:pPr lvl="3"/>
@@ -993,6 +917,7 @@
               <a:rPr lang="en-US"/>
               <a:t>Fourth level</a:t>
             </a:r>
+            <a:endParaRPr lang="en-US"/>
           </a:p>
           <a:p>
             <a:pPr lvl="4"/>
@@ -1000,18 +925,13 @@
               <a:rPr lang="en-US"/>
               <a:t>Fifth level</a:t>
             </a:r>
-          </a:p>
-        </p:txBody>
-      </p:sp>
-      <p:sp>
-        <p:nvSpPr>
-          <p:cNvPr id="4" name="Date Placeholder 3">
-            <a:extLst>
-              <a:ext uri="{FF2B5EF4-FFF2-40B4-BE49-F238E27FC236}">
-                <a16:creationId xmlns:a16="http://schemas.microsoft.com/office/drawing/2014/main" id="{E8445767-8D83-4306-5905-C07334ACE467}"/>
-              </a:ext>
-            </a:extLst>
-          </p:cNvPr>
+            <a:endParaRPr lang="en-US"/>
+          </a:p>
+        </p:txBody>
+      </p:sp>
+      <p:sp>
+        <p:nvSpPr>
+          <p:cNvPr id="4" name="Date Placeholder 3"/>
           <p:cNvSpPr>
             <a:spLocks noGrp="1"/>
           </p:cNvSpPr>
@@ -1026,7 +946,6 @@
           <a:p>
             <a:fld id="{A6797769-11AF-4B13-9480-5464F4E8F14E}" type="datetimeFigureOut">
               <a:rPr lang="en-US" smtClean="0"/>
-              <a:t>18-Sep-26</a:t>
             </a:fld>
             <a:endParaRPr lang="en-US" dirty="0"/>
           </a:p>
@@ -1034,13 +953,7 @@
       </p:sp>
       <p:sp>
         <p:nvSpPr>
-          <p:cNvPr id="5" name="Footer Placeholder 4">
-            <a:extLst>
-              <a:ext uri="{FF2B5EF4-FFF2-40B4-BE49-F238E27FC236}">
-                <a16:creationId xmlns:a16="http://schemas.microsoft.com/office/drawing/2014/main" id="{B5E640BD-750E-CB19-3FF2-534247573A37}"/>
-              </a:ext>
-            </a:extLst>
-          </p:cNvPr>
+          <p:cNvPr id="5" name="Footer Placeholder 4"/>
           <p:cNvSpPr>
             <a:spLocks noGrp="1"/>
           </p:cNvSpPr>
@@ -1059,13 +972,7 @@
       </p:sp>
       <p:sp>
         <p:nvSpPr>
-          <p:cNvPr id="6" name="Slide Number Placeholder 5">
-            <a:extLst>
-              <a:ext uri="{FF2B5EF4-FFF2-40B4-BE49-F238E27FC236}">
-                <a16:creationId xmlns:a16="http://schemas.microsoft.com/office/drawing/2014/main" id="{4B463613-310D-8E7C-334C-866B7C28076F}"/>
-              </a:ext>
-            </a:extLst>
-          </p:cNvPr>
+          <p:cNvPr id="6" name="Slide Number Placeholder 5"/>
           <p:cNvSpPr>
             <a:spLocks noGrp="1"/>
           </p:cNvSpPr>
@@ -1080,18 +987,12 @@
           <a:p>
             <a:fld id="{BB466C3F-FEFB-43B6-A316-8E9E30C0FA08}" type="slidenum">
               <a:rPr lang="en-US" smtClean="0"/>
-              <a:t>‹#›</a:t>
             </a:fld>
             <a:endParaRPr lang="en-US" dirty="0"/>
           </a:p>
         </p:txBody>
       </p:sp>
     </p:spTree>
-    <p:extLst>
-      <p:ext uri="{BB962C8B-B14F-4D97-AF65-F5344CB8AC3E}">
-        <p14:creationId xmlns:p14="http://schemas.microsoft.com/office/powerpoint/2010/main" val="4256663174"/>
-      </p:ext>
-    </p:extLst>
   </p:cSld>
   <p:clrMapOvr>
     <a:masterClrMapping/>
@@ -1118,13 +1019,7 @@
       </p:grpSpPr>
       <p:sp>
         <p:nvSpPr>
-          <p:cNvPr id="2" name="Title 1">
-            <a:extLst>
-              <a:ext uri="{FF2B5EF4-FFF2-40B4-BE49-F238E27FC236}">
-                <a16:creationId xmlns:a16="http://schemas.microsoft.com/office/drawing/2014/main" id="{A97694C0-D005-D368-5CC4-BE93A50E7F61}"/>
-              </a:ext>
-            </a:extLst>
-          </p:cNvPr>
+          <p:cNvPr id="2" name="Title 1"/>
           <p:cNvSpPr>
             <a:spLocks noGrp="1"/>
           </p:cNvSpPr>
@@ -1141,18 +1036,13 @@
               <a:rPr lang="en-US"/>
               <a:t>Click to edit Master title style</a:t>
             </a:r>
-          </a:p>
-        </p:txBody>
-      </p:sp>
-      <p:sp>
-        <p:nvSpPr>
-          <p:cNvPr id="3" name="Content Placeholder 2">
-            <a:extLst>
-              <a:ext uri="{FF2B5EF4-FFF2-40B4-BE49-F238E27FC236}">
-                <a16:creationId xmlns:a16="http://schemas.microsoft.com/office/drawing/2014/main" id="{77532C76-E2A7-23D8-BA76-6A3A9221960B}"/>
-              </a:ext>
-            </a:extLst>
-          </p:cNvPr>
+            <a:endParaRPr lang="en-US"/>
+          </a:p>
+        </p:txBody>
+      </p:sp>
+      <p:sp>
+        <p:nvSpPr>
+          <p:cNvPr id="3" name="Content Placeholder 2"/>
           <p:cNvSpPr>
             <a:spLocks noGrp="1"/>
           </p:cNvSpPr>
@@ -1170,6 +1060,7 @@
               <a:rPr lang="en-US"/>
               <a:t>Click to edit Master text styles</a:t>
             </a:r>
+            <a:endParaRPr lang="en-US"/>
           </a:p>
           <a:p>
             <a:pPr lvl="1"/>
@@ -1177,6 +1068,7 @@
               <a:rPr lang="en-US"/>
               <a:t>Second level</a:t>
             </a:r>
+            <a:endParaRPr lang="en-US"/>
           </a:p>
           <a:p>
             <a:pPr lvl="2"/>
@@ -1184,6 +1076,7 @@
               <a:rPr lang="en-US"/>
               <a:t>Third level</a:t>
             </a:r>
+            <a:endParaRPr lang="en-US"/>
           </a:p>
           <a:p>
             <a:pPr lvl="3"/>
@@ -1191,6 +1084,7 @@
               <a:rPr lang="en-US"/>
               <a:t>Fourth level</a:t>
             </a:r>
+            <a:endParaRPr lang="en-US"/>
           </a:p>
           <a:p>
             <a:pPr lvl="4"/>
@@ -1198,18 +1092,13 @@
               <a:rPr lang="en-US"/>
               <a:t>Fifth level</a:t>
             </a:r>
-          </a:p>
-        </p:txBody>
-      </p:sp>
-      <p:sp>
-        <p:nvSpPr>
-          <p:cNvPr id="4" name="Date Placeholder 3">
-            <a:extLst>
-              <a:ext uri="{FF2B5EF4-FFF2-40B4-BE49-F238E27FC236}">
-                <a16:creationId xmlns:a16="http://schemas.microsoft.com/office/drawing/2014/main" id="{50AF855A-E96C-BA2E-97E3-B6E055B6DE59}"/>
-              </a:ext>
-            </a:extLst>
-          </p:cNvPr>
+            <a:endParaRPr lang="en-US"/>
+          </a:p>
+        </p:txBody>
+      </p:sp>
+      <p:sp>
+        <p:nvSpPr>
+          <p:cNvPr id="4" name="Date Placeholder 3"/>
           <p:cNvSpPr>
             <a:spLocks noGrp="1"/>
           </p:cNvSpPr>
@@ -1224,7 +1113,6 @@
           <a:p>
             <a:fld id="{A6797769-11AF-4B13-9480-5464F4E8F14E}" type="datetimeFigureOut">
               <a:rPr lang="en-US" smtClean="0"/>
-              <a:t>18-Sep-26</a:t>
             </a:fld>
             <a:endParaRPr lang="en-US" dirty="0"/>
           </a:p>
@@ -1232,13 +1120,7 @@
       </p:sp>
       <p:sp>
         <p:nvSpPr>
-          <p:cNvPr id="5" name="Footer Placeholder 4">
-            <a:extLst>
-              <a:ext uri="{FF2B5EF4-FFF2-40B4-BE49-F238E27FC236}">
-                <a16:creationId xmlns:a16="http://schemas.microsoft.com/office/drawing/2014/main" id="{7EE5DFE5-3700-0F89-39BA-C559E9A49D64}"/>
-              </a:ext>
-            </a:extLst>
-          </p:cNvPr>
+          <p:cNvPr id="5" name="Footer Placeholder 4"/>
           <p:cNvSpPr>
             <a:spLocks noGrp="1"/>
           </p:cNvSpPr>
@@ -1257,13 +1139,7 @@
       </p:sp>
       <p:sp>
         <p:nvSpPr>
-          <p:cNvPr id="6" name="Slide Number Placeholder 5">
-            <a:extLst>
-              <a:ext uri="{FF2B5EF4-FFF2-40B4-BE49-F238E27FC236}">
-                <a16:creationId xmlns:a16="http://schemas.microsoft.com/office/drawing/2014/main" id="{DBE56943-360A-A9F4-4FEA-AB52F2DFC582}"/>
-              </a:ext>
-            </a:extLst>
-          </p:cNvPr>
+          <p:cNvPr id="6" name="Slide Number Placeholder 5"/>
           <p:cNvSpPr>
             <a:spLocks noGrp="1"/>
           </p:cNvSpPr>
@@ -1278,18 +1154,12 @@
           <a:p>
             <a:fld id="{BB466C3F-FEFB-43B6-A316-8E9E30C0FA08}" type="slidenum">
               <a:rPr lang="en-US" smtClean="0"/>
-              <a:t>‹#›</a:t>
             </a:fld>
             <a:endParaRPr lang="en-US" dirty="0"/>
           </a:p>
         </p:txBody>
       </p:sp>
     </p:spTree>
-    <p:extLst>
-      <p:ext uri="{BB962C8B-B14F-4D97-AF65-F5344CB8AC3E}">
-        <p14:creationId xmlns:p14="http://schemas.microsoft.com/office/powerpoint/2010/main" val="1618891272"/>
-      </p:ext>
-    </p:extLst>
   </p:cSld>
   <p:clrMapOvr>
     <a:masterClrMapping/>
@@ -1316,13 +1186,7 @@
       </p:grpSpPr>
       <p:sp>
         <p:nvSpPr>
-          <p:cNvPr id="2" name="Title 1">
-            <a:extLst>
-              <a:ext uri="{FF2B5EF4-FFF2-40B4-BE49-F238E27FC236}">
-                <a16:creationId xmlns:a16="http://schemas.microsoft.com/office/drawing/2014/main" id="{7D2CE716-C97E-323E-14F7-F889F02FC9C4}"/>
-              </a:ext>
-            </a:extLst>
-          </p:cNvPr>
+          <p:cNvPr id="2" name="Title 1"/>
           <p:cNvSpPr>
             <a:spLocks noGrp="1"/>
           </p:cNvSpPr>
@@ -1348,18 +1212,13 @@
               <a:rPr lang="en-US"/>
               <a:t>Click to edit Master title style</a:t>
             </a:r>
-          </a:p>
-        </p:txBody>
-      </p:sp>
-      <p:sp>
-        <p:nvSpPr>
-          <p:cNvPr id="3" name="Text Placeholder 2">
-            <a:extLst>
-              <a:ext uri="{FF2B5EF4-FFF2-40B4-BE49-F238E27FC236}">
-                <a16:creationId xmlns:a16="http://schemas.microsoft.com/office/drawing/2014/main" id="{EB779997-ADEC-A6FF-C611-93E0F75BE84E}"/>
-              </a:ext>
-            </a:extLst>
-          </p:cNvPr>
+            <a:endParaRPr lang="en-US"/>
+          </a:p>
+        </p:txBody>
+      </p:sp>
+      <p:sp>
+        <p:nvSpPr>
+          <p:cNvPr id="3" name="Text Placeholder 2"/>
           <p:cNvSpPr>
             <a:spLocks noGrp="1"/>
           </p:cNvSpPr>
@@ -1473,18 +1332,13 @@
               <a:rPr lang="en-US"/>
               <a:t>Click to edit Master text styles</a:t>
             </a:r>
-          </a:p>
-        </p:txBody>
-      </p:sp>
-      <p:sp>
-        <p:nvSpPr>
-          <p:cNvPr id="4" name="Date Placeholder 3">
-            <a:extLst>
-              <a:ext uri="{FF2B5EF4-FFF2-40B4-BE49-F238E27FC236}">
-                <a16:creationId xmlns:a16="http://schemas.microsoft.com/office/drawing/2014/main" id="{D896EBF7-2223-EE5A-A3EE-419C8247188B}"/>
-              </a:ext>
-            </a:extLst>
-          </p:cNvPr>
+            <a:endParaRPr lang="en-US"/>
+          </a:p>
+        </p:txBody>
+      </p:sp>
+      <p:sp>
+        <p:nvSpPr>
+          <p:cNvPr id="4" name="Date Placeholder 3"/>
           <p:cNvSpPr>
             <a:spLocks noGrp="1"/>
           </p:cNvSpPr>
@@ -1499,7 +1353,6 @@
           <a:p>
             <a:fld id="{A6797769-11AF-4B13-9480-5464F4E8F14E}" type="datetimeFigureOut">
               <a:rPr lang="en-US" smtClean="0"/>
-              <a:t>18-Sep-26</a:t>
             </a:fld>
             <a:endParaRPr lang="en-US" dirty="0"/>
           </a:p>
@@ -1507,13 +1360,7 @@
       </p:sp>
       <p:sp>
         <p:nvSpPr>
-          <p:cNvPr id="5" name="Footer Placeholder 4">
-            <a:extLst>
-              <a:ext uri="{FF2B5EF4-FFF2-40B4-BE49-F238E27FC236}">
-                <a16:creationId xmlns:a16="http://schemas.microsoft.com/office/drawing/2014/main" id="{A5777AFA-AE8A-9B88-07B6-E5B277B8C1DC}"/>
-              </a:ext>
-            </a:extLst>
-          </p:cNvPr>
+          <p:cNvPr id="5" name="Footer Placeholder 4"/>
           <p:cNvSpPr>
             <a:spLocks noGrp="1"/>
           </p:cNvSpPr>
@@ -1532,13 +1379,7 @@
       </p:sp>
       <p:sp>
         <p:nvSpPr>
-          <p:cNvPr id="6" name="Slide Number Placeholder 5">
-            <a:extLst>
-              <a:ext uri="{FF2B5EF4-FFF2-40B4-BE49-F238E27FC236}">
-                <a16:creationId xmlns:a16="http://schemas.microsoft.com/office/drawing/2014/main" id="{E94FE762-12BA-3F65-BA4A-EA2876EF1250}"/>
-              </a:ext>
-            </a:extLst>
-          </p:cNvPr>
+          <p:cNvPr id="6" name="Slide Number Placeholder 5"/>
           <p:cNvSpPr>
             <a:spLocks noGrp="1"/>
           </p:cNvSpPr>
@@ -1553,18 +1394,12 @@
           <a:p>
             <a:fld id="{BB466C3F-FEFB-43B6-A316-8E9E30C0FA08}" type="slidenum">
               <a:rPr lang="en-US" smtClean="0"/>
-              <a:t>‹#›</a:t>
             </a:fld>
             <a:endParaRPr lang="en-US" dirty="0"/>
           </a:p>
         </p:txBody>
       </p:sp>
     </p:spTree>
-    <p:extLst>
-      <p:ext uri="{BB962C8B-B14F-4D97-AF65-F5344CB8AC3E}">
-        <p14:creationId xmlns:p14="http://schemas.microsoft.com/office/powerpoint/2010/main" val="1455014387"/>
-      </p:ext>
-    </p:extLst>
   </p:cSld>
   <p:clrMapOvr>
     <a:masterClrMapping/>
@@ -1591,13 +1426,7 @@
       </p:grpSpPr>
       <p:sp>
         <p:nvSpPr>
-          <p:cNvPr id="2" name="Title 1">
-            <a:extLst>
-              <a:ext uri="{FF2B5EF4-FFF2-40B4-BE49-F238E27FC236}">
-                <a16:creationId xmlns:a16="http://schemas.microsoft.com/office/drawing/2014/main" id="{732C59A4-C493-2F60-7A8B-B5476B713321}"/>
-              </a:ext>
-            </a:extLst>
-          </p:cNvPr>
+          <p:cNvPr id="2" name="Title 1"/>
           <p:cNvSpPr>
             <a:spLocks noGrp="1"/>
           </p:cNvSpPr>
@@ -1614,18 +1443,13 @@
               <a:rPr lang="en-US"/>
               <a:t>Click to edit Master title style</a:t>
             </a:r>
-          </a:p>
-        </p:txBody>
-      </p:sp>
-      <p:sp>
-        <p:nvSpPr>
-          <p:cNvPr id="3" name="Content Placeholder 2">
-            <a:extLst>
-              <a:ext uri="{FF2B5EF4-FFF2-40B4-BE49-F238E27FC236}">
-                <a16:creationId xmlns:a16="http://schemas.microsoft.com/office/drawing/2014/main" id="{F02DCB82-1358-1D1F-E686-B0B49175BD38}"/>
-              </a:ext>
-            </a:extLst>
-          </p:cNvPr>
+            <a:endParaRPr lang="en-US"/>
+          </a:p>
+        </p:txBody>
+      </p:sp>
+      <p:sp>
+        <p:nvSpPr>
+          <p:cNvPr id="3" name="Content Placeholder 2"/>
           <p:cNvSpPr>
             <a:spLocks noGrp="1"/>
           </p:cNvSpPr>
@@ -1648,6 +1472,7 @@
               <a:rPr lang="en-US"/>
               <a:t>Click to edit Master text styles</a:t>
             </a:r>
+            <a:endParaRPr lang="en-US"/>
           </a:p>
           <a:p>
             <a:pPr lvl="1"/>
@@ -1655,6 +1480,7 @@
               <a:rPr lang="en-US"/>
               <a:t>Second level</a:t>
             </a:r>
+            <a:endParaRPr lang="en-US"/>
           </a:p>
           <a:p>
             <a:pPr lvl="2"/>
@@ -1662,6 +1488,7 @@
               <a:rPr lang="en-US"/>
               <a:t>Third level</a:t>
             </a:r>
+            <a:endParaRPr lang="en-US"/>
           </a:p>
           <a:p>
             <a:pPr lvl="3"/>
@@ -1669,6 +1496,7 @@
               <a:rPr lang="en-US"/>
               <a:t>Fourth level</a:t>
             </a:r>
+            <a:endParaRPr lang="en-US"/>
           </a:p>
           <a:p>
             <a:pPr lvl="4"/>
@@ -1676,18 +1504,13 @@
               <a:rPr lang="en-US"/>
               <a:t>Fifth level</a:t>
             </a:r>
-          </a:p>
-        </p:txBody>
-      </p:sp>
-      <p:sp>
-        <p:nvSpPr>
-          <p:cNvPr id="4" name="Content Placeholder 3">
-            <a:extLst>
-              <a:ext uri="{FF2B5EF4-FFF2-40B4-BE49-F238E27FC236}">
-                <a16:creationId xmlns:a16="http://schemas.microsoft.com/office/drawing/2014/main" id="{794592E1-D297-194E-EE18-C6981732ACE8}"/>
-              </a:ext>
-            </a:extLst>
-          </p:cNvPr>
+            <a:endParaRPr lang="en-US"/>
+          </a:p>
+        </p:txBody>
+      </p:sp>
+      <p:sp>
+        <p:nvSpPr>
+          <p:cNvPr id="4" name="Content Placeholder 3"/>
           <p:cNvSpPr>
             <a:spLocks noGrp="1"/>
           </p:cNvSpPr>
@@ -1710,6 +1533,7 @@
               <a:rPr lang="en-US"/>
               <a:t>Click to edit Master text styles</a:t>
             </a:r>
+            <a:endParaRPr lang="en-US"/>
           </a:p>
           <a:p>
             <a:pPr lvl="1"/>
@@ -1717,6 +1541,7 @@
               <a:rPr lang="en-US"/>
               <a:t>Second level</a:t>
             </a:r>
+            <a:endParaRPr lang="en-US"/>
           </a:p>
           <a:p>
             <a:pPr lvl="2"/>
@@ -1724,6 +1549,7 @@
               <a:rPr lang="en-US"/>
               <a:t>Third level</a:t>
             </a:r>
+            <a:endParaRPr lang="en-US"/>
           </a:p>
           <a:p>
             <a:pPr lvl="3"/>
@@ -1731,6 +1557,7 @@
               <a:rPr lang="en-US"/>
               <a:t>Fourth level</a:t>
             </a:r>
+            <a:endParaRPr lang="en-US"/>
           </a:p>
           <a:p>
             <a:pPr lvl="4"/>
@@ -1738,18 +1565,13 @@
               <a:rPr lang="en-US"/>
               <a:t>Fifth level</a:t>
             </a:r>
-          </a:p>
-        </p:txBody>
-      </p:sp>
-      <p:sp>
-        <p:nvSpPr>
-          <p:cNvPr id="5" name="Date Placeholder 4">
-            <a:extLst>
-              <a:ext uri="{FF2B5EF4-FFF2-40B4-BE49-F238E27FC236}">
-                <a16:creationId xmlns:a16="http://schemas.microsoft.com/office/drawing/2014/main" id="{78C4AC21-0D99-38BF-D26C-07AE9C689D3F}"/>
-              </a:ext>
-            </a:extLst>
-          </p:cNvPr>
+            <a:endParaRPr lang="en-US"/>
+          </a:p>
+        </p:txBody>
+      </p:sp>
+      <p:sp>
+        <p:nvSpPr>
+          <p:cNvPr id="5" name="Date Placeholder 4"/>
           <p:cNvSpPr>
             <a:spLocks noGrp="1"/>
           </p:cNvSpPr>
@@ -1764,7 +1586,6 @@
           <a:p>
             <a:fld id="{A6797769-11AF-4B13-9480-5464F4E8F14E}" type="datetimeFigureOut">
               <a:rPr lang="en-US" smtClean="0"/>
-              <a:t>18-Sep-26</a:t>
             </a:fld>
             <a:endParaRPr lang="en-US" dirty="0"/>
           </a:p>
@@ -1772,13 +1593,7 @@
       </p:sp>
       <p:sp>
         <p:nvSpPr>
-          <p:cNvPr id="6" name="Footer Placeholder 5">
-            <a:extLst>
-              <a:ext uri="{FF2B5EF4-FFF2-40B4-BE49-F238E27FC236}">
-                <a16:creationId xmlns:a16="http://schemas.microsoft.com/office/drawing/2014/main" id="{22045CE5-F74F-D4DE-A224-D048F9F49A09}"/>
-              </a:ext>
-            </a:extLst>
-          </p:cNvPr>
+          <p:cNvPr id="6" name="Footer Placeholder 5"/>
           <p:cNvSpPr>
             <a:spLocks noGrp="1"/>
           </p:cNvSpPr>
@@ -1797,13 +1612,7 @@
       </p:sp>
       <p:sp>
         <p:nvSpPr>
-          <p:cNvPr id="7" name="Slide Number Placeholder 6">
-            <a:extLst>
-              <a:ext uri="{FF2B5EF4-FFF2-40B4-BE49-F238E27FC236}">
-                <a16:creationId xmlns:a16="http://schemas.microsoft.com/office/drawing/2014/main" id="{6DE19622-5351-AE98-2150-D581780B8FD3}"/>
-              </a:ext>
-            </a:extLst>
-          </p:cNvPr>
+          <p:cNvPr id="7" name="Slide Number Placeholder 6"/>
           <p:cNvSpPr>
             <a:spLocks noGrp="1"/>
           </p:cNvSpPr>
@@ -1818,18 +1627,12 @@
           <a:p>
             <a:fld id="{BB466C3F-FEFB-43B6-A316-8E9E30C0FA08}" type="slidenum">
               <a:rPr lang="en-US" smtClean="0"/>
-              <a:t>‹#›</a:t>
             </a:fld>
             <a:endParaRPr lang="en-US" dirty="0"/>
           </a:p>
         </p:txBody>
       </p:sp>
     </p:spTree>
-    <p:extLst>
-      <p:ext uri="{BB962C8B-B14F-4D97-AF65-F5344CB8AC3E}">
-        <p14:creationId xmlns:p14="http://schemas.microsoft.com/office/powerpoint/2010/main" val="855675897"/>
-      </p:ext>
-    </p:extLst>
   </p:cSld>
   <p:clrMapOvr>
     <a:masterClrMapping/>
@@ -1856,13 +1659,7 @@
       </p:grpSpPr>
       <p:sp>
         <p:nvSpPr>
-          <p:cNvPr id="2" name="Title 1">
-            <a:extLst>
-              <a:ext uri="{FF2B5EF4-FFF2-40B4-BE49-F238E27FC236}">
-                <a16:creationId xmlns:a16="http://schemas.microsoft.com/office/drawing/2014/main" id="{5CD05CA8-D84E-3A14-BCBE-AC37613A5B39}"/>
-              </a:ext>
-            </a:extLst>
-          </p:cNvPr>
+          <p:cNvPr id="2" name="Title 1"/>
           <p:cNvSpPr>
             <a:spLocks noGrp="1"/>
           </p:cNvSpPr>
@@ -1884,18 +1681,13 @@
               <a:rPr lang="en-US"/>
               <a:t>Click to edit Master title style</a:t>
             </a:r>
-          </a:p>
-        </p:txBody>
-      </p:sp>
-      <p:sp>
-        <p:nvSpPr>
-          <p:cNvPr id="3" name="Text Placeholder 2">
-            <a:extLst>
-              <a:ext uri="{FF2B5EF4-FFF2-40B4-BE49-F238E27FC236}">
-                <a16:creationId xmlns:a16="http://schemas.microsoft.com/office/drawing/2014/main" id="{B937C559-BED2-AAAE-9454-77F99DB1DD03}"/>
-              </a:ext>
-            </a:extLst>
-          </p:cNvPr>
+            <a:endParaRPr lang="en-US"/>
+          </a:p>
+        </p:txBody>
+      </p:sp>
+      <p:sp>
+        <p:nvSpPr>
+          <p:cNvPr id="3" name="Text Placeholder 2"/>
           <p:cNvSpPr>
             <a:spLocks noGrp="1"/>
           </p:cNvSpPr>
@@ -1955,18 +1747,13 @@
               <a:rPr lang="en-US"/>
               <a:t>Click to edit Master text styles</a:t>
             </a:r>
-          </a:p>
-        </p:txBody>
-      </p:sp>
-      <p:sp>
-        <p:nvSpPr>
-          <p:cNvPr id="4" name="Content Placeholder 3">
-            <a:extLst>
-              <a:ext uri="{FF2B5EF4-FFF2-40B4-BE49-F238E27FC236}">
-                <a16:creationId xmlns:a16="http://schemas.microsoft.com/office/drawing/2014/main" id="{2EFE15D1-0CE9-4024-F7B0-08738DD3023D}"/>
-              </a:ext>
-            </a:extLst>
-          </p:cNvPr>
+            <a:endParaRPr lang="en-US"/>
+          </a:p>
+        </p:txBody>
+      </p:sp>
+      <p:sp>
+        <p:nvSpPr>
+          <p:cNvPr id="4" name="Content Placeholder 3"/>
           <p:cNvSpPr>
             <a:spLocks noGrp="1"/>
           </p:cNvSpPr>
@@ -1989,6 +1776,7 @@
               <a:rPr lang="en-US"/>
               <a:t>Click to edit Master text styles</a:t>
             </a:r>
+            <a:endParaRPr lang="en-US"/>
           </a:p>
           <a:p>
             <a:pPr lvl="1"/>
@@ -1996,6 +1784,7 @@
               <a:rPr lang="en-US"/>
               <a:t>Second level</a:t>
             </a:r>
+            <a:endParaRPr lang="en-US"/>
           </a:p>
           <a:p>
             <a:pPr lvl="2"/>
@@ -2003,6 +1792,7 @@
               <a:rPr lang="en-US"/>
               <a:t>Third level</a:t>
             </a:r>
+            <a:endParaRPr lang="en-US"/>
           </a:p>
           <a:p>
             <a:pPr lvl="3"/>
@@ -2010,6 +1800,7 @@
               <a:rPr lang="en-US"/>
               <a:t>Fourth level</a:t>
             </a:r>
+            <a:endParaRPr lang="en-US"/>
           </a:p>
           <a:p>
             <a:pPr lvl="4"/>
@@ -2017,18 +1808,13 @@
               <a:rPr lang="en-US"/>
               <a:t>Fifth level</a:t>
             </a:r>
-          </a:p>
-        </p:txBody>
-      </p:sp>
-      <p:sp>
-        <p:nvSpPr>
-          <p:cNvPr id="5" name="Text Placeholder 4">
-            <a:extLst>
-              <a:ext uri="{FF2B5EF4-FFF2-40B4-BE49-F238E27FC236}">
-                <a16:creationId xmlns:a16="http://schemas.microsoft.com/office/drawing/2014/main" id="{5A779388-E4B5-9952-AA46-3DC018E0ECFA}"/>
-              </a:ext>
-            </a:extLst>
-          </p:cNvPr>
+            <a:endParaRPr lang="en-US"/>
+          </a:p>
+        </p:txBody>
+      </p:sp>
+      <p:sp>
+        <p:nvSpPr>
+          <p:cNvPr id="5" name="Text Placeholder 4"/>
           <p:cNvSpPr>
             <a:spLocks noGrp="1"/>
           </p:cNvSpPr>
@@ -2088,18 +1874,13 @@
               <a:rPr lang="en-US"/>
               <a:t>Click to edit Master text styles</a:t>
             </a:r>
-          </a:p>
-        </p:txBody>
-      </p:sp>
-      <p:sp>
-        <p:nvSpPr>
-          <p:cNvPr id="6" name="Content Placeholder 5">
-            <a:extLst>
-              <a:ext uri="{FF2B5EF4-FFF2-40B4-BE49-F238E27FC236}">
-                <a16:creationId xmlns:a16="http://schemas.microsoft.com/office/drawing/2014/main" id="{AC5C56E1-88C1-25F6-5A8C-656B778AF579}"/>
-              </a:ext>
-            </a:extLst>
-          </p:cNvPr>
+            <a:endParaRPr lang="en-US"/>
+          </a:p>
+        </p:txBody>
+      </p:sp>
+      <p:sp>
+        <p:nvSpPr>
+          <p:cNvPr id="6" name="Content Placeholder 5"/>
           <p:cNvSpPr>
             <a:spLocks noGrp="1"/>
           </p:cNvSpPr>
@@ -2122,6 +1903,7 @@
               <a:rPr lang="en-US"/>
               <a:t>Click to edit Master text styles</a:t>
             </a:r>
+            <a:endParaRPr lang="en-US"/>
           </a:p>
           <a:p>
             <a:pPr lvl="1"/>
@@ -2129,6 +1911,7 @@
               <a:rPr lang="en-US"/>
               <a:t>Second level</a:t>
             </a:r>
+            <a:endParaRPr lang="en-US"/>
           </a:p>
           <a:p>
             <a:pPr lvl="2"/>
@@ -2136,6 +1919,7 @@
               <a:rPr lang="en-US"/>
               <a:t>Third level</a:t>
             </a:r>
+            <a:endParaRPr lang="en-US"/>
           </a:p>
           <a:p>
             <a:pPr lvl="3"/>
@@ -2143,6 +1927,7 @@
               <a:rPr lang="en-US"/>
               <a:t>Fourth level</a:t>
             </a:r>
+            <a:endParaRPr lang="en-US"/>
           </a:p>
           <a:p>
             <a:pPr lvl="4"/>
@@ -2150,18 +1935,13 @@
               <a:rPr lang="en-US"/>
               <a:t>Fifth level</a:t>
             </a:r>
-          </a:p>
-        </p:txBody>
-      </p:sp>
-      <p:sp>
-        <p:nvSpPr>
-          <p:cNvPr id="7" name="Date Placeholder 6">
-            <a:extLst>
-              <a:ext uri="{FF2B5EF4-FFF2-40B4-BE49-F238E27FC236}">
-                <a16:creationId xmlns:a16="http://schemas.microsoft.com/office/drawing/2014/main" id="{8D10EF09-D61D-712D-5D04-7A8BF2812F6D}"/>
-              </a:ext>
-            </a:extLst>
-          </p:cNvPr>
+            <a:endParaRPr lang="en-US"/>
+          </a:p>
+        </p:txBody>
+      </p:sp>
+      <p:sp>
+        <p:nvSpPr>
+          <p:cNvPr id="7" name="Date Placeholder 6"/>
           <p:cNvSpPr>
             <a:spLocks noGrp="1"/>
           </p:cNvSpPr>
@@ -2176,7 +1956,6 @@
           <a:p>
             <a:fld id="{A6797769-11AF-4B13-9480-5464F4E8F14E}" type="datetimeFigureOut">
               <a:rPr lang="en-US" smtClean="0"/>
-              <a:t>18-Sep-26</a:t>
             </a:fld>
             <a:endParaRPr lang="en-US" dirty="0"/>
           </a:p>
@@ -2184,13 +1963,7 @@
       </p:sp>
       <p:sp>
         <p:nvSpPr>
-          <p:cNvPr id="8" name="Footer Placeholder 7">
-            <a:extLst>
-              <a:ext uri="{FF2B5EF4-FFF2-40B4-BE49-F238E27FC236}">
-                <a16:creationId xmlns:a16="http://schemas.microsoft.com/office/drawing/2014/main" id="{EE713411-0FB1-4D99-55B6-107A0770C3B1}"/>
-              </a:ext>
-            </a:extLst>
-          </p:cNvPr>
+          <p:cNvPr id="8" name="Footer Placeholder 7"/>
           <p:cNvSpPr>
             <a:spLocks noGrp="1"/>
           </p:cNvSpPr>
@@ -2209,13 +1982,7 @@
       </p:sp>
       <p:sp>
         <p:nvSpPr>
-          <p:cNvPr id="9" name="Slide Number Placeholder 8">
-            <a:extLst>
-              <a:ext uri="{FF2B5EF4-FFF2-40B4-BE49-F238E27FC236}">
-                <a16:creationId xmlns:a16="http://schemas.microsoft.com/office/drawing/2014/main" id="{73AEF001-F4CA-27FD-E6D8-E6811B5BA779}"/>
-              </a:ext>
-            </a:extLst>
-          </p:cNvPr>
+          <p:cNvPr id="9" name="Slide Number Placeholder 8"/>
           <p:cNvSpPr>
             <a:spLocks noGrp="1"/>
           </p:cNvSpPr>
@@ -2230,18 +1997,12 @@
           <a:p>
             <a:fld id="{BB466C3F-FEFB-43B6-A316-8E9E30C0FA08}" type="slidenum">
               <a:rPr lang="en-US" smtClean="0"/>
-              <a:t>‹#›</a:t>
             </a:fld>
             <a:endParaRPr lang="en-US" dirty="0"/>
           </a:p>
         </p:txBody>
       </p:sp>
     </p:spTree>
-    <p:extLst>
-      <p:ext uri="{BB962C8B-B14F-4D97-AF65-F5344CB8AC3E}">
-        <p14:creationId xmlns:p14="http://schemas.microsoft.com/office/powerpoint/2010/main" val="4123268913"/>
-      </p:ext>
-    </p:extLst>
   </p:cSld>
   <p:clrMapOvr>
     <a:masterClrMapping/>
@@ -2268,13 +2029,7 @@
       </p:grpSpPr>
       <p:sp>
         <p:nvSpPr>
-          <p:cNvPr id="2" name="Title 1">
-            <a:extLst>
-              <a:ext uri="{FF2B5EF4-FFF2-40B4-BE49-F238E27FC236}">
-                <a16:creationId xmlns:a16="http://schemas.microsoft.com/office/drawing/2014/main" id="{2A9C7D56-0AF2-650F-E096-30BF86F106F4}"/>
-              </a:ext>
-            </a:extLst>
-          </p:cNvPr>
+          <p:cNvPr id="2" name="Title 1"/>
           <p:cNvSpPr>
             <a:spLocks noGrp="1"/>
           </p:cNvSpPr>
@@ -2291,18 +2046,13 @@
               <a:rPr lang="en-US"/>
               <a:t>Click to edit Master title style</a:t>
             </a:r>
-          </a:p>
-        </p:txBody>
-      </p:sp>
-      <p:sp>
-        <p:nvSpPr>
-          <p:cNvPr id="3" name="Date Placeholder 2">
-            <a:extLst>
-              <a:ext uri="{FF2B5EF4-FFF2-40B4-BE49-F238E27FC236}">
-                <a16:creationId xmlns:a16="http://schemas.microsoft.com/office/drawing/2014/main" id="{0F084E46-CBBA-9047-FA8A-8AE29F9165C1}"/>
-              </a:ext>
-            </a:extLst>
-          </p:cNvPr>
+            <a:endParaRPr lang="en-US"/>
+          </a:p>
+        </p:txBody>
+      </p:sp>
+      <p:sp>
+        <p:nvSpPr>
+          <p:cNvPr id="3" name="Date Placeholder 2"/>
           <p:cNvSpPr>
             <a:spLocks noGrp="1"/>
           </p:cNvSpPr>
@@ -2317,7 +2067,6 @@
           <a:p>
             <a:fld id="{A6797769-11AF-4B13-9480-5464F4E8F14E}" type="datetimeFigureOut">
               <a:rPr lang="en-US" smtClean="0"/>
-              <a:t>18-Sep-26</a:t>
             </a:fld>
             <a:endParaRPr lang="en-US" dirty="0"/>
           </a:p>
@@ -2325,13 +2074,7 @@
       </p:sp>
       <p:sp>
         <p:nvSpPr>
-          <p:cNvPr id="4" name="Footer Placeholder 3">
-            <a:extLst>
-              <a:ext uri="{FF2B5EF4-FFF2-40B4-BE49-F238E27FC236}">
-                <a16:creationId xmlns:a16="http://schemas.microsoft.com/office/drawing/2014/main" id="{729A780D-0AF5-5B95-83E3-3DE995AD957F}"/>
-              </a:ext>
-            </a:extLst>
-          </p:cNvPr>
+          <p:cNvPr id="4" name="Footer Placeholder 3"/>
           <p:cNvSpPr>
             <a:spLocks noGrp="1"/>
           </p:cNvSpPr>
@@ -2350,13 +2093,7 @@
       </p:sp>
       <p:sp>
         <p:nvSpPr>
-          <p:cNvPr id="5" name="Slide Number Placeholder 4">
-            <a:extLst>
-              <a:ext uri="{FF2B5EF4-FFF2-40B4-BE49-F238E27FC236}">
-                <a16:creationId xmlns:a16="http://schemas.microsoft.com/office/drawing/2014/main" id="{1CF3E42D-5432-AD79-5128-CB6A3FC0A726}"/>
-              </a:ext>
-            </a:extLst>
-          </p:cNvPr>
+          <p:cNvPr id="5" name="Slide Number Placeholder 4"/>
           <p:cNvSpPr>
             <a:spLocks noGrp="1"/>
           </p:cNvSpPr>
@@ -2371,18 +2108,12 @@
           <a:p>
             <a:fld id="{BB466C3F-FEFB-43B6-A316-8E9E30C0FA08}" type="slidenum">
               <a:rPr lang="en-US" smtClean="0"/>
-              <a:t>‹#›</a:t>
             </a:fld>
             <a:endParaRPr lang="en-US" dirty="0"/>
           </a:p>
         </p:txBody>
       </p:sp>
     </p:spTree>
-    <p:extLst>
-      <p:ext uri="{BB962C8B-B14F-4D97-AF65-F5344CB8AC3E}">
-        <p14:creationId xmlns:p14="http://schemas.microsoft.com/office/powerpoint/2010/main" val="1467414464"/>
-      </p:ext>
-    </p:extLst>
   </p:cSld>
   <p:clrMapOvr>
     <a:masterClrMapping/>
@@ -2409,13 +2140,7 @@
       </p:grpSpPr>
       <p:sp>
         <p:nvSpPr>
-          <p:cNvPr id="2" name="Date Placeholder 1">
-            <a:extLst>
-              <a:ext uri="{FF2B5EF4-FFF2-40B4-BE49-F238E27FC236}">
-                <a16:creationId xmlns:a16="http://schemas.microsoft.com/office/drawing/2014/main" id="{60B7DA25-3AC9-32B8-0019-C2DC19314D48}"/>
-              </a:ext>
-            </a:extLst>
-          </p:cNvPr>
+          <p:cNvPr id="2" name="Date Placeholder 1"/>
           <p:cNvSpPr>
             <a:spLocks noGrp="1"/>
           </p:cNvSpPr>
@@ -2430,7 +2155,6 @@
           <a:p>
             <a:fld id="{A6797769-11AF-4B13-9480-5464F4E8F14E}" type="datetimeFigureOut">
               <a:rPr lang="en-US" smtClean="0"/>
-              <a:t>18-Sep-26</a:t>
             </a:fld>
             <a:endParaRPr lang="en-US" dirty="0"/>
           </a:p>
@@ -2438,13 +2162,7 @@
       </p:sp>
       <p:sp>
         <p:nvSpPr>
-          <p:cNvPr id="3" name="Footer Placeholder 2">
-            <a:extLst>
-              <a:ext uri="{FF2B5EF4-FFF2-40B4-BE49-F238E27FC236}">
-                <a16:creationId xmlns:a16="http://schemas.microsoft.com/office/drawing/2014/main" id="{29B2CBD9-7115-C494-8F5E-1336594DEC8B}"/>
-              </a:ext>
-            </a:extLst>
-          </p:cNvPr>
+          <p:cNvPr id="3" name="Footer Placeholder 2"/>
           <p:cNvSpPr>
             <a:spLocks noGrp="1"/>
           </p:cNvSpPr>
@@ -2463,13 +2181,7 @@
       </p:sp>
       <p:sp>
         <p:nvSpPr>
-          <p:cNvPr id="4" name="Slide Number Placeholder 3">
-            <a:extLst>
-              <a:ext uri="{FF2B5EF4-FFF2-40B4-BE49-F238E27FC236}">
-                <a16:creationId xmlns:a16="http://schemas.microsoft.com/office/drawing/2014/main" id="{677CE861-9031-DB76-1D8B-66E9E18E7278}"/>
-              </a:ext>
-            </a:extLst>
-          </p:cNvPr>
+          <p:cNvPr id="4" name="Slide Number Placeholder 3"/>
           <p:cNvSpPr>
             <a:spLocks noGrp="1"/>
           </p:cNvSpPr>
@@ -2484,18 +2196,12 @@
           <a:p>
             <a:fld id="{BB466C3F-FEFB-43B6-A316-8E9E30C0FA08}" type="slidenum">
               <a:rPr lang="en-US" smtClean="0"/>
-              <a:t>‹#›</a:t>
             </a:fld>
             <a:endParaRPr lang="en-US" dirty="0"/>
           </a:p>
         </p:txBody>
       </p:sp>
     </p:spTree>
-    <p:extLst>
-      <p:ext uri="{BB962C8B-B14F-4D97-AF65-F5344CB8AC3E}">
-        <p14:creationId xmlns:p14="http://schemas.microsoft.com/office/powerpoint/2010/main" val="2199272372"/>
-      </p:ext>
-    </p:extLst>
   </p:cSld>
   <p:clrMapOvr>
     <a:masterClrMapping/>
@@ -2522,13 +2228,7 @@
       </p:grpSpPr>
       <p:sp>
         <p:nvSpPr>
-          <p:cNvPr id="2" name="Title 1">
-            <a:extLst>
-              <a:ext uri="{FF2B5EF4-FFF2-40B4-BE49-F238E27FC236}">
-                <a16:creationId xmlns:a16="http://schemas.microsoft.com/office/drawing/2014/main" id="{D7185454-D7CB-0BC1-8FFE-0B521017E6DB}"/>
-              </a:ext>
-            </a:extLst>
-          </p:cNvPr>
+          <p:cNvPr id="2" name="Title 1"/>
           <p:cNvSpPr>
             <a:spLocks noGrp="1"/>
           </p:cNvSpPr>
@@ -2554,18 +2254,13 @@
               <a:rPr lang="en-US"/>
               <a:t>Click to edit Master title style</a:t>
             </a:r>
-          </a:p>
-        </p:txBody>
-      </p:sp>
-      <p:sp>
-        <p:nvSpPr>
-          <p:cNvPr id="3" name="Content Placeholder 2">
-            <a:extLst>
-              <a:ext uri="{FF2B5EF4-FFF2-40B4-BE49-F238E27FC236}">
-                <a16:creationId xmlns:a16="http://schemas.microsoft.com/office/drawing/2014/main" id="{34BF56B8-3736-A74C-751E-45B3C5B92F47}"/>
-              </a:ext>
-            </a:extLst>
-          </p:cNvPr>
+            <a:endParaRPr lang="en-US"/>
+          </a:p>
+        </p:txBody>
+      </p:sp>
+      <p:sp>
+        <p:nvSpPr>
+          <p:cNvPr id="3" name="Content Placeholder 2"/>
           <p:cNvSpPr>
             <a:spLocks noGrp="1"/>
           </p:cNvSpPr>
@@ -2616,6 +2311,7 @@
               <a:rPr lang="en-US"/>
               <a:t>Click to edit Master text styles</a:t>
             </a:r>
+            <a:endParaRPr lang="en-US"/>
           </a:p>
           <a:p>
             <a:pPr lvl="1"/>
@@ -2623,6 +2319,7 @@
               <a:rPr lang="en-US"/>
               <a:t>Second level</a:t>
             </a:r>
+            <a:endParaRPr lang="en-US"/>
           </a:p>
           <a:p>
             <a:pPr lvl="2"/>
@@ -2630,6 +2327,7 @@
               <a:rPr lang="en-US"/>
               <a:t>Third level</a:t>
             </a:r>
+            <a:endParaRPr lang="en-US"/>
           </a:p>
           <a:p>
             <a:pPr lvl="3"/>
@@ -2637,6 +2335,7 @@
               <a:rPr lang="en-US"/>
               <a:t>Fourth level</a:t>
             </a:r>
+            <a:endParaRPr lang="en-US"/>
           </a:p>
           <a:p>
             <a:pPr lvl="4"/>
@@ -2644,18 +2343,13 @@
               <a:rPr lang="en-US"/>
               <a:t>Fifth level</a:t>
             </a:r>
-          </a:p>
-        </p:txBody>
-      </p:sp>
-      <p:sp>
-        <p:nvSpPr>
-          <p:cNvPr id="4" name="Text Placeholder 3">
-            <a:extLst>
-              <a:ext uri="{FF2B5EF4-FFF2-40B4-BE49-F238E27FC236}">
-                <a16:creationId xmlns:a16="http://schemas.microsoft.com/office/drawing/2014/main" id="{214B2A86-0F2E-3936-9433-48E9832F6BBF}"/>
-              </a:ext>
-            </a:extLst>
-          </p:cNvPr>
+            <a:endParaRPr lang="en-US"/>
+          </a:p>
+        </p:txBody>
+      </p:sp>
+      <p:sp>
+        <p:nvSpPr>
+          <p:cNvPr id="4" name="Text Placeholder 3"/>
           <p:cNvSpPr>
             <a:spLocks noGrp="1"/>
           </p:cNvSpPr>
@@ -2715,18 +2409,13 @@
               <a:rPr lang="en-US"/>
               <a:t>Click to edit Master text styles</a:t>
             </a:r>
-          </a:p>
-        </p:txBody>
-      </p:sp>
-      <p:sp>
-        <p:nvSpPr>
-          <p:cNvPr id="5" name="Date Placeholder 4">
-            <a:extLst>
-              <a:ext uri="{FF2B5EF4-FFF2-40B4-BE49-F238E27FC236}">
-                <a16:creationId xmlns:a16="http://schemas.microsoft.com/office/drawing/2014/main" id="{CFA0FB1D-7984-625F-B9B4-1AD339FB6399}"/>
-              </a:ext>
-            </a:extLst>
-          </p:cNvPr>
+            <a:endParaRPr lang="en-US"/>
+          </a:p>
+        </p:txBody>
+      </p:sp>
+      <p:sp>
+        <p:nvSpPr>
+          <p:cNvPr id="5" name="Date Placeholder 4"/>
           <p:cNvSpPr>
             <a:spLocks noGrp="1"/>
           </p:cNvSpPr>
@@ -2741,7 +2430,6 @@
           <a:p>
             <a:fld id="{A6797769-11AF-4B13-9480-5464F4E8F14E}" type="datetimeFigureOut">
               <a:rPr lang="en-US" smtClean="0"/>
-              <a:t>18-Sep-26</a:t>
             </a:fld>
             <a:endParaRPr lang="en-US" dirty="0"/>
           </a:p>
@@ -2749,13 +2437,7 @@
       </p:sp>
       <p:sp>
         <p:nvSpPr>
-          <p:cNvPr id="6" name="Footer Placeholder 5">
-            <a:extLst>
-              <a:ext uri="{FF2B5EF4-FFF2-40B4-BE49-F238E27FC236}">
-                <a16:creationId xmlns:a16="http://schemas.microsoft.com/office/drawing/2014/main" id="{3F61B80D-B0F9-F1E9-91AA-6A631CDB9C0E}"/>
-              </a:ext>
-            </a:extLst>
-          </p:cNvPr>
+          <p:cNvPr id="6" name="Footer Placeholder 5"/>
           <p:cNvSpPr>
             <a:spLocks noGrp="1"/>
           </p:cNvSpPr>
@@ -2774,13 +2456,7 @@
       </p:sp>
       <p:sp>
         <p:nvSpPr>
-          <p:cNvPr id="7" name="Slide Number Placeholder 6">
-            <a:extLst>
-              <a:ext uri="{FF2B5EF4-FFF2-40B4-BE49-F238E27FC236}">
-                <a16:creationId xmlns:a16="http://schemas.microsoft.com/office/drawing/2014/main" id="{66BE6F2A-4B85-14DC-3545-262DF4239693}"/>
-              </a:ext>
-            </a:extLst>
-          </p:cNvPr>
+          <p:cNvPr id="7" name="Slide Number Placeholder 6"/>
           <p:cNvSpPr>
             <a:spLocks noGrp="1"/>
           </p:cNvSpPr>
@@ -2795,18 +2471,12 @@
           <a:p>
             <a:fld id="{BB466C3F-FEFB-43B6-A316-8E9E30C0FA08}" type="slidenum">
               <a:rPr lang="en-US" smtClean="0"/>
-              <a:t>‹#›</a:t>
             </a:fld>
             <a:endParaRPr lang="en-US" dirty="0"/>
           </a:p>
         </p:txBody>
       </p:sp>
     </p:spTree>
-    <p:extLst>
-      <p:ext uri="{BB962C8B-B14F-4D97-AF65-F5344CB8AC3E}">
-        <p14:creationId xmlns:p14="http://schemas.microsoft.com/office/powerpoint/2010/main" val="2907383460"/>
-      </p:ext>
-    </p:extLst>
   </p:cSld>
   <p:clrMapOvr>
     <a:masterClrMapping/>
@@ -2833,13 +2503,7 @@
       </p:grpSpPr>
       <p:sp>
         <p:nvSpPr>
-          <p:cNvPr id="2" name="Title 1">
-            <a:extLst>
-              <a:ext uri="{FF2B5EF4-FFF2-40B4-BE49-F238E27FC236}">
-                <a16:creationId xmlns:a16="http://schemas.microsoft.com/office/drawing/2014/main" id="{90609A29-35F0-98B4-4F42-AB5F46BE14BA}"/>
-              </a:ext>
-            </a:extLst>
-          </p:cNvPr>
+          <p:cNvPr id="2" name="Title 1"/>
           <p:cNvSpPr>
             <a:spLocks noGrp="1"/>
           </p:cNvSpPr>
@@ -2865,18 +2529,13 @@
               <a:rPr lang="en-US"/>
               <a:t>Click to edit Master title style</a:t>
             </a:r>
-          </a:p>
-        </p:txBody>
-      </p:sp>
-      <p:sp>
-        <p:nvSpPr>
-          <p:cNvPr id="3" name="Picture Placeholder 2">
-            <a:extLst>
-              <a:ext uri="{FF2B5EF4-FFF2-40B4-BE49-F238E27FC236}">
-                <a16:creationId xmlns:a16="http://schemas.microsoft.com/office/drawing/2014/main" id="{BAE6A5B4-9C0F-AC1A-EDD9-AF9D276B17E6}"/>
-              </a:ext>
-            </a:extLst>
-          </p:cNvPr>
+            <a:endParaRPr lang="en-US"/>
+          </a:p>
+        </p:txBody>
+      </p:sp>
+      <p:sp>
+        <p:nvSpPr>
+          <p:cNvPr id="3" name="Picture Placeholder 2"/>
           <p:cNvSpPr>
             <a:spLocks noGrp="1"/>
           </p:cNvSpPr>
@@ -2937,13 +2596,7 @@
       </p:sp>
       <p:sp>
         <p:nvSpPr>
-          <p:cNvPr id="4" name="Text Placeholder 3">
-            <a:extLst>
-              <a:ext uri="{FF2B5EF4-FFF2-40B4-BE49-F238E27FC236}">
-                <a16:creationId xmlns:a16="http://schemas.microsoft.com/office/drawing/2014/main" id="{F456FF7C-876A-0902-CAF3-2B24964CE3DC}"/>
-              </a:ext>
-            </a:extLst>
-          </p:cNvPr>
+          <p:cNvPr id="4" name="Text Placeholder 3"/>
           <p:cNvSpPr>
             <a:spLocks noGrp="1"/>
           </p:cNvSpPr>
@@ -3003,18 +2656,13 @@
               <a:rPr lang="en-US"/>
               <a:t>Click to edit Master text styles</a:t>
             </a:r>
-          </a:p>
-        </p:txBody>
-      </p:sp>
-      <p:sp>
-        <p:nvSpPr>
-          <p:cNvPr id="5" name="Date Placeholder 4">
-            <a:extLst>
-              <a:ext uri="{FF2B5EF4-FFF2-40B4-BE49-F238E27FC236}">
-                <a16:creationId xmlns:a16="http://schemas.microsoft.com/office/drawing/2014/main" id="{2CE67711-7CD1-ABDE-3E48-49DFFC6C26EB}"/>
-              </a:ext>
-            </a:extLst>
-          </p:cNvPr>
+            <a:endParaRPr lang="en-US"/>
+          </a:p>
+        </p:txBody>
+      </p:sp>
+      <p:sp>
+        <p:nvSpPr>
+          <p:cNvPr id="5" name="Date Placeholder 4"/>
           <p:cNvSpPr>
             <a:spLocks noGrp="1"/>
           </p:cNvSpPr>
@@ -3029,7 +2677,6 @@
           <a:p>
             <a:fld id="{A6797769-11AF-4B13-9480-5464F4E8F14E}" type="datetimeFigureOut">
               <a:rPr lang="en-US" smtClean="0"/>
-              <a:t>18-Sep-26</a:t>
             </a:fld>
             <a:endParaRPr lang="en-US" dirty="0"/>
           </a:p>
@@ -3037,13 +2684,7 @@
       </p:sp>
       <p:sp>
         <p:nvSpPr>
-          <p:cNvPr id="6" name="Footer Placeholder 5">
-            <a:extLst>
-              <a:ext uri="{FF2B5EF4-FFF2-40B4-BE49-F238E27FC236}">
-                <a16:creationId xmlns:a16="http://schemas.microsoft.com/office/drawing/2014/main" id="{481C3AB6-7451-5FF8-3F9C-0530FE72B352}"/>
-              </a:ext>
-            </a:extLst>
-          </p:cNvPr>
+          <p:cNvPr id="6" name="Footer Placeholder 5"/>
           <p:cNvSpPr>
             <a:spLocks noGrp="1"/>
           </p:cNvSpPr>
@@ -3062,13 +2703,7 @@
       </p:sp>
       <p:sp>
         <p:nvSpPr>
-          <p:cNvPr id="7" name="Slide Number Placeholder 6">
-            <a:extLst>
-              <a:ext uri="{FF2B5EF4-FFF2-40B4-BE49-F238E27FC236}">
-                <a16:creationId xmlns:a16="http://schemas.microsoft.com/office/drawing/2014/main" id="{38A4F21D-3FE1-FCE0-0345-F6E85902A982}"/>
-              </a:ext>
-            </a:extLst>
-          </p:cNvPr>
+          <p:cNvPr id="7" name="Slide Number Placeholder 6"/>
           <p:cNvSpPr>
             <a:spLocks noGrp="1"/>
           </p:cNvSpPr>
@@ -3083,18 +2718,12 @@
           <a:p>
             <a:fld id="{BB466C3F-FEFB-43B6-A316-8E9E30C0FA08}" type="slidenum">
               <a:rPr lang="en-US" smtClean="0"/>
-              <a:t>‹#›</a:t>
             </a:fld>
             <a:endParaRPr lang="en-US" dirty="0"/>
           </a:p>
         </p:txBody>
       </p:sp>
     </p:spTree>
-    <p:extLst>
-      <p:ext uri="{BB962C8B-B14F-4D97-AF65-F5344CB8AC3E}">
-        <p14:creationId xmlns:p14="http://schemas.microsoft.com/office/powerpoint/2010/main" val="3587518488"/>
-      </p:ext>
-    </p:extLst>
   </p:cSld>
   <p:clrMapOvr>
     <a:masterClrMapping/>
@@ -3126,13 +2755,7 @@
       </p:grpSpPr>
       <p:sp>
         <p:nvSpPr>
-          <p:cNvPr id="2" name="Title Placeholder 1">
-            <a:extLst>
-              <a:ext uri="{FF2B5EF4-FFF2-40B4-BE49-F238E27FC236}">
-                <a16:creationId xmlns:a16="http://schemas.microsoft.com/office/drawing/2014/main" id="{BF21B5AA-6020-618B-0010-C295F011FA21}"/>
-              </a:ext>
-            </a:extLst>
-          </p:cNvPr>
+          <p:cNvPr id="2" name="Title Placeholder 1"/>
           <p:cNvSpPr>
             <a:spLocks noGrp="1"/>
           </p:cNvSpPr>
@@ -3159,18 +2782,13 @@
               <a:rPr lang="en-US"/>
               <a:t>Click to edit Master title style</a:t>
             </a:r>
-          </a:p>
-        </p:txBody>
-      </p:sp>
-      <p:sp>
-        <p:nvSpPr>
-          <p:cNvPr id="3" name="Text Placeholder 2">
-            <a:extLst>
-              <a:ext uri="{FF2B5EF4-FFF2-40B4-BE49-F238E27FC236}">
-                <a16:creationId xmlns:a16="http://schemas.microsoft.com/office/drawing/2014/main" id="{CC92F780-2DB2-D6A5-12E2-1560E9CE7AC4}"/>
-              </a:ext>
-            </a:extLst>
-          </p:cNvPr>
+            <a:endParaRPr lang="en-US"/>
+          </a:p>
+        </p:txBody>
+      </p:sp>
+      <p:sp>
+        <p:nvSpPr>
+          <p:cNvPr id="3" name="Text Placeholder 2"/>
           <p:cNvSpPr>
             <a:spLocks noGrp="1"/>
           </p:cNvSpPr>
@@ -3198,6 +2816,7 @@
               <a:rPr lang="en-US"/>
               <a:t>Click to edit Master text styles</a:t>
             </a:r>
+            <a:endParaRPr lang="en-US"/>
           </a:p>
           <a:p>
             <a:pPr lvl="1"/>
@@ -3205,6 +2824,7 @@
               <a:rPr lang="en-US"/>
               <a:t>Second level</a:t>
             </a:r>
+            <a:endParaRPr lang="en-US"/>
           </a:p>
           <a:p>
             <a:pPr lvl="2"/>
@@ -3212,6 +2832,7 @@
               <a:rPr lang="en-US"/>
               <a:t>Third level</a:t>
             </a:r>
+            <a:endParaRPr lang="en-US"/>
           </a:p>
           <a:p>
             <a:pPr lvl="3"/>
@@ -3219,6 +2840,7 @@
               <a:rPr lang="en-US"/>
               <a:t>Fourth level</a:t>
             </a:r>
+            <a:endParaRPr lang="en-US"/>
           </a:p>
           <a:p>
             <a:pPr lvl="4"/>
@@ -3226,18 +2848,13 @@
               <a:rPr lang="en-US"/>
               <a:t>Fifth level</a:t>
             </a:r>
-          </a:p>
-        </p:txBody>
-      </p:sp>
-      <p:sp>
-        <p:nvSpPr>
-          <p:cNvPr id="4" name="Date Placeholder 3">
-            <a:extLst>
-              <a:ext uri="{FF2B5EF4-FFF2-40B4-BE49-F238E27FC236}">
-                <a16:creationId xmlns:a16="http://schemas.microsoft.com/office/drawing/2014/main" id="{B081CEC0-972B-28A7-66A4-7E1559B8F0E7}"/>
-              </a:ext>
-            </a:extLst>
-          </p:cNvPr>
+            <a:endParaRPr lang="en-US"/>
+          </a:p>
+        </p:txBody>
+      </p:sp>
+      <p:sp>
+        <p:nvSpPr>
+          <p:cNvPr id="4" name="Date Placeholder 3"/>
           <p:cNvSpPr>
             <a:spLocks noGrp="1"/>
           </p:cNvSpPr>
@@ -3270,7 +2887,6 @@
           <a:p>
             <a:fld id="{A6797769-11AF-4B13-9480-5464F4E8F14E}" type="datetimeFigureOut">
               <a:rPr lang="en-US" smtClean="0"/>
-              <a:t>18-Sep-26</a:t>
             </a:fld>
             <a:endParaRPr lang="en-US" dirty="0"/>
           </a:p>
@@ -3278,13 +2894,7 @@
       </p:sp>
       <p:sp>
         <p:nvSpPr>
-          <p:cNvPr id="5" name="Footer Placeholder 4">
-            <a:extLst>
-              <a:ext uri="{FF2B5EF4-FFF2-40B4-BE49-F238E27FC236}">
-                <a16:creationId xmlns:a16="http://schemas.microsoft.com/office/drawing/2014/main" id="{B63F1E15-EA13-3493-7DEB-E4E17136529B}"/>
-              </a:ext>
-            </a:extLst>
-          </p:cNvPr>
+          <p:cNvPr id="5" name="Footer Placeholder 4"/>
           <p:cNvSpPr>
             <a:spLocks noGrp="1"/>
           </p:cNvSpPr>
@@ -3321,13 +2931,7 @@
       </p:sp>
       <p:sp>
         <p:nvSpPr>
-          <p:cNvPr id="6" name="Slide Number Placeholder 5">
-            <a:extLst>
-              <a:ext uri="{FF2B5EF4-FFF2-40B4-BE49-F238E27FC236}">
-                <a16:creationId xmlns:a16="http://schemas.microsoft.com/office/drawing/2014/main" id="{209E0DDD-7CEB-95C6-C1D8-51474B032D23}"/>
-              </a:ext>
-            </a:extLst>
-          </p:cNvPr>
+          <p:cNvPr id="6" name="Slide Number Placeholder 5"/>
           <p:cNvSpPr>
             <a:spLocks noGrp="1"/>
           </p:cNvSpPr>
@@ -3360,18 +2964,12 @@
           <a:p>
             <a:fld id="{BB466C3F-FEFB-43B6-A316-8E9E30C0FA08}" type="slidenum">
               <a:rPr lang="en-US" smtClean="0"/>
-              <a:t>‹#›</a:t>
             </a:fld>
             <a:endParaRPr lang="en-US" dirty="0"/>
           </a:p>
         </p:txBody>
       </p:sp>
     </p:spTree>
-    <p:extLst>
-      <p:ext uri="{BB962C8B-B14F-4D97-AF65-F5344CB8AC3E}">
-        <p14:creationId xmlns:p14="http://schemas.microsoft.com/office/powerpoint/2010/main" val="3987216244"/>
-      </p:ext>
-    </p:extLst>
   </p:cSld>
   <p:clrMap bg1="lt1" tx1="dk1" bg2="lt2" tx2="dk2" accent1="accent1" accent2="accent2" accent3="accent3" accent4="accent4" accent5="accent5" accent6="accent6" hlink="hlink" folHlink="folHlink"/>
   <p:sldLayoutIdLst>
@@ -3689,20 +3287,14 @@
       </p:grpSpPr>
       <p:pic>
         <p:nvPicPr>
-          <p:cNvPr id="5" name="Picture 4">
-            <a:extLst>
-              <a:ext uri="{FF2B5EF4-FFF2-40B4-BE49-F238E27FC236}">
-                <a16:creationId xmlns:a16="http://schemas.microsoft.com/office/drawing/2014/main" id="{8989FF48-5BD1-A579-9BBD-2C7746272086}"/>
-              </a:ext>
-            </a:extLst>
-          </p:cNvPr>
+          <p:cNvPr id="5" name="Picture 4"/>
           <p:cNvPicPr>
             <a:picLocks noChangeAspect="1"/>
           </p:cNvPicPr>
           <p:nvPr/>
         </p:nvPicPr>
         <p:blipFill>
-          <a:blip r:embed="rId2">
+          <a:blip r:embed="rId1">
             <a:extLst>
               <a:ext uri="{28A0092B-C50C-407E-A947-70E740481C1C}">
                 <a14:useLocalDpi xmlns:a14="http://schemas.microsoft.com/office/drawing/2010/main" val="0"/>
@@ -3725,13 +3317,7 @@
       </p:pic>
       <p:sp>
         <p:nvSpPr>
-          <p:cNvPr id="12" name="TextBox 11">
-            <a:extLst>
-              <a:ext uri="{FF2B5EF4-FFF2-40B4-BE49-F238E27FC236}">
-                <a16:creationId xmlns:a16="http://schemas.microsoft.com/office/drawing/2014/main" id="{2BF2384A-C7EC-B6B5-2425-B9A463F91621}"/>
-              </a:ext>
-            </a:extLst>
-          </p:cNvPr>
+          <p:cNvPr id="12" name="TextBox 11"/>
           <p:cNvSpPr txBox="1"/>
           <p:nvPr/>
         </p:nvSpPr>
@@ -3757,18 +3343,15 @@
               </a:rPr>
               <a:t>AI FUSION 2026</a:t>
             </a:r>
-          </a:p>
-        </p:txBody>
-      </p:sp>
-      <p:sp>
-        <p:nvSpPr>
-          <p:cNvPr id="13" name="TextBox 12">
-            <a:extLst>
-              <a:ext uri="{FF2B5EF4-FFF2-40B4-BE49-F238E27FC236}">
-                <a16:creationId xmlns:a16="http://schemas.microsoft.com/office/drawing/2014/main" id="{BC5F706E-BA93-65F3-4B20-9D74AEC14EA8}"/>
-              </a:ext>
-            </a:extLst>
-          </p:cNvPr>
+            <a:endParaRPr lang="en-US" b="1" dirty="0">
+              <a:latin typeface="Arial Narrow" panose="020B0606020202030204" pitchFamily="34" charset="0"/>
+            </a:endParaRPr>
+          </a:p>
+        </p:txBody>
+      </p:sp>
+      <p:sp>
+        <p:nvSpPr>
+          <p:cNvPr id="13" name="TextBox 12"/>
           <p:cNvSpPr txBox="1"/>
           <p:nvPr/>
         </p:nvSpPr>
@@ -3891,6 +3474,11 @@
               </a:rPr>
               <a:t>Theme of your idea </a:t>
             </a:r>
+            <a:endParaRPr lang="en-US" sz="2800" dirty="0">
+              <a:latin typeface="Times New Roman" panose="02020603050405020304" pitchFamily="18" charset="0"/>
+              <a:ea typeface="Verdana" panose="020B0604030504040204" pitchFamily="34" charset="0"/>
+              <a:cs typeface="Times New Roman" panose="02020603050405020304" pitchFamily="18" charset="0"/>
+            </a:endParaRPr>
           </a:p>
           <a:p>
             <a:pPr marL="457200" lvl="0" indent="-457200">
@@ -3934,13 +3522,7 @@
       </p:sp>
       <p:sp>
         <p:nvSpPr>
-          <p:cNvPr id="15" name="Rectangle 14">
-            <a:extLst>
-              <a:ext uri="{FF2B5EF4-FFF2-40B4-BE49-F238E27FC236}">
-                <a16:creationId xmlns:a16="http://schemas.microsoft.com/office/drawing/2014/main" id="{D113B00D-0DF3-5EDE-1F30-88FA3EF5F380}"/>
-              </a:ext>
-            </a:extLst>
-          </p:cNvPr>
+          <p:cNvPr id="15" name="Rectangle 14"/>
           <p:cNvSpPr/>
           <p:nvPr/>
         </p:nvSpPr>
@@ -3980,13 +3562,7 @@
       </p:sp>
       <p:sp>
         <p:nvSpPr>
-          <p:cNvPr id="16" name="TextBox 15">
-            <a:extLst>
-              <a:ext uri="{FF2B5EF4-FFF2-40B4-BE49-F238E27FC236}">
-                <a16:creationId xmlns:a16="http://schemas.microsoft.com/office/drawing/2014/main" id="{56F18EF7-430A-2C59-4F8B-3D80068A156B}"/>
-              </a:ext>
-            </a:extLst>
-          </p:cNvPr>
+          <p:cNvPr id="16" name="TextBox 15"/>
           <p:cNvSpPr txBox="1"/>
           <p:nvPr/>
         </p:nvSpPr>
@@ -4025,13 +3601,7 @@
       </p:sp>
       <p:sp>
         <p:nvSpPr>
-          <p:cNvPr id="18" name="TextBox 17">
-            <a:extLst>
-              <a:ext uri="{FF2B5EF4-FFF2-40B4-BE49-F238E27FC236}">
-                <a16:creationId xmlns:a16="http://schemas.microsoft.com/office/drawing/2014/main" id="{B829EF2A-4185-742B-8911-2FAE8FD1DE30}"/>
-              </a:ext>
-            </a:extLst>
-          </p:cNvPr>
+          <p:cNvPr id="18" name="TextBox 17"/>
           <p:cNvSpPr txBox="1"/>
           <p:nvPr/>
         </p:nvSpPr>
@@ -4057,18 +3627,15 @@
               </a:rPr>
               <a:t>AI FUSION 2026</a:t>
             </a:r>
-          </a:p>
-        </p:txBody>
-      </p:sp>
-      <p:sp>
-        <p:nvSpPr>
-          <p:cNvPr id="19" name="TextBox 18">
-            <a:extLst>
-              <a:ext uri="{FF2B5EF4-FFF2-40B4-BE49-F238E27FC236}">
-                <a16:creationId xmlns:a16="http://schemas.microsoft.com/office/drawing/2014/main" id="{EB70837D-E719-5F0D-A2BA-D43A96092D80}"/>
-              </a:ext>
-            </a:extLst>
-          </p:cNvPr>
+            <a:endParaRPr lang="en-US" sz="5400" dirty="0">
+              <a:latin typeface="Algerian" panose="04020705040A02060702" pitchFamily="82" charset="0"/>
+            </a:endParaRPr>
+          </a:p>
+        </p:txBody>
+      </p:sp>
+      <p:sp>
+        <p:nvSpPr>
+          <p:cNvPr id="19" name="TextBox 18"/>
           <p:cNvSpPr txBox="1"/>
           <p:nvPr/>
         </p:nvSpPr>
@@ -4095,15 +3662,14 @@
               </a:rPr>
               <a:t>@AI Fusion submission-Template</a:t>
             </a:r>
+            <a:endParaRPr lang="en-US" b="1" dirty="0">
+              <a:latin typeface="Times New Roman" panose="02020603050405020304" pitchFamily="18" charset="0"/>
+              <a:cs typeface="Times New Roman" panose="02020603050405020304" pitchFamily="18" charset="0"/>
+            </a:endParaRPr>
           </a:p>
         </p:txBody>
       </p:sp>
     </p:spTree>
-    <p:extLst>
-      <p:ext uri="{BB962C8B-B14F-4D97-AF65-F5344CB8AC3E}">
-        <p14:creationId xmlns:p14="http://schemas.microsoft.com/office/powerpoint/2010/main" val="3229257096"/>
-      </p:ext>
-    </p:extLst>
   </p:cSld>
   <p:clrMapOvr>
     <a:masterClrMapping/>
@@ -4130,20 +3696,14 @@
       </p:grpSpPr>
       <p:pic>
         <p:nvPicPr>
-          <p:cNvPr id="13" name="Picture 12">
-            <a:extLst>
-              <a:ext uri="{FF2B5EF4-FFF2-40B4-BE49-F238E27FC236}">
-                <a16:creationId xmlns:a16="http://schemas.microsoft.com/office/drawing/2014/main" id="{B1AC4A65-8403-4B60-68EE-49C6BC43ECE5}"/>
-              </a:ext>
-            </a:extLst>
-          </p:cNvPr>
+          <p:cNvPr id="13" name="Picture 12"/>
           <p:cNvPicPr>
             <a:picLocks noChangeAspect="1"/>
           </p:cNvPicPr>
           <p:nvPr/>
         </p:nvPicPr>
         <p:blipFill>
-          <a:blip r:embed="rId2">
+          <a:blip r:embed="rId1">
             <a:extLst>
               <a:ext uri="{28A0092B-C50C-407E-A947-70E740481C1C}">
                 <a14:useLocalDpi xmlns:a14="http://schemas.microsoft.com/office/drawing/2010/main" val="0"/>
@@ -4166,13 +3726,7 @@
       </p:pic>
       <p:sp>
         <p:nvSpPr>
-          <p:cNvPr id="15" name="TextBox 14">
-            <a:extLst>
-              <a:ext uri="{FF2B5EF4-FFF2-40B4-BE49-F238E27FC236}">
-                <a16:creationId xmlns:a16="http://schemas.microsoft.com/office/drawing/2014/main" id="{F5065411-DB74-7ED2-B30B-67C974C694A0}"/>
-              </a:ext>
-            </a:extLst>
-          </p:cNvPr>
+          <p:cNvPr id="15" name="TextBox 14"/>
           <p:cNvSpPr txBox="1"/>
           <p:nvPr/>
         </p:nvSpPr>
@@ -4198,18 +3752,15 @@
               </a:rPr>
               <a:t>AI FUSION 2026</a:t>
             </a:r>
-          </a:p>
-        </p:txBody>
-      </p:sp>
-      <p:sp>
-        <p:nvSpPr>
-          <p:cNvPr id="17" name="Rectangle 16">
-            <a:extLst>
-              <a:ext uri="{FF2B5EF4-FFF2-40B4-BE49-F238E27FC236}">
-                <a16:creationId xmlns:a16="http://schemas.microsoft.com/office/drawing/2014/main" id="{27D9DAA4-CE59-7E14-32A6-91C15D32161A}"/>
-              </a:ext>
-            </a:extLst>
-          </p:cNvPr>
+            <a:endParaRPr lang="en-US" b="1" dirty="0">
+              <a:latin typeface="Arial Narrow" panose="020B0606020202030204" pitchFamily="34" charset="0"/>
+            </a:endParaRPr>
+          </a:p>
+        </p:txBody>
+      </p:sp>
+      <p:sp>
+        <p:nvSpPr>
+          <p:cNvPr id="17" name="Rectangle 16"/>
           <p:cNvSpPr/>
           <p:nvPr/>
         </p:nvSpPr>
@@ -4249,13 +3800,7 @@
       </p:sp>
       <p:sp>
         <p:nvSpPr>
-          <p:cNvPr id="19" name="TextBox 18">
-            <a:extLst>
-              <a:ext uri="{FF2B5EF4-FFF2-40B4-BE49-F238E27FC236}">
-                <a16:creationId xmlns:a16="http://schemas.microsoft.com/office/drawing/2014/main" id="{A0F3731F-97CF-1E20-C179-83506F9366C0}"/>
-              </a:ext>
-            </a:extLst>
-          </p:cNvPr>
+          <p:cNvPr id="19" name="TextBox 18"/>
           <p:cNvSpPr txBox="1"/>
           <p:nvPr/>
         </p:nvSpPr>
@@ -4282,18 +3827,16 @@
               </a:rPr>
               <a:t>@AI Fusion submission-Template</a:t>
             </a:r>
-          </a:p>
-        </p:txBody>
-      </p:sp>
-      <p:sp>
-        <p:nvSpPr>
-          <p:cNvPr id="21" name="Oval 20">
-            <a:extLst>
-              <a:ext uri="{FF2B5EF4-FFF2-40B4-BE49-F238E27FC236}">
-                <a16:creationId xmlns:a16="http://schemas.microsoft.com/office/drawing/2014/main" id="{263C8D43-8EFE-1A11-7385-0F7E741F2026}"/>
-              </a:ext>
-            </a:extLst>
-          </p:cNvPr>
+            <a:endParaRPr lang="en-US" b="1" dirty="0">
+              <a:latin typeface="Times New Roman" panose="02020603050405020304" pitchFamily="18" charset="0"/>
+              <a:cs typeface="Times New Roman" panose="02020603050405020304" pitchFamily="18" charset="0"/>
+            </a:endParaRPr>
+          </a:p>
+        </p:txBody>
+      </p:sp>
+      <p:sp>
+        <p:nvSpPr>
+          <p:cNvPr id="21" name="Oval 20"/>
           <p:cNvSpPr/>
           <p:nvPr/>
         </p:nvSpPr>
@@ -4341,13 +3884,7 @@
       </p:sp>
       <p:sp>
         <p:nvSpPr>
-          <p:cNvPr id="23" name="TextBox 22">
-            <a:extLst>
-              <a:ext uri="{FF2B5EF4-FFF2-40B4-BE49-F238E27FC236}">
-                <a16:creationId xmlns:a16="http://schemas.microsoft.com/office/drawing/2014/main" id="{B3199B72-9564-4AED-6E88-6B3DDC5B9CCD}"/>
-              </a:ext>
-            </a:extLst>
-          </p:cNvPr>
+          <p:cNvPr id="23" name="TextBox 22"/>
           <p:cNvSpPr txBox="1"/>
           <p:nvPr/>
         </p:nvSpPr>
@@ -4371,18 +3908,13 @@
               <a:rPr lang="en-US" dirty="0"/>
               <a:t>TEAM NAME</a:t>
             </a:r>
-          </a:p>
-        </p:txBody>
-      </p:sp>
-      <p:sp>
-        <p:nvSpPr>
-          <p:cNvPr id="26" name="TextBox 25">
-            <a:extLst>
-              <a:ext uri="{FF2B5EF4-FFF2-40B4-BE49-F238E27FC236}">
-                <a16:creationId xmlns:a16="http://schemas.microsoft.com/office/drawing/2014/main" id="{4E002F26-7BF9-7A7E-0B33-8A60F7C9FF2B}"/>
-              </a:ext>
-            </a:extLst>
-          </p:cNvPr>
+            <a:endParaRPr lang="en-US" dirty="0"/>
+          </a:p>
+        </p:txBody>
+      </p:sp>
+      <p:sp>
+        <p:nvSpPr>
+          <p:cNvPr id="26" name="TextBox 25"/>
           <p:cNvSpPr txBox="1"/>
           <p:nvPr/>
         </p:nvSpPr>
@@ -4413,6 +3945,10 @@
               </a:rPr>
               <a:t>Social Impact</a:t>
             </a:r>
+            <a:endParaRPr lang="en-US" sz="2800" dirty="0">
+              <a:latin typeface="Times New Roman" panose="02020603050405020304" pitchFamily="18" charset="0"/>
+              <a:cs typeface="Times New Roman" panose="02020603050405020304" pitchFamily="18" charset="0"/>
+            </a:endParaRPr>
           </a:p>
           <a:p>
             <a:endParaRPr lang="en-US" sz="2800" dirty="0">
@@ -4432,6 +3968,10 @@
               </a:rPr>
               <a:t>Economic Benefits</a:t>
             </a:r>
+            <a:endParaRPr lang="en-US" sz="2800" dirty="0">
+              <a:latin typeface="Times New Roman" panose="02020603050405020304" pitchFamily="18" charset="0"/>
+              <a:cs typeface="Times New Roman" panose="02020603050405020304" pitchFamily="18" charset="0"/>
+            </a:endParaRPr>
           </a:p>
           <a:p>
             <a:endParaRPr lang="en-US" sz="2800" dirty="0">
@@ -4451,6 +3991,10 @@
               </a:rPr>
               <a:t>Technological Benefits</a:t>
             </a:r>
+            <a:endParaRPr lang="en-US" sz="2800" dirty="0">
+              <a:latin typeface="Times New Roman" panose="02020603050405020304" pitchFamily="18" charset="0"/>
+              <a:cs typeface="Times New Roman" panose="02020603050405020304" pitchFamily="18" charset="0"/>
+            </a:endParaRPr>
           </a:p>
           <a:p>
             <a:endParaRPr lang="en-US" sz="2800" dirty="0">
@@ -4470,6 +4014,10 @@
               </a:rPr>
               <a:t>Environmental Benefits</a:t>
             </a:r>
+            <a:endParaRPr lang="en-US" sz="2800" dirty="0">
+              <a:latin typeface="Times New Roman" panose="02020603050405020304" pitchFamily="18" charset="0"/>
+              <a:cs typeface="Times New Roman" panose="02020603050405020304" pitchFamily="18" charset="0"/>
+            </a:endParaRPr>
           </a:p>
           <a:p>
             <a:endParaRPr lang="en-US" sz="2800" dirty="0">
@@ -4489,18 +4037,16 @@
               </a:rPr>
               <a:t>Long-Term Impact</a:t>
             </a:r>
-          </a:p>
-        </p:txBody>
-      </p:sp>
-      <p:sp>
-        <p:nvSpPr>
-          <p:cNvPr id="28" name="TextBox 27">
-            <a:extLst>
-              <a:ext uri="{FF2B5EF4-FFF2-40B4-BE49-F238E27FC236}">
-                <a16:creationId xmlns:a16="http://schemas.microsoft.com/office/drawing/2014/main" id="{B755B240-FB94-B663-6012-8EE558DCD7DD}"/>
-              </a:ext>
-            </a:extLst>
-          </p:cNvPr>
+            <a:endParaRPr lang="en-US" sz="2800" dirty="0">
+              <a:latin typeface="Times New Roman" panose="02020603050405020304" pitchFamily="18" charset="0"/>
+              <a:cs typeface="Times New Roman" panose="02020603050405020304" pitchFamily="18" charset="0"/>
+            </a:endParaRPr>
+          </a:p>
+        </p:txBody>
+      </p:sp>
+      <p:sp>
+        <p:nvSpPr>
+          <p:cNvPr id="28" name="TextBox 27"/>
           <p:cNvSpPr txBox="1"/>
           <p:nvPr/>
         </p:nvSpPr>
@@ -4524,6 +4070,7 @@
               <a:rPr lang="en-US" sz="2800" b="1" dirty="0"/>
               <a:t>IMPACT &amp; BENEFITS</a:t>
             </a:r>
+            <a:endParaRPr lang="en-US" sz="2800" b="1" dirty="0"/>
           </a:p>
           <a:p>
             <a:endParaRPr lang="en-US" sz="2800" dirty="0"/>
@@ -4531,11 +4078,6 @@
         </p:txBody>
       </p:sp>
     </p:spTree>
-    <p:extLst>
-      <p:ext uri="{BB962C8B-B14F-4D97-AF65-F5344CB8AC3E}">
-        <p14:creationId xmlns:p14="http://schemas.microsoft.com/office/powerpoint/2010/main" val="2914106229"/>
-      </p:ext>
-    </p:extLst>
   </p:cSld>
   <p:clrMapOvr>
     <a:masterClrMapping/>
@@ -4562,20 +4104,14 @@
       </p:grpSpPr>
       <p:pic>
         <p:nvPicPr>
-          <p:cNvPr id="5" name="Picture 4">
-            <a:extLst>
-              <a:ext uri="{FF2B5EF4-FFF2-40B4-BE49-F238E27FC236}">
-                <a16:creationId xmlns:a16="http://schemas.microsoft.com/office/drawing/2014/main" id="{4993745B-ECAF-4EF9-D6F4-71E30FF2DEF8}"/>
-              </a:ext>
-            </a:extLst>
-          </p:cNvPr>
+          <p:cNvPr id="5" name="Picture 4"/>
           <p:cNvPicPr>
             <a:picLocks noChangeAspect="1"/>
           </p:cNvPicPr>
           <p:nvPr/>
         </p:nvPicPr>
         <p:blipFill>
-          <a:blip r:embed="rId2">
+          <a:blip r:embed="rId1">
             <a:extLst>
               <a:ext uri="{28A0092B-C50C-407E-A947-70E740481C1C}">
                 <a14:useLocalDpi xmlns:a14="http://schemas.microsoft.com/office/drawing/2010/main" val="0"/>
@@ -4598,13 +4134,7 @@
       </p:pic>
       <p:sp>
         <p:nvSpPr>
-          <p:cNvPr id="7" name="TextBox 6">
-            <a:extLst>
-              <a:ext uri="{FF2B5EF4-FFF2-40B4-BE49-F238E27FC236}">
-                <a16:creationId xmlns:a16="http://schemas.microsoft.com/office/drawing/2014/main" id="{7EE6687D-3822-5F8A-E887-AC1E35B2DC6D}"/>
-              </a:ext>
-            </a:extLst>
-          </p:cNvPr>
+          <p:cNvPr id="7" name="TextBox 6"/>
           <p:cNvSpPr txBox="1"/>
           <p:nvPr/>
         </p:nvSpPr>
@@ -4630,18 +4160,15 @@
               </a:rPr>
               <a:t>AI FUSION 2026</a:t>
             </a:r>
-          </a:p>
-        </p:txBody>
-      </p:sp>
-      <p:sp>
-        <p:nvSpPr>
-          <p:cNvPr id="9" name="Rectangle 8">
-            <a:extLst>
-              <a:ext uri="{FF2B5EF4-FFF2-40B4-BE49-F238E27FC236}">
-                <a16:creationId xmlns:a16="http://schemas.microsoft.com/office/drawing/2014/main" id="{18755505-8954-050F-1733-34BA91C2E691}"/>
-              </a:ext>
-            </a:extLst>
-          </p:cNvPr>
+            <a:endParaRPr lang="en-US" b="1" dirty="0">
+              <a:latin typeface="Arial Narrow" panose="020B0606020202030204" pitchFamily="34" charset="0"/>
+            </a:endParaRPr>
+          </a:p>
+        </p:txBody>
+      </p:sp>
+      <p:sp>
+        <p:nvSpPr>
+          <p:cNvPr id="9" name="Rectangle 8"/>
           <p:cNvSpPr/>
           <p:nvPr/>
         </p:nvSpPr>
@@ -4681,13 +4208,7 @@
       </p:sp>
       <p:sp>
         <p:nvSpPr>
-          <p:cNvPr id="11" name="TextBox 10">
-            <a:extLst>
-              <a:ext uri="{FF2B5EF4-FFF2-40B4-BE49-F238E27FC236}">
-                <a16:creationId xmlns:a16="http://schemas.microsoft.com/office/drawing/2014/main" id="{D557ECE5-DAE7-5003-BDDD-20E5D28C676A}"/>
-              </a:ext>
-            </a:extLst>
-          </p:cNvPr>
+          <p:cNvPr id="11" name="TextBox 10"/>
           <p:cNvSpPr txBox="1"/>
           <p:nvPr/>
         </p:nvSpPr>
@@ -4714,18 +4235,16 @@
               </a:rPr>
               <a:t>@AI Fusion submission-Template</a:t>
             </a:r>
-          </a:p>
-        </p:txBody>
-      </p:sp>
-      <p:sp>
-        <p:nvSpPr>
-          <p:cNvPr id="13" name="Oval 12">
-            <a:extLst>
-              <a:ext uri="{FF2B5EF4-FFF2-40B4-BE49-F238E27FC236}">
-                <a16:creationId xmlns:a16="http://schemas.microsoft.com/office/drawing/2014/main" id="{895C4857-A266-A9C7-B3B1-AFB712D26B5E}"/>
-              </a:ext>
-            </a:extLst>
-          </p:cNvPr>
+            <a:endParaRPr lang="en-US" b="1" dirty="0">
+              <a:latin typeface="Times New Roman" panose="02020603050405020304" pitchFamily="18" charset="0"/>
+              <a:cs typeface="Times New Roman" panose="02020603050405020304" pitchFamily="18" charset="0"/>
+            </a:endParaRPr>
+          </a:p>
+        </p:txBody>
+      </p:sp>
+      <p:sp>
+        <p:nvSpPr>
+          <p:cNvPr id="13" name="Oval 12"/>
           <p:cNvSpPr/>
           <p:nvPr/>
         </p:nvSpPr>
@@ -4773,13 +4292,7 @@
       </p:sp>
       <p:sp>
         <p:nvSpPr>
-          <p:cNvPr id="15" name="TextBox 14">
-            <a:extLst>
-              <a:ext uri="{FF2B5EF4-FFF2-40B4-BE49-F238E27FC236}">
-                <a16:creationId xmlns:a16="http://schemas.microsoft.com/office/drawing/2014/main" id="{6A80BF37-5D6B-C39C-D2E8-2AF34BE05095}"/>
-              </a:ext>
-            </a:extLst>
-          </p:cNvPr>
+          <p:cNvPr id="15" name="TextBox 14"/>
           <p:cNvSpPr txBox="1"/>
           <p:nvPr/>
         </p:nvSpPr>
@@ -4803,28 +4316,17 @@
               <a:rPr lang="en-US" dirty="0"/>
               <a:t>TEAM NAME</a:t>
             </a:r>
+            <a:endParaRPr lang="en-US" dirty="0"/>
           </a:p>
         </p:txBody>
       </p:sp>
       <p:graphicFrame>
         <p:nvGraphicFramePr>
-          <p:cNvPr id="17" name="Table 16">
-            <a:extLst>
-              <a:ext uri="{FF2B5EF4-FFF2-40B4-BE49-F238E27FC236}">
-                <a16:creationId xmlns:a16="http://schemas.microsoft.com/office/drawing/2014/main" id="{4E2E8DB4-34DE-91C3-9BD2-DF24E413BD1C}"/>
-              </a:ext>
-            </a:extLst>
-          </p:cNvPr>
+          <p:cNvPr id="17" name="Table 16"/>
           <p:cNvGraphicFramePr>
             <a:graphicFrameLocks noGrp="1"/>
           </p:cNvGraphicFramePr>
-          <p:nvPr>
-            <p:extLst>
-              <p:ext uri="{D42A27DB-BD31-4B8C-83A1-F6EECF244321}">
-                <p14:modId xmlns:p14="http://schemas.microsoft.com/office/powerpoint/2010/main" val="1367697945"/>
-              </p:ext>
-            </p:extLst>
-          </p:nvPr>
+          <p:nvPr/>
         </p:nvGraphicFramePr>
         <p:xfrm>
           <a:off x="947737" y="2213585"/>
@@ -4837,20 +4339,8 @@
                 <a:tableStyleId>{5C22544A-7EE6-4342-B048-85BDC9FD1C3A}</a:tableStyleId>
               </a:tblPr>
               <a:tblGrid>
-                <a:gridCol w="5038725">
-                  <a:extLst>
-                    <a:ext uri="{9D8B030D-6E8A-4147-A177-3AD203B41FA5}">
-                      <a16:colId xmlns:a16="http://schemas.microsoft.com/office/drawing/2014/main" val="744140039"/>
-                    </a:ext>
-                  </a:extLst>
-                </a:gridCol>
-                <a:gridCol w="5257800">
-                  <a:extLst>
-                    <a:ext uri="{9D8B030D-6E8A-4147-A177-3AD203B41FA5}">
-                      <a16:colId xmlns:a16="http://schemas.microsoft.com/office/drawing/2014/main" val="3466984487"/>
-                    </a:ext>
-                  </a:extLst>
-                </a:gridCol>
+                <a:gridCol w="5038725"/>
+                <a:gridCol w="5257800"/>
               </a:tblGrid>
               <a:tr h="0">
                 <a:tc>
@@ -4875,6 +4365,10 @@
                         </a:rPr>
                         <a:t>Challenges</a:t>
                       </a:r>
+                      <a:endParaRPr lang="en-US" sz="2400" b="1" dirty="0">
+                        <a:latin typeface="Times New Roman" panose="02020603050405020304" pitchFamily="18" charset="0"/>
+                        <a:cs typeface="Times New Roman" panose="02020603050405020304" pitchFamily="18" charset="0"/>
+                      </a:endParaRPr>
                     </a:p>
                   </a:txBody>
                   <a:tcPr anchor="ctr"/>
@@ -4901,15 +4395,14 @@
                         </a:rPr>
                         <a:t>Mitigation</a:t>
                       </a:r>
+                      <a:endParaRPr lang="en-US" sz="2400" b="1" dirty="0">
+                        <a:latin typeface="Times New Roman" panose="02020603050405020304" pitchFamily="18" charset="0"/>
+                        <a:cs typeface="Times New Roman" panose="02020603050405020304" pitchFamily="18" charset="0"/>
+                      </a:endParaRPr>
                     </a:p>
                   </a:txBody>
                   <a:tcPr anchor="ctr"/>
                 </a:tc>
-                <a:extLst>
-                  <a:ext uri="{0D108BD9-81ED-4DB2-BD59-A6C34878D82A}">
-                    <a16:rowId xmlns:a16="http://schemas.microsoft.com/office/drawing/2014/main" val="2813179824"/>
-                  </a:ext>
-                </a:extLst>
               </a:tr>
               <a:tr h="0">
                 <a:tc>
@@ -4927,6 +4420,10 @@
                         </a:rPr>
                         <a:t>Data availability</a:t>
                       </a:r>
+                      <a:endParaRPr lang="en-US" sz="2400" dirty="0">
+                        <a:latin typeface="Times New Roman" panose="02020603050405020304" pitchFamily="18" charset="0"/>
+                        <a:cs typeface="Times New Roman" panose="02020603050405020304" pitchFamily="18" charset="0"/>
+                      </a:endParaRPr>
                     </a:p>
                   </a:txBody>
                   <a:tcPr anchor="ctr"/>
@@ -4946,15 +4443,14 @@
                         </a:rPr>
                         <a:t>APIs, structured data collection</a:t>
                       </a:r>
+                      <a:endParaRPr lang="en-US" sz="2400">
+                        <a:latin typeface="Times New Roman" panose="02020603050405020304" pitchFamily="18" charset="0"/>
+                        <a:cs typeface="Times New Roman" panose="02020603050405020304" pitchFamily="18" charset="0"/>
+                      </a:endParaRPr>
                     </a:p>
                   </a:txBody>
                   <a:tcPr anchor="ctr"/>
                 </a:tc>
-                <a:extLst>
-                  <a:ext uri="{0D108BD9-81ED-4DB2-BD59-A6C34878D82A}">
-                    <a16:rowId xmlns:a16="http://schemas.microsoft.com/office/drawing/2014/main" val="74302968"/>
-                  </a:ext>
-                </a:extLst>
               </a:tr>
               <a:tr h="0">
                 <a:tc>
@@ -4972,6 +4468,10 @@
                         </a:rPr>
                         <a:t>Data privacy</a:t>
                       </a:r>
+                      <a:endParaRPr lang="en-US" sz="2400">
+                        <a:latin typeface="Times New Roman" panose="02020603050405020304" pitchFamily="18" charset="0"/>
+                        <a:cs typeface="Times New Roman" panose="02020603050405020304" pitchFamily="18" charset="0"/>
+                      </a:endParaRPr>
                     </a:p>
                   </a:txBody>
                   <a:tcPr anchor="ctr"/>
@@ -4991,15 +4491,14 @@
                         </a:rPr>
                         <a:t>Encryption &amp; access control</a:t>
                       </a:r>
+                      <a:endParaRPr lang="en-US" sz="2400">
+                        <a:latin typeface="Times New Roman" panose="02020603050405020304" pitchFamily="18" charset="0"/>
+                        <a:cs typeface="Times New Roman" panose="02020603050405020304" pitchFamily="18" charset="0"/>
+                      </a:endParaRPr>
                     </a:p>
                   </a:txBody>
                   <a:tcPr anchor="ctr"/>
                 </a:tc>
-                <a:extLst>
-                  <a:ext uri="{0D108BD9-81ED-4DB2-BD59-A6C34878D82A}">
-                    <a16:rowId xmlns:a16="http://schemas.microsoft.com/office/drawing/2014/main" val="3147064778"/>
-                  </a:ext>
-                </a:extLst>
               </a:tr>
               <a:tr h="0">
                 <a:tc>
@@ -5017,6 +4516,10 @@
                         </a:rPr>
                         <a:t>Model accuracy</a:t>
                       </a:r>
+                      <a:endParaRPr lang="en-US" sz="2400" dirty="0">
+                        <a:latin typeface="Times New Roman" panose="02020603050405020304" pitchFamily="18" charset="0"/>
+                        <a:cs typeface="Times New Roman" panose="02020603050405020304" pitchFamily="18" charset="0"/>
+                      </a:endParaRPr>
                     </a:p>
                   </a:txBody>
                   <a:tcPr anchor="ctr"/>
@@ -5036,15 +4539,14 @@
                         </a:rPr>
                         <a:t>Testing, validation &amp; continuous improvement</a:t>
                       </a:r>
+                      <a:endParaRPr lang="en-US" sz="2400">
+                        <a:latin typeface="Times New Roman" panose="02020603050405020304" pitchFamily="18" charset="0"/>
+                        <a:cs typeface="Times New Roman" panose="02020603050405020304" pitchFamily="18" charset="0"/>
+                      </a:endParaRPr>
                     </a:p>
                   </a:txBody>
                   <a:tcPr anchor="ctr"/>
                 </a:tc>
-                <a:extLst>
-                  <a:ext uri="{0D108BD9-81ED-4DB2-BD59-A6C34878D82A}">
-                    <a16:rowId xmlns:a16="http://schemas.microsoft.com/office/drawing/2014/main" val="3112928500"/>
-                  </a:ext>
-                </a:extLst>
               </a:tr>
               <a:tr h="0">
                 <a:tc>
@@ -5062,6 +4564,10 @@
                         </a:rPr>
                         <a:t>Scalability</a:t>
                       </a:r>
+                      <a:endParaRPr lang="en-US" sz="2400">
+                        <a:latin typeface="Times New Roman" panose="02020603050405020304" pitchFamily="18" charset="0"/>
+                        <a:cs typeface="Times New Roman" panose="02020603050405020304" pitchFamily="18" charset="0"/>
+                      </a:endParaRPr>
                     </a:p>
                   </a:txBody>
                   <a:tcPr anchor="ctr"/>
@@ -5081,15 +4587,14 @@
                         </a:rPr>
                         <a:t>Cloud-based architecture</a:t>
                       </a:r>
+                      <a:endParaRPr lang="en-US" sz="2400" dirty="0">
+                        <a:latin typeface="Times New Roman" panose="02020603050405020304" pitchFamily="18" charset="0"/>
+                        <a:cs typeface="Times New Roman" panose="02020603050405020304" pitchFamily="18" charset="0"/>
+                      </a:endParaRPr>
                     </a:p>
                   </a:txBody>
                   <a:tcPr anchor="ctr"/>
                 </a:tc>
-                <a:extLst>
-                  <a:ext uri="{0D108BD9-81ED-4DB2-BD59-A6C34878D82A}">
-                    <a16:rowId xmlns:a16="http://schemas.microsoft.com/office/drawing/2014/main" val="2614271228"/>
-                  </a:ext>
-                </a:extLst>
               </a:tr>
               <a:tr h="0">
                 <a:tc>
@@ -5107,6 +4612,10 @@
                         </a:rPr>
                         <a:t>User adoption</a:t>
                       </a:r>
+                      <a:endParaRPr lang="en-US" sz="2400">
+                        <a:latin typeface="Times New Roman" panose="02020603050405020304" pitchFamily="18" charset="0"/>
+                        <a:cs typeface="Times New Roman" panose="02020603050405020304" pitchFamily="18" charset="0"/>
+                      </a:endParaRPr>
                     </a:p>
                   </a:txBody>
                   <a:tcPr anchor="ctr"/>
@@ -5126,15 +4635,14 @@
                         </a:rPr>
                         <a:t>Simple UI, onboarding &amp; awareness</a:t>
                       </a:r>
+                      <a:endParaRPr lang="en-US" sz="2400">
+                        <a:latin typeface="Times New Roman" panose="02020603050405020304" pitchFamily="18" charset="0"/>
+                        <a:cs typeface="Times New Roman" panose="02020603050405020304" pitchFamily="18" charset="0"/>
+                      </a:endParaRPr>
                     </a:p>
                   </a:txBody>
                   <a:tcPr anchor="ctr"/>
                 </a:tc>
-                <a:extLst>
-                  <a:ext uri="{0D108BD9-81ED-4DB2-BD59-A6C34878D82A}">
-                    <a16:rowId xmlns:a16="http://schemas.microsoft.com/office/drawing/2014/main" val="2855457597"/>
-                  </a:ext>
-                </a:extLst>
               </a:tr>
               <a:tr h="0">
                 <a:tc>
@@ -5152,6 +4660,10 @@
                         </a:rPr>
                         <a:t>System reliability</a:t>
                       </a:r>
+                      <a:endParaRPr lang="en-US" sz="2400">
+                        <a:latin typeface="Times New Roman" panose="02020603050405020304" pitchFamily="18" charset="0"/>
+                        <a:cs typeface="Times New Roman" panose="02020603050405020304" pitchFamily="18" charset="0"/>
+                      </a:endParaRPr>
                     </a:p>
                   </a:txBody>
                   <a:tcPr anchor="ctr"/>
@@ -5171,15 +4683,14 @@
                         </a:rPr>
                         <a:t>Monitoring, backups &amp; error handling</a:t>
                       </a:r>
+                      <a:endParaRPr lang="en-US" sz="2400" dirty="0">
+                        <a:latin typeface="Times New Roman" panose="02020603050405020304" pitchFamily="18" charset="0"/>
+                        <a:cs typeface="Times New Roman" panose="02020603050405020304" pitchFamily="18" charset="0"/>
+                      </a:endParaRPr>
                     </a:p>
                   </a:txBody>
                   <a:tcPr anchor="ctr"/>
                 </a:tc>
-                <a:extLst>
-                  <a:ext uri="{0D108BD9-81ED-4DB2-BD59-A6C34878D82A}">
-                    <a16:rowId xmlns:a16="http://schemas.microsoft.com/office/drawing/2014/main" val="3237140011"/>
-                  </a:ext>
-                </a:extLst>
               </a:tr>
             </a:tbl>
           </a:graphicData>
@@ -5187,13 +4698,7 @@
       </p:graphicFrame>
       <p:sp>
         <p:nvSpPr>
-          <p:cNvPr id="19" name="TextBox 18">
-            <a:extLst>
-              <a:ext uri="{FF2B5EF4-FFF2-40B4-BE49-F238E27FC236}">
-                <a16:creationId xmlns:a16="http://schemas.microsoft.com/office/drawing/2014/main" id="{7D083934-3887-4AB1-11A7-7A1E3F6027E0}"/>
-              </a:ext>
-            </a:extLst>
-          </p:cNvPr>
+          <p:cNvPr id="19" name="TextBox 18"/>
           <p:cNvSpPr txBox="1"/>
           <p:nvPr/>
         </p:nvSpPr>
@@ -5220,15 +4725,11 @@
               <a:rPr lang="en-US" sz="2800" b="1" dirty="0"/>
               <a:t>Challenges &amp; Risk Mitigation</a:t>
             </a:r>
+            <a:endParaRPr lang="en-US" sz="2800" b="1" dirty="0"/>
           </a:p>
         </p:txBody>
       </p:sp>
     </p:spTree>
-    <p:extLst>
-      <p:ext uri="{BB962C8B-B14F-4D97-AF65-F5344CB8AC3E}">
-        <p14:creationId xmlns:p14="http://schemas.microsoft.com/office/powerpoint/2010/main" val="3821386212"/>
-      </p:ext>
-    </p:extLst>
   </p:cSld>
   <p:clrMapOvr>
     <a:masterClrMapping/>
@@ -5255,20 +4756,14 @@
       </p:grpSpPr>
       <p:pic>
         <p:nvPicPr>
-          <p:cNvPr id="5" name="Picture 4">
-            <a:extLst>
-              <a:ext uri="{FF2B5EF4-FFF2-40B4-BE49-F238E27FC236}">
-                <a16:creationId xmlns:a16="http://schemas.microsoft.com/office/drawing/2014/main" id="{B0137279-97C8-5E45-9019-6EB0F43FECB2}"/>
-              </a:ext>
-            </a:extLst>
-          </p:cNvPr>
+          <p:cNvPr id="5" name="Picture 4"/>
           <p:cNvPicPr>
             <a:picLocks noChangeAspect="1"/>
           </p:cNvPicPr>
           <p:nvPr/>
         </p:nvPicPr>
         <p:blipFill>
-          <a:blip r:embed="rId2">
+          <a:blip r:embed="rId1">
             <a:extLst>
               <a:ext uri="{28A0092B-C50C-407E-A947-70E740481C1C}">
                 <a14:useLocalDpi xmlns:a14="http://schemas.microsoft.com/office/drawing/2010/main" val="0"/>
@@ -5291,13 +4786,7 @@
       </p:pic>
       <p:sp>
         <p:nvSpPr>
-          <p:cNvPr id="7" name="TextBox 6">
-            <a:extLst>
-              <a:ext uri="{FF2B5EF4-FFF2-40B4-BE49-F238E27FC236}">
-                <a16:creationId xmlns:a16="http://schemas.microsoft.com/office/drawing/2014/main" id="{F0DC5762-B1F9-96E2-8D56-F9AAC296291D}"/>
-              </a:ext>
-            </a:extLst>
-          </p:cNvPr>
+          <p:cNvPr id="7" name="TextBox 6"/>
           <p:cNvSpPr txBox="1"/>
           <p:nvPr/>
         </p:nvSpPr>
@@ -5323,18 +4812,15 @@
               </a:rPr>
               <a:t>AI FUSION 2026</a:t>
             </a:r>
-          </a:p>
-        </p:txBody>
-      </p:sp>
-      <p:sp>
-        <p:nvSpPr>
-          <p:cNvPr id="9" name="Rectangle 8">
-            <a:extLst>
-              <a:ext uri="{FF2B5EF4-FFF2-40B4-BE49-F238E27FC236}">
-                <a16:creationId xmlns:a16="http://schemas.microsoft.com/office/drawing/2014/main" id="{DEB9F97E-FCE8-8E90-A0E8-13E1C301D757}"/>
-              </a:ext>
-            </a:extLst>
-          </p:cNvPr>
+            <a:endParaRPr lang="en-US" b="1" dirty="0">
+              <a:latin typeface="Arial Narrow" panose="020B0606020202030204" pitchFamily="34" charset="0"/>
+            </a:endParaRPr>
+          </a:p>
+        </p:txBody>
+      </p:sp>
+      <p:sp>
+        <p:nvSpPr>
+          <p:cNvPr id="9" name="Rectangle 8"/>
           <p:cNvSpPr/>
           <p:nvPr/>
         </p:nvSpPr>
@@ -5374,13 +4860,7 @@
       </p:sp>
       <p:sp>
         <p:nvSpPr>
-          <p:cNvPr id="11" name="TextBox 10">
-            <a:extLst>
-              <a:ext uri="{FF2B5EF4-FFF2-40B4-BE49-F238E27FC236}">
-                <a16:creationId xmlns:a16="http://schemas.microsoft.com/office/drawing/2014/main" id="{E880F30E-CD81-7230-3AF3-F634714C05AB}"/>
-              </a:ext>
-            </a:extLst>
-          </p:cNvPr>
+          <p:cNvPr id="11" name="TextBox 10"/>
           <p:cNvSpPr txBox="1"/>
           <p:nvPr/>
         </p:nvSpPr>
@@ -5407,18 +4887,16 @@
               </a:rPr>
               <a:t>@AI Fusion submission-Template</a:t>
             </a:r>
-          </a:p>
-        </p:txBody>
-      </p:sp>
-      <p:sp>
-        <p:nvSpPr>
-          <p:cNvPr id="13" name="Oval 12">
-            <a:extLst>
-              <a:ext uri="{FF2B5EF4-FFF2-40B4-BE49-F238E27FC236}">
-                <a16:creationId xmlns:a16="http://schemas.microsoft.com/office/drawing/2014/main" id="{474B723C-DD1A-463B-89F1-9DF2558F6C79}"/>
-              </a:ext>
-            </a:extLst>
-          </p:cNvPr>
+            <a:endParaRPr lang="en-US" b="1" dirty="0">
+              <a:latin typeface="Times New Roman" panose="02020603050405020304" pitchFamily="18" charset="0"/>
+              <a:cs typeface="Times New Roman" panose="02020603050405020304" pitchFamily="18" charset="0"/>
+            </a:endParaRPr>
+          </a:p>
+        </p:txBody>
+      </p:sp>
+      <p:sp>
+        <p:nvSpPr>
+          <p:cNvPr id="13" name="Oval 12"/>
           <p:cNvSpPr/>
           <p:nvPr/>
         </p:nvSpPr>
@@ -5466,13 +4944,7 @@
       </p:sp>
       <p:sp>
         <p:nvSpPr>
-          <p:cNvPr id="15" name="TextBox 14">
-            <a:extLst>
-              <a:ext uri="{FF2B5EF4-FFF2-40B4-BE49-F238E27FC236}">
-                <a16:creationId xmlns:a16="http://schemas.microsoft.com/office/drawing/2014/main" id="{06D5A781-8187-398C-FDE6-1B856DAF88AD}"/>
-              </a:ext>
-            </a:extLst>
-          </p:cNvPr>
+          <p:cNvPr id="15" name="TextBox 14"/>
           <p:cNvSpPr txBox="1"/>
           <p:nvPr/>
         </p:nvSpPr>
@@ -5496,18 +4968,13 @@
               <a:rPr lang="en-US" dirty="0"/>
               <a:t>TEAM NAME</a:t>
             </a:r>
-          </a:p>
-        </p:txBody>
-      </p:sp>
-      <p:sp>
-        <p:nvSpPr>
-          <p:cNvPr id="16" name="TextBox 15">
-            <a:extLst>
-              <a:ext uri="{FF2B5EF4-FFF2-40B4-BE49-F238E27FC236}">
-                <a16:creationId xmlns:a16="http://schemas.microsoft.com/office/drawing/2014/main" id="{EBB38AFE-2932-9713-DE75-B16011059035}"/>
-              </a:ext>
-            </a:extLst>
-          </p:cNvPr>
+            <a:endParaRPr lang="en-US" dirty="0"/>
+          </a:p>
+        </p:txBody>
+      </p:sp>
+      <p:sp>
+        <p:nvSpPr>
+          <p:cNvPr id="16" name="TextBox 15"/>
           <p:cNvSpPr txBox="1"/>
           <p:nvPr/>
         </p:nvSpPr>
@@ -5534,6 +5001,10 @@
               </a:rPr>
               <a:t>By the end of the hackathon, our team will deliver:</a:t>
             </a:r>
+            <a:endParaRPr lang="en-US" sz="2400" dirty="0">
+              <a:latin typeface="Times New Roman" panose="02020603050405020304" pitchFamily="18" charset="0"/>
+              <a:cs typeface="Times New Roman" panose="02020603050405020304" pitchFamily="18" charset="0"/>
+            </a:endParaRPr>
           </a:p>
           <a:p>
             <a:endParaRPr lang="en-US" sz="2400" dirty="0">
@@ -5553,6 +5024,10 @@
               </a:rPr>
               <a:t>Functional working prototype </a:t>
             </a:r>
+            <a:endParaRPr lang="en-US" sz="2400" dirty="0">
+              <a:latin typeface="Times New Roman" panose="02020603050405020304" pitchFamily="18" charset="0"/>
+              <a:cs typeface="Times New Roman" panose="02020603050405020304" pitchFamily="18" charset="0"/>
+            </a:endParaRPr>
           </a:p>
           <a:p>
             <a:pPr marL="342900" lvl="0" indent="-342900">
@@ -5566,6 +5041,10 @@
               </a:rPr>
               <a:t>Web/mobile application </a:t>
             </a:r>
+            <a:endParaRPr lang="en-US" sz="2400" dirty="0">
+              <a:latin typeface="Times New Roman" panose="02020603050405020304" pitchFamily="18" charset="0"/>
+              <a:cs typeface="Times New Roman" panose="02020603050405020304" pitchFamily="18" charset="0"/>
+            </a:endParaRPr>
           </a:p>
           <a:p>
             <a:pPr marL="342900" lvl="0" indent="-342900">
@@ -5579,6 +5058,10 @@
               </a:rPr>
               <a:t>AI/ML-powered solution </a:t>
             </a:r>
+            <a:endParaRPr lang="en-US" sz="2400" dirty="0">
+              <a:latin typeface="Times New Roman" panose="02020603050405020304" pitchFamily="18" charset="0"/>
+              <a:cs typeface="Times New Roman" panose="02020603050405020304" pitchFamily="18" charset="0"/>
+            </a:endParaRPr>
           </a:p>
           <a:p>
             <a:pPr marL="342900" lvl="0" indent="-342900">
@@ -5592,6 +5075,10 @@
               </a:rPr>
               <a:t>Interactive dashboard </a:t>
             </a:r>
+            <a:endParaRPr lang="en-US" sz="2400" dirty="0">
+              <a:latin typeface="Times New Roman" panose="02020603050405020304" pitchFamily="18" charset="0"/>
+              <a:cs typeface="Times New Roman" panose="02020603050405020304" pitchFamily="18" charset="0"/>
+            </a:endParaRPr>
           </a:p>
           <a:p>
             <a:pPr marL="342900" lvl="0" indent="-342900">
@@ -5605,6 +5092,10 @@
               </a:rPr>
               <a:t>End-to-end workflow demonstration </a:t>
             </a:r>
+            <a:endParaRPr lang="en-US" sz="2400" dirty="0">
+              <a:latin typeface="Times New Roman" panose="02020603050405020304" pitchFamily="18" charset="0"/>
+              <a:cs typeface="Times New Roman" panose="02020603050405020304" pitchFamily="18" charset="0"/>
+            </a:endParaRPr>
           </a:p>
           <a:p>
             <a:pPr marL="342900" lvl="0" indent="-342900">
@@ -5618,18 +5109,16 @@
               </a:rPr>
               <a:t>Data-driven insights </a:t>
             </a:r>
-          </a:p>
-        </p:txBody>
-      </p:sp>
-      <p:sp>
-        <p:nvSpPr>
-          <p:cNvPr id="17" name="TextBox 16">
-            <a:extLst>
-              <a:ext uri="{FF2B5EF4-FFF2-40B4-BE49-F238E27FC236}">
-                <a16:creationId xmlns:a16="http://schemas.microsoft.com/office/drawing/2014/main" id="{5B239401-E6D9-9C73-0F99-AE5B035FC621}"/>
-              </a:ext>
-            </a:extLst>
-          </p:cNvPr>
+            <a:endParaRPr lang="en-US" sz="2400" dirty="0">
+              <a:latin typeface="Times New Roman" panose="02020603050405020304" pitchFamily="18" charset="0"/>
+              <a:cs typeface="Times New Roman" panose="02020603050405020304" pitchFamily="18" charset="0"/>
+            </a:endParaRPr>
+          </a:p>
+        </p:txBody>
+      </p:sp>
+      <p:sp>
+        <p:nvSpPr>
+          <p:cNvPr id="17" name="TextBox 16"/>
           <p:cNvSpPr txBox="1"/>
           <p:nvPr/>
         </p:nvSpPr>
@@ -5653,6 +5142,7 @@
               <a:rPr lang="en-US" sz="2800" b="1" dirty="0"/>
               <a:t>EXPECTED OUTCOME</a:t>
             </a:r>
+            <a:endParaRPr lang="en-US" sz="2800" b="1" dirty="0"/>
           </a:p>
           <a:p>
             <a:endParaRPr lang="en-US" sz="2800" dirty="0"/>
@@ -5660,11 +5150,6 @@
         </p:txBody>
       </p:sp>
     </p:spTree>
-    <p:extLst>
-      <p:ext uri="{BB962C8B-B14F-4D97-AF65-F5344CB8AC3E}">
-        <p14:creationId xmlns:p14="http://schemas.microsoft.com/office/powerpoint/2010/main" val="2310766975"/>
-      </p:ext>
-    </p:extLst>
   </p:cSld>
   <p:clrMapOvr>
     <a:masterClrMapping/>
@@ -5691,20 +5176,14 @@
       </p:grpSpPr>
       <p:pic>
         <p:nvPicPr>
-          <p:cNvPr id="5" name="Picture 4">
-            <a:extLst>
-              <a:ext uri="{FF2B5EF4-FFF2-40B4-BE49-F238E27FC236}">
-                <a16:creationId xmlns:a16="http://schemas.microsoft.com/office/drawing/2014/main" id="{B1EDDAF7-63A7-AB6F-5943-164BA4DF91CD}"/>
-              </a:ext>
-            </a:extLst>
-          </p:cNvPr>
+          <p:cNvPr id="5" name="Picture 4"/>
           <p:cNvPicPr>
             <a:picLocks noChangeAspect="1"/>
           </p:cNvPicPr>
           <p:nvPr/>
         </p:nvPicPr>
         <p:blipFill>
-          <a:blip r:embed="rId2">
+          <a:blip r:embed="rId1">
             <a:extLst>
               <a:ext uri="{28A0092B-C50C-407E-A947-70E740481C1C}">
                 <a14:useLocalDpi xmlns:a14="http://schemas.microsoft.com/office/drawing/2010/main" val="0"/>
@@ -5727,13 +5206,7 @@
       </p:pic>
       <p:sp>
         <p:nvSpPr>
-          <p:cNvPr id="7" name="TextBox 6">
-            <a:extLst>
-              <a:ext uri="{FF2B5EF4-FFF2-40B4-BE49-F238E27FC236}">
-                <a16:creationId xmlns:a16="http://schemas.microsoft.com/office/drawing/2014/main" id="{F3C86326-4D88-3414-EDD8-1BA76A7CFF31}"/>
-              </a:ext>
-            </a:extLst>
-          </p:cNvPr>
+          <p:cNvPr id="7" name="TextBox 6"/>
           <p:cNvSpPr txBox="1"/>
           <p:nvPr/>
         </p:nvSpPr>
@@ -5759,18 +5232,15 @@
               </a:rPr>
               <a:t>AI FUSION 2026</a:t>
             </a:r>
-          </a:p>
-        </p:txBody>
-      </p:sp>
-      <p:sp>
-        <p:nvSpPr>
-          <p:cNvPr id="9" name="Rectangle 8">
-            <a:extLst>
-              <a:ext uri="{FF2B5EF4-FFF2-40B4-BE49-F238E27FC236}">
-                <a16:creationId xmlns:a16="http://schemas.microsoft.com/office/drawing/2014/main" id="{B0C01EF9-8E62-449F-E44D-562492395541}"/>
-              </a:ext>
-            </a:extLst>
-          </p:cNvPr>
+            <a:endParaRPr lang="en-US" b="1" dirty="0">
+              <a:latin typeface="Arial Narrow" panose="020B0606020202030204" pitchFamily="34" charset="0"/>
+            </a:endParaRPr>
+          </a:p>
+        </p:txBody>
+      </p:sp>
+      <p:sp>
+        <p:nvSpPr>
+          <p:cNvPr id="9" name="Rectangle 8"/>
           <p:cNvSpPr/>
           <p:nvPr/>
         </p:nvSpPr>
@@ -5810,13 +5280,7 @@
       </p:sp>
       <p:sp>
         <p:nvSpPr>
-          <p:cNvPr id="11" name="TextBox 10">
-            <a:extLst>
-              <a:ext uri="{FF2B5EF4-FFF2-40B4-BE49-F238E27FC236}">
-                <a16:creationId xmlns:a16="http://schemas.microsoft.com/office/drawing/2014/main" id="{A7F9E2FC-573F-4487-59C1-4258EEF9432D}"/>
-              </a:ext>
-            </a:extLst>
-          </p:cNvPr>
+          <p:cNvPr id="11" name="TextBox 10"/>
           <p:cNvSpPr txBox="1"/>
           <p:nvPr/>
         </p:nvSpPr>
@@ -5843,18 +5307,16 @@
               </a:rPr>
               <a:t>@AI Fusion submission-Template</a:t>
             </a:r>
-          </a:p>
-        </p:txBody>
-      </p:sp>
-      <p:sp>
-        <p:nvSpPr>
-          <p:cNvPr id="13" name="Oval 12">
-            <a:extLst>
-              <a:ext uri="{FF2B5EF4-FFF2-40B4-BE49-F238E27FC236}">
-                <a16:creationId xmlns:a16="http://schemas.microsoft.com/office/drawing/2014/main" id="{ED72EED5-0843-384C-BD76-C7198EAAA653}"/>
-              </a:ext>
-            </a:extLst>
-          </p:cNvPr>
+            <a:endParaRPr lang="en-US" b="1" dirty="0">
+              <a:latin typeface="Times New Roman" panose="02020603050405020304" pitchFamily="18" charset="0"/>
+              <a:cs typeface="Times New Roman" panose="02020603050405020304" pitchFamily="18" charset="0"/>
+            </a:endParaRPr>
+          </a:p>
+        </p:txBody>
+      </p:sp>
+      <p:sp>
+        <p:nvSpPr>
+          <p:cNvPr id="13" name="Oval 12"/>
           <p:cNvSpPr/>
           <p:nvPr/>
         </p:nvSpPr>
@@ -5902,13 +5364,7 @@
       </p:sp>
       <p:sp>
         <p:nvSpPr>
-          <p:cNvPr id="15" name="TextBox 14">
-            <a:extLst>
-              <a:ext uri="{FF2B5EF4-FFF2-40B4-BE49-F238E27FC236}">
-                <a16:creationId xmlns:a16="http://schemas.microsoft.com/office/drawing/2014/main" id="{8DD9A12D-A2A5-C9CA-DDB4-D28FA9C92B69}"/>
-              </a:ext>
-            </a:extLst>
-          </p:cNvPr>
+          <p:cNvPr id="15" name="TextBox 14"/>
           <p:cNvSpPr txBox="1"/>
           <p:nvPr/>
         </p:nvSpPr>
@@ -5932,18 +5388,13 @@
               <a:rPr lang="en-US" dirty="0"/>
               <a:t>TEAM NAME</a:t>
             </a:r>
-          </a:p>
-        </p:txBody>
-      </p:sp>
-      <p:sp>
-        <p:nvSpPr>
-          <p:cNvPr id="17" name="TextBox 16">
-            <a:extLst>
-              <a:ext uri="{FF2B5EF4-FFF2-40B4-BE49-F238E27FC236}">
-                <a16:creationId xmlns:a16="http://schemas.microsoft.com/office/drawing/2014/main" id="{EE9150AA-157C-FA26-33EC-D470A9BD28B2}"/>
-              </a:ext>
-            </a:extLst>
-          </p:cNvPr>
+            <a:endParaRPr lang="en-US" dirty="0"/>
+          </a:p>
+        </p:txBody>
+      </p:sp>
+      <p:sp>
+        <p:nvSpPr>
+          <p:cNvPr id="17" name="TextBox 16"/>
           <p:cNvSpPr txBox="1"/>
           <p:nvPr/>
         </p:nvSpPr>
@@ -5983,6 +5434,10 @@
               </a:rPr>
               <a:t>A Real-world Challenge Requires A Practical And Scalable Solution.</a:t>
             </a:r>
+            <a:endParaRPr lang="en-US" sz="2000" dirty="0">
+              <a:latin typeface="Times New Roman" panose="02020603050405020304" pitchFamily="18" charset="0"/>
+              <a:cs typeface="Times New Roman" panose="02020603050405020304" pitchFamily="18" charset="0"/>
+            </a:endParaRPr>
           </a:p>
           <a:p>
             <a:endParaRPr lang="en-US" sz="2000" dirty="0">
@@ -6011,6 +5466,10 @@
               </a:rPr>
               <a:t>Our Solution Combines Technology, Ai And Automation To Address The Challenge Intelligently.</a:t>
             </a:r>
+            <a:endParaRPr lang="en-US" sz="2000" dirty="0">
+              <a:latin typeface="Times New Roman" panose="02020603050405020304" pitchFamily="18" charset="0"/>
+              <a:cs typeface="Times New Roman" panose="02020603050405020304" pitchFamily="18" charset="0"/>
+            </a:endParaRPr>
           </a:p>
           <a:p>
             <a:endParaRPr lang="en-US" sz="2000" dirty="0">
@@ -6039,14 +5498,18 @@
               </a:rPr>
               <a:t>The Platform Is Designed To Deliver Measurable Improvements For Users, Organizations And The Wider Community.</a:t>
             </a:r>
-          </a:p>
-          <a:p>
             <a:endParaRPr lang="en-US" sz="2000" dirty="0">
               <a:latin typeface="Times New Roman" panose="02020603050405020304" pitchFamily="18" charset="0"/>
               <a:cs typeface="Times New Roman" panose="02020603050405020304" pitchFamily="18" charset="0"/>
             </a:endParaRPr>
           </a:p>
           <a:p>
+            <a:endParaRPr lang="en-US" sz="2000" dirty="0">
+              <a:latin typeface="Times New Roman" panose="02020603050405020304" pitchFamily="18" charset="0"/>
+              <a:cs typeface="Times New Roman" panose="02020603050405020304" pitchFamily="18" charset="0"/>
+            </a:endParaRPr>
+          </a:p>
+          <a:p>
             <a:r>
               <a:rPr lang="en-US" sz="2000" b="1" dirty="0">
                 <a:latin typeface="Times New Roman" panose="02020603050405020304" pitchFamily="18" charset="0"/>
@@ -6063,13 +5526,7 @@
       </p:sp>
       <p:sp>
         <p:nvSpPr>
-          <p:cNvPr id="18" name="TextBox 17">
-            <a:extLst>
-              <a:ext uri="{FF2B5EF4-FFF2-40B4-BE49-F238E27FC236}">
-                <a16:creationId xmlns:a16="http://schemas.microsoft.com/office/drawing/2014/main" id="{35692AEF-5094-41AA-A659-11CE352D7B66}"/>
-              </a:ext>
-            </a:extLst>
-          </p:cNvPr>
+          <p:cNvPr id="18" name="TextBox 17"/>
           <p:cNvSpPr txBox="1"/>
           <p:nvPr/>
         </p:nvSpPr>
@@ -6093,6 +5550,7 @@
               <a:rPr lang="en-US" sz="2800" b="1" dirty="0"/>
               <a:t>Conclusion</a:t>
             </a:r>
+            <a:endParaRPr lang="en-US" sz="2800" b="1" dirty="0"/>
           </a:p>
           <a:p>
             <a:endParaRPr lang="en-US" sz="2800" dirty="0"/>
@@ -6100,11 +5558,6 @@
         </p:txBody>
       </p:sp>
     </p:spTree>
-    <p:extLst>
-      <p:ext uri="{BB962C8B-B14F-4D97-AF65-F5344CB8AC3E}">
-        <p14:creationId xmlns:p14="http://schemas.microsoft.com/office/powerpoint/2010/main" val="2826058536"/>
-      </p:ext>
-    </p:extLst>
   </p:cSld>
   <p:clrMapOvr>
     <a:masterClrMapping/>
@@ -6131,20 +5584,14 @@
       </p:grpSpPr>
       <p:pic>
         <p:nvPicPr>
-          <p:cNvPr id="5" name="Picture 4">
-            <a:extLst>
-              <a:ext uri="{FF2B5EF4-FFF2-40B4-BE49-F238E27FC236}">
-                <a16:creationId xmlns:a16="http://schemas.microsoft.com/office/drawing/2014/main" id="{507078B3-6C3C-0D0F-2D92-131056F61B77}"/>
-              </a:ext>
-            </a:extLst>
-          </p:cNvPr>
+          <p:cNvPr id="5" name="Picture 4"/>
           <p:cNvPicPr>
             <a:picLocks noChangeAspect="1"/>
           </p:cNvPicPr>
           <p:nvPr/>
         </p:nvPicPr>
         <p:blipFill>
-          <a:blip r:embed="rId2">
+          <a:blip r:embed="rId1">
             <a:extLst>
               <a:ext uri="{28A0092B-C50C-407E-A947-70E740481C1C}">
                 <a14:useLocalDpi xmlns:a14="http://schemas.microsoft.com/office/drawing/2010/main" val="0"/>
@@ -6167,13 +5614,7 @@
       </p:pic>
       <p:sp>
         <p:nvSpPr>
-          <p:cNvPr id="7" name="TextBox 6">
-            <a:extLst>
-              <a:ext uri="{FF2B5EF4-FFF2-40B4-BE49-F238E27FC236}">
-                <a16:creationId xmlns:a16="http://schemas.microsoft.com/office/drawing/2014/main" id="{17BDE6F1-B226-D91C-95D7-48F80BF78A9C}"/>
-              </a:ext>
-            </a:extLst>
-          </p:cNvPr>
+          <p:cNvPr id="7" name="TextBox 6"/>
           <p:cNvSpPr txBox="1"/>
           <p:nvPr/>
         </p:nvSpPr>
@@ -6199,18 +5640,15 @@
               </a:rPr>
               <a:t>AI FUSION 2026</a:t>
             </a:r>
-          </a:p>
-        </p:txBody>
-      </p:sp>
-      <p:sp>
-        <p:nvSpPr>
-          <p:cNvPr id="9" name="Rectangle 8">
-            <a:extLst>
-              <a:ext uri="{FF2B5EF4-FFF2-40B4-BE49-F238E27FC236}">
-                <a16:creationId xmlns:a16="http://schemas.microsoft.com/office/drawing/2014/main" id="{17BB22C1-CF9F-2F3C-64CD-748A2369816F}"/>
-              </a:ext>
-            </a:extLst>
-          </p:cNvPr>
+            <a:endParaRPr lang="en-US" b="1" dirty="0">
+              <a:latin typeface="Arial Narrow" panose="020B0606020202030204" pitchFamily="34" charset="0"/>
+            </a:endParaRPr>
+          </a:p>
+        </p:txBody>
+      </p:sp>
+      <p:sp>
+        <p:nvSpPr>
+          <p:cNvPr id="9" name="Rectangle 8"/>
           <p:cNvSpPr/>
           <p:nvPr/>
         </p:nvSpPr>
@@ -6250,13 +5688,7 @@
       </p:sp>
       <p:sp>
         <p:nvSpPr>
-          <p:cNvPr id="11" name="TextBox 10">
-            <a:extLst>
-              <a:ext uri="{FF2B5EF4-FFF2-40B4-BE49-F238E27FC236}">
-                <a16:creationId xmlns:a16="http://schemas.microsoft.com/office/drawing/2014/main" id="{93F7CF71-A137-32D7-CDCD-5DB65EEEFD03}"/>
-              </a:ext>
-            </a:extLst>
-          </p:cNvPr>
+          <p:cNvPr id="11" name="TextBox 10"/>
           <p:cNvSpPr txBox="1"/>
           <p:nvPr/>
         </p:nvSpPr>
@@ -6283,18 +5715,16 @@
               </a:rPr>
               <a:t>@AI Fusion submission-Template</a:t>
             </a:r>
-          </a:p>
-        </p:txBody>
-      </p:sp>
-      <p:sp>
-        <p:nvSpPr>
-          <p:cNvPr id="13" name="Oval 12">
-            <a:extLst>
-              <a:ext uri="{FF2B5EF4-FFF2-40B4-BE49-F238E27FC236}">
-                <a16:creationId xmlns:a16="http://schemas.microsoft.com/office/drawing/2014/main" id="{B9987DA4-E3F3-B319-8D08-19EF56184193}"/>
-              </a:ext>
-            </a:extLst>
-          </p:cNvPr>
+            <a:endParaRPr lang="en-US" b="1" dirty="0">
+              <a:latin typeface="Times New Roman" panose="02020603050405020304" pitchFamily="18" charset="0"/>
+              <a:cs typeface="Times New Roman" panose="02020603050405020304" pitchFamily="18" charset="0"/>
+            </a:endParaRPr>
+          </a:p>
+        </p:txBody>
+      </p:sp>
+      <p:sp>
+        <p:nvSpPr>
+          <p:cNvPr id="13" name="Oval 12"/>
           <p:cNvSpPr/>
           <p:nvPr/>
         </p:nvSpPr>
@@ -6342,13 +5772,7 @@
       </p:sp>
       <p:sp>
         <p:nvSpPr>
-          <p:cNvPr id="15" name="TextBox 14">
-            <a:extLst>
-              <a:ext uri="{FF2B5EF4-FFF2-40B4-BE49-F238E27FC236}">
-                <a16:creationId xmlns:a16="http://schemas.microsoft.com/office/drawing/2014/main" id="{66CC88FD-5080-AB9A-77EB-8B95C15E84F8}"/>
-              </a:ext>
-            </a:extLst>
-          </p:cNvPr>
+          <p:cNvPr id="15" name="TextBox 14"/>
           <p:cNvSpPr txBox="1"/>
           <p:nvPr/>
         </p:nvSpPr>
@@ -6372,18 +5796,13 @@
               <a:rPr lang="en-US" dirty="0"/>
               <a:t>TEAM NAME</a:t>
             </a:r>
-          </a:p>
-        </p:txBody>
-      </p:sp>
-      <p:sp>
-        <p:nvSpPr>
-          <p:cNvPr id="16" name="TextBox 15">
-            <a:extLst>
-              <a:ext uri="{FF2B5EF4-FFF2-40B4-BE49-F238E27FC236}">
-                <a16:creationId xmlns:a16="http://schemas.microsoft.com/office/drawing/2014/main" id="{B8D50FE4-AEFC-E0CC-A65A-4016166B807A}"/>
-              </a:ext>
-            </a:extLst>
-          </p:cNvPr>
+            <a:endParaRPr lang="en-US" dirty="0"/>
+          </a:p>
+        </p:txBody>
+      </p:sp>
+      <p:sp>
+        <p:nvSpPr>
+          <p:cNvPr id="16" name="TextBox 15"/>
           <p:cNvSpPr txBox="1"/>
           <p:nvPr/>
         </p:nvSpPr>
@@ -6416,14 +5835,18 @@
               </a:rPr>
               <a:t>                       Thank You</a:t>
             </a:r>
-          </a:p>
-          <a:p>
             <a:endParaRPr lang="en-US" sz="2800" dirty="0">
               <a:latin typeface="Times New Roman" panose="02020603050405020304" pitchFamily="18" charset="0"/>
               <a:cs typeface="Times New Roman" panose="02020603050405020304" pitchFamily="18" charset="0"/>
             </a:endParaRPr>
           </a:p>
           <a:p>
+            <a:endParaRPr lang="en-US" sz="2800" dirty="0">
+              <a:latin typeface="Times New Roman" panose="02020603050405020304" pitchFamily="18" charset="0"/>
+              <a:cs typeface="Times New Roman" panose="02020603050405020304" pitchFamily="18" charset="0"/>
+            </a:endParaRPr>
+          </a:p>
+          <a:p>
             <a:r>
               <a:rPr lang="en-US" sz="2800" dirty="0">
                 <a:latin typeface="Times New Roman" panose="02020603050405020304" pitchFamily="18" charset="0"/>
@@ -6431,18 +5854,16 @@
               </a:rPr>
               <a:t>Team Name | Institution | Contact Details</a:t>
             </a:r>
-          </a:p>
-        </p:txBody>
-      </p:sp>
-      <p:sp>
-        <p:nvSpPr>
-          <p:cNvPr id="17" name="TextBox 16">
-            <a:extLst>
-              <a:ext uri="{FF2B5EF4-FFF2-40B4-BE49-F238E27FC236}">
-                <a16:creationId xmlns:a16="http://schemas.microsoft.com/office/drawing/2014/main" id="{BB9F7B68-5ACF-AFFF-D6B7-F72F3484D306}"/>
-              </a:ext>
-            </a:extLst>
-          </p:cNvPr>
+            <a:endParaRPr lang="en-US" sz="2800" dirty="0">
+              <a:latin typeface="Times New Roman" panose="02020603050405020304" pitchFamily="18" charset="0"/>
+              <a:cs typeface="Times New Roman" panose="02020603050405020304" pitchFamily="18" charset="0"/>
+            </a:endParaRPr>
+          </a:p>
+        </p:txBody>
+      </p:sp>
+      <p:sp>
+        <p:nvSpPr>
+          <p:cNvPr id="17" name="TextBox 16"/>
           <p:cNvSpPr txBox="1"/>
           <p:nvPr/>
         </p:nvSpPr>
@@ -6471,11 +5892,6 @@
         </p:txBody>
       </p:sp>
     </p:spTree>
-    <p:extLst>
-      <p:ext uri="{BB962C8B-B14F-4D97-AF65-F5344CB8AC3E}">
-        <p14:creationId xmlns:p14="http://schemas.microsoft.com/office/powerpoint/2010/main" val="1507457158"/>
-      </p:ext>
-    </p:extLst>
   </p:cSld>
   <p:clrMapOvr>
     <a:masterClrMapping/>
@@ -6502,20 +5918,14 @@
       </p:grpSpPr>
       <p:pic>
         <p:nvPicPr>
-          <p:cNvPr id="5" name="Picture 4">
-            <a:extLst>
-              <a:ext uri="{FF2B5EF4-FFF2-40B4-BE49-F238E27FC236}">
-                <a16:creationId xmlns:a16="http://schemas.microsoft.com/office/drawing/2014/main" id="{145F7A6B-1D8D-0456-EA50-280A45AD89AA}"/>
-              </a:ext>
-            </a:extLst>
-          </p:cNvPr>
+          <p:cNvPr id="5" name="Picture 4"/>
           <p:cNvPicPr>
             <a:picLocks noChangeAspect="1"/>
           </p:cNvPicPr>
           <p:nvPr/>
         </p:nvPicPr>
         <p:blipFill>
-          <a:blip r:embed="rId2">
+          <a:blip r:embed="rId1">
             <a:extLst>
               <a:ext uri="{28A0092B-C50C-407E-A947-70E740481C1C}">
                 <a14:useLocalDpi xmlns:a14="http://schemas.microsoft.com/office/drawing/2010/main" val="0"/>
@@ -6538,13 +5948,7 @@
       </p:pic>
       <p:sp>
         <p:nvSpPr>
-          <p:cNvPr id="7" name="TextBox 6">
-            <a:extLst>
-              <a:ext uri="{FF2B5EF4-FFF2-40B4-BE49-F238E27FC236}">
-                <a16:creationId xmlns:a16="http://schemas.microsoft.com/office/drawing/2014/main" id="{DA7F384C-D117-C878-ACFD-24F37BBF4683}"/>
-              </a:ext>
-            </a:extLst>
-          </p:cNvPr>
+          <p:cNvPr id="7" name="TextBox 6"/>
           <p:cNvSpPr txBox="1"/>
           <p:nvPr/>
         </p:nvSpPr>
@@ -6570,18 +5974,15 @@
               </a:rPr>
               <a:t>AI FUSION 2026</a:t>
             </a:r>
-          </a:p>
-        </p:txBody>
-      </p:sp>
-      <p:sp>
-        <p:nvSpPr>
-          <p:cNvPr id="9" name="Rectangle 8">
-            <a:extLst>
-              <a:ext uri="{FF2B5EF4-FFF2-40B4-BE49-F238E27FC236}">
-                <a16:creationId xmlns:a16="http://schemas.microsoft.com/office/drawing/2014/main" id="{6B27B4EC-5B44-30BC-1138-7C16EDF53CD6}"/>
-              </a:ext>
-            </a:extLst>
-          </p:cNvPr>
+            <a:endParaRPr lang="en-US" b="1" dirty="0">
+              <a:latin typeface="Arial Narrow" panose="020B0606020202030204" pitchFamily="34" charset="0"/>
+            </a:endParaRPr>
+          </a:p>
+        </p:txBody>
+      </p:sp>
+      <p:sp>
+        <p:nvSpPr>
+          <p:cNvPr id="9" name="Rectangle 8"/>
           <p:cNvSpPr/>
           <p:nvPr/>
         </p:nvSpPr>
@@ -6621,13 +6022,7 @@
       </p:sp>
       <p:sp>
         <p:nvSpPr>
-          <p:cNvPr id="11" name="TextBox 10">
-            <a:extLst>
-              <a:ext uri="{FF2B5EF4-FFF2-40B4-BE49-F238E27FC236}">
-                <a16:creationId xmlns:a16="http://schemas.microsoft.com/office/drawing/2014/main" id="{6D7E17C3-FEED-71F9-9F5F-CC2D942048D5}"/>
-              </a:ext>
-            </a:extLst>
-          </p:cNvPr>
+          <p:cNvPr id="11" name="TextBox 10"/>
           <p:cNvSpPr txBox="1"/>
           <p:nvPr/>
         </p:nvSpPr>
@@ -6654,18 +6049,16 @@
               </a:rPr>
               <a:t>@AI Fusion submission-Template</a:t>
             </a:r>
-          </a:p>
-        </p:txBody>
-      </p:sp>
-      <p:sp>
-        <p:nvSpPr>
-          <p:cNvPr id="13" name="Oval 12">
-            <a:extLst>
-              <a:ext uri="{FF2B5EF4-FFF2-40B4-BE49-F238E27FC236}">
-                <a16:creationId xmlns:a16="http://schemas.microsoft.com/office/drawing/2014/main" id="{C33B6A5F-45E2-1393-F1F6-E8B6BE6C4000}"/>
-              </a:ext>
-            </a:extLst>
-          </p:cNvPr>
+            <a:endParaRPr lang="en-US" b="1" dirty="0">
+              <a:latin typeface="Times New Roman" panose="02020603050405020304" pitchFamily="18" charset="0"/>
+              <a:cs typeface="Times New Roman" panose="02020603050405020304" pitchFamily="18" charset="0"/>
+            </a:endParaRPr>
+          </a:p>
+        </p:txBody>
+      </p:sp>
+      <p:sp>
+        <p:nvSpPr>
+          <p:cNvPr id="13" name="Oval 12"/>
           <p:cNvSpPr/>
           <p:nvPr/>
         </p:nvSpPr>
@@ -6713,13 +6106,7 @@
       </p:sp>
       <p:sp>
         <p:nvSpPr>
-          <p:cNvPr id="15" name="TextBox 14">
-            <a:extLst>
-              <a:ext uri="{FF2B5EF4-FFF2-40B4-BE49-F238E27FC236}">
-                <a16:creationId xmlns:a16="http://schemas.microsoft.com/office/drawing/2014/main" id="{86DD8793-47BD-628D-A794-9118487A99B7}"/>
-              </a:ext>
-            </a:extLst>
-          </p:cNvPr>
+          <p:cNvPr id="15" name="TextBox 14"/>
           <p:cNvSpPr txBox="1"/>
           <p:nvPr/>
         </p:nvSpPr>
@@ -6743,25 +6130,20 @@
               <a:rPr lang="en-US" dirty="0"/>
               <a:t>TEAM NAME</a:t>
             </a:r>
-          </a:p>
-        </p:txBody>
-      </p:sp>
-      <p:sp>
-        <p:nvSpPr>
-          <p:cNvPr id="16" name="TextBox 15">
-            <a:extLst>
-              <a:ext uri="{FF2B5EF4-FFF2-40B4-BE49-F238E27FC236}">
-                <a16:creationId xmlns:a16="http://schemas.microsoft.com/office/drawing/2014/main" id="{F1D3EDA6-1286-868E-F206-61DF03FCF93F}"/>
-              </a:ext>
-            </a:extLst>
-          </p:cNvPr>
+            <a:endParaRPr lang="en-US" dirty="0"/>
+          </a:p>
+        </p:txBody>
+      </p:sp>
+      <p:sp>
+        <p:nvSpPr>
+          <p:cNvPr id="16" name="TextBox 15"/>
           <p:cNvSpPr txBox="1"/>
           <p:nvPr/>
         </p:nvSpPr>
         <p:spPr>
           <a:xfrm>
             <a:off x="595216" y="1897528"/>
-            <a:ext cx="11682509" cy="4093428"/>
+            <a:ext cx="11682509" cy="4092575"/>
           </a:xfrm>
           <a:prstGeom prst="rect">
             <a:avLst/>
@@ -6784,11 +6166,11 @@
                   <a:schemeClr val="dk1"/>
                 </a:solidFill>
                 <a:latin typeface="Times New Roman" panose="02020603050405020304" pitchFamily="18" charset="0"/>
-                <a:ea typeface="Calibri"/>
-                <a:cs typeface="Times New Roman" panose="02020603050405020304" pitchFamily="18" charset="0"/>
-                <a:sym typeface="Calibri"/>
-              </a:rPr>
-              <a:t>Kindly keep the maximum slides limit up to six </a:t>
+                <a:ea typeface="Calibri" panose="020F0502020204030204"/>
+                <a:cs typeface="Times New Roman" panose="02020603050405020304" pitchFamily="18" charset="0"/>
+                <a:sym typeface="Calibri" panose="020F0502020204030204"/>
+              </a:rPr>
+              <a:t>Kindly keep the maximum slides limit up to Fourteen </a:t>
             </a:r>
             <a:r>
               <a:rPr lang="en-US" sz="2200" i="0" u="none" strike="noStrike" cap="none" dirty="0">
@@ -6796,9 +6178,9 @@
                   <a:srgbClr val="C00000"/>
                 </a:solidFill>
                 <a:latin typeface="Times New Roman" panose="02020603050405020304" pitchFamily="18" charset="0"/>
-                <a:ea typeface="Calibri"/>
-                <a:cs typeface="Times New Roman" panose="02020603050405020304" pitchFamily="18" charset="0"/>
-                <a:sym typeface="Calibri"/>
+                <a:ea typeface="Calibri" panose="020F0502020204030204"/>
+                <a:cs typeface="Times New Roman" panose="02020603050405020304" pitchFamily="18" charset="0"/>
+                <a:sym typeface="Calibri" panose="020F0502020204030204"/>
               </a:rPr>
               <a:t>(14). </a:t>
             </a:r>
@@ -6808,9 +6190,9 @@
                   <a:schemeClr val="dk1"/>
                 </a:solidFill>
                 <a:latin typeface="Times New Roman" panose="02020603050405020304" pitchFamily="18" charset="0"/>
-                <a:ea typeface="Calibri"/>
-                <a:cs typeface="Times New Roman" panose="02020603050405020304" pitchFamily="18" charset="0"/>
-                <a:sym typeface="Calibri"/>
+                <a:ea typeface="Calibri" panose="020F0502020204030204"/>
+                <a:cs typeface="Times New Roman" panose="02020603050405020304" pitchFamily="18" charset="0"/>
+                <a:sym typeface="Calibri" panose="020F0502020204030204"/>
               </a:rPr>
               <a:t>( Including the title slide) </a:t>
             </a:r>
@@ -6831,6 +6213,10 @@
               </a:rPr>
               <a:t>Each team must consist of 2–4 participants.</a:t>
             </a:r>
+            <a:endParaRPr lang="en-US" sz="2200" dirty="0">
+              <a:latin typeface="Times New Roman" panose="02020603050405020304" pitchFamily="18" charset="0"/>
+              <a:cs typeface="Times New Roman" panose="02020603050405020304" pitchFamily="18" charset="0"/>
+            </a:endParaRPr>
           </a:p>
           <a:p>
             <a:pPr marL="342900" lvl="0" indent="-342900">
@@ -6844,6 +6230,10 @@
               </a:rPr>
               <a:t>Teams must submit their PPT and working prototype within the specified deadline.</a:t>
             </a:r>
+            <a:endParaRPr lang="en-US" sz="2200" dirty="0">
+              <a:latin typeface="Times New Roman" panose="02020603050405020304" pitchFamily="18" charset="0"/>
+              <a:cs typeface="Times New Roman" panose="02020603050405020304" pitchFamily="18" charset="0"/>
+            </a:endParaRPr>
           </a:p>
           <a:p>
             <a:pPr marL="342900" lvl="0" indent="-342900">
@@ -6857,6 +6247,10 @@
               </a:rPr>
               <a:t>The solution must address a real-world problem and align with the chosen category.</a:t>
             </a:r>
+            <a:endParaRPr lang="en-US" sz="2200" dirty="0">
+              <a:latin typeface="Times New Roman" panose="02020603050405020304" pitchFamily="18" charset="0"/>
+              <a:cs typeface="Times New Roman" panose="02020603050405020304" pitchFamily="18" charset="0"/>
+            </a:endParaRPr>
           </a:p>
           <a:p>
             <a:pPr marL="342900" lvl="0" indent="-342900">
@@ -6870,6 +6264,10 @@
               </a:rPr>
               <a:t>Participants must follow the given PPT format and submission guidelines.</a:t>
             </a:r>
+            <a:endParaRPr lang="en-US" sz="2200" dirty="0">
+              <a:latin typeface="Times New Roman" panose="02020603050405020304" pitchFamily="18" charset="0"/>
+              <a:cs typeface="Times New Roman" panose="02020603050405020304" pitchFamily="18" charset="0"/>
+            </a:endParaRPr>
           </a:p>
           <a:p>
             <a:pPr marL="342900" lvl="0" indent="-342900">
@@ -6883,6 +6281,10 @@
               </a:rPr>
               <a:t>The prototype must be demonstrable during the evaluation.</a:t>
             </a:r>
+            <a:endParaRPr lang="en-US" sz="2200" dirty="0">
+              <a:latin typeface="Times New Roman" panose="02020603050405020304" pitchFamily="18" charset="0"/>
+              <a:cs typeface="Times New Roman" panose="02020603050405020304" pitchFamily="18" charset="0"/>
+            </a:endParaRPr>
           </a:p>
           <a:p>
             <a:pPr marL="342900" lvl="0" indent="-342900">
@@ -6896,6 +6298,10 @@
               </a:rPr>
               <a:t>Teams must complete their presentation within the given time limit.</a:t>
             </a:r>
+            <a:endParaRPr lang="en-US" sz="2200" dirty="0">
+              <a:latin typeface="Times New Roman" panose="02020603050405020304" pitchFamily="18" charset="0"/>
+              <a:cs typeface="Times New Roman" panose="02020603050405020304" pitchFamily="18" charset="0"/>
+            </a:endParaRPr>
           </a:p>
           <a:p>
             <a:pPr marL="342900" lvl="0" indent="-342900">
@@ -6909,6 +6315,10 @@
               </a:rPr>
               <a:t>Any changes to the submitted project after the deadline are subject to the organizer/judging guidelines.</a:t>
             </a:r>
+            <a:endParaRPr lang="en-US" sz="2200" dirty="0">
+              <a:latin typeface="Times New Roman" panose="02020603050405020304" pitchFamily="18" charset="0"/>
+              <a:cs typeface="Times New Roman" panose="02020603050405020304" pitchFamily="18" charset="0"/>
+            </a:endParaRPr>
           </a:p>
           <a:p>
             <a:pPr marL="342900" lvl="0" indent="-342900">
@@ -6922,6 +6332,10 @@
               </a:rPr>
               <a:t>The judges’ decision will be final.</a:t>
             </a:r>
+            <a:endParaRPr lang="en-US" sz="2200" dirty="0">
+              <a:latin typeface="Times New Roman" panose="02020603050405020304" pitchFamily="18" charset="0"/>
+              <a:cs typeface="Times New Roman" panose="02020603050405020304" pitchFamily="18" charset="0"/>
+            </a:endParaRPr>
           </a:p>
           <a:p>
             <a:pPr marL="342900" lvl="0" indent="-342900">
@@ -6935,6 +6349,10 @@
               </a:rPr>
               <a:t>Organizers reserve the right to disqualify teams for rule violations.</a:t>
             </a:r>
+            <a:endParaRPr lang="en-US" sz="2200" dirty="0">
+              <a:latin typeface="Times New Roman" panose="02020603050405020304" pitchFamily="18" charset="0"/>
+              <a:cs typeface="Times New Roman" panose="02020603050405020304" pitchFamily="18" charset="0"/>
+            </a:endParaRPr>
           </a:p>
           <a:p>
             <a:pPr marL="285750" indent="-285750">
@@ -6947,13 +6365,7 @@
       </p:sp>
       <p:sp>
         <p:nvSpPr>
-          <p:cNvPr id="18" name="TextBox 17">
-            <a:extLst>
-              <a:ext uri="{FF2B5EF4-FFF2-40B4-BE49-F238E27FC236}">
-                <a16:creationId xmlns:a16="http://schemas.microsoft.com/office/drawing/2014/main" id="{95994188-EBC6-E56A-81B4-5AFB9D1AFBF1}"/>
-              </a:ext>
-            </a:extLst>
-          </p:cNvPr>
+          <p:cNvPr id="18" name="TextBox 17"/>
           <p:cNvSpPr txBox="1"/>
           <p:nvPr/>
         </p:nvSpPr>
@@ -6977,15 +6389,11 @@
               <a:rPr lang="en-US" sz="2800" dirty="0"/>
               <a:t>RULES</a:t>
             </a:r>
+            <a:endParaRPr lang="en-US" sz="2800" dirty="0"/>
           </a:p>
         </p:txBody>
       </p:sp>
     </p:spTree>
-    <p:extLst>
-      <p:ext uri="{BB962C8B-B14F-4D97-AF65-F5344CB8AC3E}">
-        <p14:creationId xmlns:p14="http://schemas.microsoft.com/office/powerpoint/2010/main" val="2968001199"/>
-      </p:ext>
-    </p:extLst>
   </p:cSld>
   <p:clrMapOvr>
     <a:masterClrMapping/>
@@ -7012,20 +6420,14 @@
       </p:grpSpPr>
       <p:pic>
         <p:nvPicPr>
-          <p:cNvPr id="5" name="Picture 4">
-            <a:extLst>
-              <a:ext uri="{FF2B5EF4-FFF2-40B4-BE49-F238E27FC236}">
-                <a16:creationId xmlns:a16="http://schemas.microsoft.com/office/drawing/2014/main" id="{43B4E99E-4496-0EBF-FA09-4C3C17965424}"/>
-              </a:ext>
-            </a:extLst>
-          </p:cNvPr>
+          <p:cNvPr id="5" name="Picture 4"/>
           <p:cNvPicPr>
             <a:picLocks noChangeAspect="1"/>
           </p:cNvPicPr>
           <p:nvPr/>
         </p:nvPicPr>
         <p:blipFill>
-          <a:blip r:embed="rId2">
+          <a:blip r:embed="rId1">
             <a:extLst>
               <a:ext uri="{28A0092B-C50C-407E-A947-70E740481C1C}">
                 <a14:useLocalDpi xmlns:a14="http://schemas.microsoft.com/office/drawing/2010/main" val="0"/>
@@ -7048,13 +6450,7 @@
       </p:pic>
       <p:sp>
         <p:nvSpPr>
-          <p:cNvPr id="7" name="TextBox 6">
-            <a:extLst>
-              <a:ext uri="{FF2B5EF4-FFF2-40B4-BE49-F238E27FC236}">
-                <a16:creationId xmlns:a16="http://schemas.microsoft.com/office/drawing/2014/main" id="{65B077EC-E431-AFC5-CDC5-2252E1B93B2E}"/>
-              </a:ext>
-            </a:extLst>
-          </p:cNvPr>
+          <p:cNvPr id="7" name="TextBox 6"/>
           <p:cNvSpPr txBox="1"/>
           <p:nvPr/>
         </p:nvSpPr>
@@ -7080,18 +6476,15 @@
               </a:rPr>
               <a:t>AI FUSION 2026</a:t>
             </a:r>
-          </a:p>
-        </p:txBody>
-      </p:sp>
-      <p:sp>
-        <p:nvSpPr>
-          <p:cNvPr id="11" name="Rectangle 10">
-            <a:extLst>
-              <a:ext uri="{FF2B5EF4-FFF2-40B4-BE49-F238E27FC236}">
-                <a16:creationId xmlns:a16="http://schemas.microsoft.com/office/drawing/2014/main" id="{BC788F45-8AF2-F9B6-58B6-3A232477AF91}"/>
-              </a:ext>
-            </a:extLst>
-          </p:cNvPr>
+            <a:endParaRPr lang="en-US" b="1" dirty="0">
+              <a:latin typeface="Arial Narrow" panose="020B0606020202030204" pitchFamily="34" charset="0"/>
+            </a:endParaRPr>
+          </a:p>
+        </p:txBody>
+      </p:sp>
+      <p:sp>
+        <p:nvSpPr>
+          <p:cNvPr id="11" name="Rectangle 10"/>
           <p:cNvSpPr/>
           <p:nvPr/>
         </p:nvSpPr>
@@ -7131,13 +6524,7 @@
       </p:sp>
       <p:sp>
         <p:nvSpPr>
-          <p:cNvPr id="17" name="TextBox 16">
-            <a:extLst>
-              <a:ext uri="{FF2B5EF4-FFF2-40B4-BE49-F238E27FC236}">
-                <a16:creationId xmlns:a16="http://schemas.microsoft.com/office/drawing/2014/main" id="{0BE2FA96-CAC4-F2B7-2075-4546026157CF}"/>
-              </a:ext>
-            </a:extLst>
-          </p:cNvPr>
+          <p:cNvPr id="17" name="TextBox 16"/>
           <p:cNvSpPr txBox="1"/>
           <p:nvPr/>
         </p:nvSpPr>
@@ -7164,18 +6551,16 @@
               </a:rPr>
               <a:t>@AI Fusion submission-Template</a:t>
             </a:r>
-          </a:p>
-        </p:txBody>
-      </p:sp>
-      <p:sp>
-        <p:nvSpPr>
-          <p:cNvPr id="18" name="Oval 17">
-            <a:extLst>
-              <a:ext uri="{FF2B5EF4-FFF2-40B4-BE49-F238E27FC236}">
-                <a16:creationId xmlns:a16="http://schemas.microsoft.com/office/drawing/2014/main" id="{4B5632C4-4A22-162C-B184-39D191901300}"/>
-              </a:ext>
-            </a:extLst>
-          </p:cNvPr>
+            <a:endParaRPr lang="en-US" b="1" dirty="0">
+              <a:latin typeface="Times New Roman" panose="02020603050405020304" pitchFamily="18" charset="0"/>
+              <a:cs typeface="Times New Roman" panose="02020603050405020304" pitchFamily="18" charset="0"/>
+            </a:endParaRPr>
+          </a:p>
+        </p:txBody>
+      </p:sp>
+      <p:sp>
+        <p:nvSpPr>
+          <p:cNvPr id="18" name="Oval 17"/>
           <p:cNvSpPr/>
           <p:nvPr/>
         </p:nvSpPr>
@@ -7223,13 +6608,7 @@
       </p:sp>
       <p:sp>
         <p:nvSpPr>
-          <p:cNvPr id="19" name="TextBox 18">
-            <a:extLst>
-              <a:ext uri="{FF2B5EF4-FFF2-40B4-BE49-F238E27FC236}">
-                <a16:creationId xmlns:a16="http://schemas.microsoft.com/office/drawing/2014/main" id="{E741C64C-F3EE-0A2C-84D5-AA99B76093FE}"/>
-              </a:ext>
-            </a:extLst>
-          </p:cNvPr>
+          <p:cNvPr id="19" name="TextBox 18"/>
           <p:cNvSpPr txBox="1"/>
           <p:nvPr/>
         </p:nvSpPr>
@@ -7253,18 +6632,13 @@
               <a:rPr lang="en-US" dirty="0"/>
               <a:t>TEAM NAME</a:t>
             </a:r>
-          </a:p>
-        </p:txBody>
-      </p:sp>
-      <p:sp>
-        <p:nvSpPr>
-          <p:cNvPr id="21" name="TextBox 20">
-            <a:extLst>
-              <a:ext uri="{FF2B5EF4-FFF2-40B4-BE49-F238E27FC236}">
-                <a16:creationId xmlns:a16="http://schemas.microsoft.com/office/drawing/2014/main" id="{81A3705A-88E0-16CF-1706-8864921D91B1}"/>
-              </a:ext>
-            </a:extLst>
-          </p:cNvPr>
+            <a:endParaRPr lang="en-US" dirty="0"/>
+          </a:p>
+        </p:txBody>
+      </p:sp>
+      <p:sp>
+        <p:nvSpPr>
+          <p:cNvPr id="21" name="TextBox 20"/>
           <p:cNvSpPr txBox="1"/>
           <p:nvPr/>
         </p:nvSpPr>
@@ -7300,13 +6674,7 @@
       </p:sp>
       <p:sp>
         <p:nvSpPr>
-          <p:cNvPr id="34" name="TextBox 33">
-            <a:extLst>
-              <a:ext uri="{FF2B5EF4-FFF2-40B4-BE49-F238E27FC236}">
-                <a16:creationId xmlns:a16="http://schemas.microsoft.com/office/drawing/2014/main" id="{1C6BB03F-3F27-9FEF-BF07-9A995949102C}"/>
-              </a:ext>
-            </a:extLst>
-          </p:cNvPr>
+          <p:cNvPr id="34" name="TextBox 33"/>
           <p:cNvSpPr txBox="1"/>
           <p:nvPr/>
         </p:nvSpPr>
@@ -7337,6 +6705,10 @@
               </a:rPr>
               <a:t>What real-world problem are we solving? </a:t>
             </a:r>
+            <a:endParaRPr lang="en-US" sz="2400" dirty="0">
+              <a:latin typeface="Times New Roman" panose="02020603050405020304" pitchFamily="18" charset="0"/>
+              <a:cs typeface="Times New Roman" panose="02020603050405020304" pitchFamily="18" charset="0"/>
+            </a:endParaRPr>
           </a:p>
           <a:p>
             <a:pPr lvl="0"/>
@@ -7357,6 +6729,10 @@
               </a:rPr>
               <a:t>Who experiences this problem? </a:t>
             </a:r>
+            <a:endParaRPr lang="en-US" sz="2400" dirty="0">
+              <a:latin typeface="Times New Roman" panose="02020603050405020304" pitchFamily="18" charset="0"/>
+              <a:cs typeface="Times New Roman" panose="02020603050405020304" pitchFamily="18" charset="0"/>
+            </a:endParaRPr>
           </a:p>
           <a:p>
             <a:pPr lvl="0"/>
@@ -7377,6 +6753,10 @@
               </a:rPr>
               <a:t>What are the major challenges today? </a:t>
             </a:r>
+            <a:endParaRPr lang="en-US" sz="2400" dirty="0">
+              <a:latin typeface="Times New Roman" panose="02020603050405020304" pitchFamily="18" charset="0"/>
+              <a:cs typeface="Times New Roman" panose="02020603050405020304" pitchFamily="18" charset="0"/>
+            </a:endParaRPr>
           </a:p>
           <a:p>
             <a:pPr lvl="0"/>
@@ -7397,6 +6777,10 @@
               </a:rPr>
               <a:t>Why are existing solutions insufficient? </a:t>
             </a:r>
+            <a:endParaRPr lang="en-US" sz="2400" dirty="0">
+              <a:latin typeface="Times New Roman" panose="02020603050405020304" pitchFamily="18" charset="0"/>
+              <a:cs typeface="Times New Roman" panose="02020603050405020304" pitchFamily="18" charset="0"/>
+            </a:endParaRPr>
           </a:p>
           <a:p>
             <a:pPr lvl="0"/>
@@ -7417,6 +6801,10 @@
               </a:rPr>
               <a:t>What happens if the problem remains unsolved? </a:t>
             </a:r>
+            <a:endParaRPr lang="en-US" sz="2400" dirty="0">
+              <a:latin typeface="Times New Roman" panose="02020603050405020304" pitchFamily="18" charset="0"/>
+              <a:cs typeface="Times New Roman" panose="02020603050405020304" pitchFamily="18" charset="0"/>
+            </a:endParaRPr>
           </a:p>
           <a:p>
             <a:pPr lvl="0"/>
@@ -7437,15 +6825,14 @@
               </a:rPr>
               <a:t>Why is an innovative, technology-driven solution required? </a:t>
             </a:r>
+            <a:endParaRPr lang="en-US" sz="2400" dirty="0">
+              <a:latin typeface="Times New Roman" panose="02020603050405020304" pitchFamily="18" charset="0"/>
+              <a:cs typeface="Times New Roman" panose="02020603050405020304" pitchFamily="18" charset="0"/>
+            </a:endParaRPr>
           </a:p>
         </p:txBody>
       </p:sp>
     </p:spTree>
-    <p:extLst>
-      <p:ext uri="{BB962C8B-B14F-4D97-AF65-F5344CB8AC3E}">
-        <p14:creationId xmlns:p14="http://schemas.microsoft.com/office/powerpoint/2010/main" val="484045709"/>
-      </p:ext>
-    </p:extLst>
   </p:cSld>
   <p:clrMapOvr>
     <a:masterClrMapping/>
@@ -7472,20 +6859,14 @@
       </p:grpSpPr>
       <p:pic>
         <p:nvPicPr>
-          <p:cNvPr id="17" name="Picture 16">
-            <a:extLst>
-              <a:ext uri="{FF2B5EF4-FFF2-40B4-BE49-F238E27FC236}">
-                <a16:creationId xmlns:a16="http://schemas.microsoft.com/office/drawing/2014/main" id="{7F5AED17-34D9-2816-490C-38205E0D97B5}"/>
-              </a:ext>
-            </a:extLst>
-          </p:cNvPr>
+          <p:cNvPr id="17" name="Picture 16"/>
           <p:cNvPicPr>
             <a:picLocks noChangeAspect="1"/>
           </p:cNvPicPr>
           <p:nvPr/>
         </p:nvPicPr>
         <p:blipFill>
-          <a:blip r:embed="rId2">
+          <a:blip r:embed="rId1">
             <a:extLst>
               <a:ext uri="{28A0092B-C50C-407E-A947-70E740481C1C}">
                 <a14:useLocalDpi xmlns:a14="http://schemas.microsoft.com/office/drawing/2010/main" val="0"/>
@@ -7508,13 +6889,7 @@
       </p:pic>
       <p:sp>
         <p:nvSpPr>
-          <p:cNvPr id="19" name="TextBox 18">
-            <a:extLst>
-              <a:ext uri="{FF2B5EF4-FFF2-40B4-BE49-F238E27FC236}">
-                <a16:creationId xmlns:a16="http://schemas.microsoft.com/office/drawing/2014/main" id="{5C15745B-4869-0639-9D3D-F0843811236F}"/>
-              </a:ext>
-            </a:extLst>
-          </p:cNvPr>
+          <p:cNvPr id="19" name="TextBox 18"/>
           <p:cNvSpPr txBox="1"/>
           <p:nvPr/>
         </p:nvSpPr>
@@ -7540,18 +6915,15 @@
               </a:rPr>
               <a:t>AI FUSION 2026</a:t>
             </a:r>
-          </a:p>
-        </p:txBody>
-      </p:sp>
-      <p:sp>
-        <p:nvSpPr>
-          <p:cNvPr id="21" name="Rectangle 20">
-            <a:extLst>
-              <a:ext uri="{FF2B5EF4-FFF2-40B4-BE49-F238E27FC236}">
-                <a16:creationId xmlns:a16="http://schemas.microsoft.com/office/drawing/2014/main" id="{422038D2-1F24-E3EF-4338-A428AEBFE9FB}"/>
-              </a:ext>
-            </a:extLst>
-          </p:cNvPr>
+            <a:endParaRPr lang="en-US" b="1" dirty="0">
+              <a:latin typeface="Arial Narrow" panose="020B0606020202030204" pitchFamily="34" charset="0"/>
+            </a:endParaRPr>
+          </a:p>
+        </p:txBody>
+      </p:sp>
+      <p:sp>
+        <p:nvSpPr>
+          <p:cNvPr id="21" name="Rectangle 20"/>
           <p:cNvSpPr/>
           <p:nvPr/>
         </p:nvSpPr>
@@ -7591,13 +6963,7 @@
       </p:sp>
       <p:sp>
         <p:nvSpPr>
-          <p:cNvPr id="23" name="TextBox 22">
-            <a:extLst>
-              <a:ext uri="{FF2B5EF4-FFF2-40B4-BE49-F238E27FC236}">
-                <a16:creationId xmlns:a16="http://schemas.microsoft.com/office/drawing/2014/main" id="{55FBF6B5-1051-B5D0-2871-57202A5CA369}"/>
-              </a:ext>
-            </a:extLst>
-          </p:cNvPr>
+          <p:cNvPr id="23" name="TextBox 22"/>
           <p:cNvSpPr txBox="1"/>
           <p:nvPr/>
         </p:nvSpPr>
@@ -7624,18 +6990,16 @@
               </a:rPr>
               <a:t>@AI Fusion submission-Template</a:t>
             </a:r>
-          </a:p>
-        </p:txBody>
-      </p:sp>
-      <p:sp>
-        <p:nvSpPr>
-          <p:cNvPr id="25" name="Oval 24">
-            <a:extLst>
-              <a:ext uri="{FF2B5EF4-FFF2-40B4-BE49-F238E27FC236}">
-                <a16:creationId xmlns:a16="http://schemas.microsoft.com/office/drawing/2014/main" id="{B4E46D00-BD8E-9C9A-7FC1-B6F7B27A5D29}"/>
-              </a:ext>
-            </a:extLst>
-          </p:cNvPr>
+            <a:endParaRPr lang="en-US" b="1" dirty="0">
+              <a:latin typeface="Times New Roman" panose="02020603050405020304" pitchFamily="18" charset="0"/>
+              <a:cs typeface="Times New Roman" panose="02020603050405020304" pitchFamily="18" charset="0"/>
+            </a:endParaRPr>
+          </a:p>
+        </p:txBody>
+      </p:sp>
+      <p:sp>
+        <p:nvSpPr>
+          <p:cNvPr id="25" name="Oval 24"/>
           <p:cNvSpPr/>
           <p:nvPr/>
         </p:nvSpPr>
@@ -7683,13 +7047,7 @@
       </p:sp>
       <p:sp>
         <p:nvSpPr>
-          <p:cNvPr id="27" name="TextBox 26">
-            <a:extLst>
-              <a:ext uri="{FF2B5EF4-FFF2-40B4-BE49-F238E27FC236}">
-                <a16:creationId xmlns:a16="http://schemas.microsoft.com/office/drawing/2014/main" id="{4406D836-C69E-AC91-65FC-D05E0618329C}"/>
-              </a:ext>
-            </a:extLst>
-          </p:cNvPr>
+          <p:cNvPr id="27" name="TextBox 26"/>
           <p:cNvSpPr txBox="1"/>
           <p:nvPr/>
         </p:nvSpPr>
@@ -7713,18 +7071,13 @@
               <a:rPr lang="en-US" dirty="0"/>
               <a:t>TEAM NAME</a:t>
             </a:r>
-          </a:p>
-        </p:txBody>
-      </p:sp>
-      <p:sp>
-        <p:nvSpPr>
-          <p:cNvPr id="32" name="TextBox 31">
-            <a:extLst>
-              <a:ext uri="{FF2B5EF4-FFF2-40B4-BE49-F238E27FC236}">
-                <a16:creationId xmlns:a16="http://schemas.microsoft.com/office/drawing/2014/main" id="{592F64F2-E484-2322-24A8-CA3E6B8413F3}"/>
-              </a:ext>
-            </a:extLst>
-          </p:cNvPr>
+            <a:endParaRPr lang="en-US" dirty="0"/>
+          </a:p>
+        </p:txBody>
+      </p:sp>
+      <p:sp>
+        <p:nvSpPr>
+          <p:cNvPr id="32" name="TextBox 31"/>
           <p:cNvSpPr txBox="1"/>
           <p:nvPr/>
         </p:nvSpPr>
@@ -7751,6 +7104,10 @@
               </a:rPr>
               <a:t>Problem Statement</a:t>
             </a:r>
+            <a:endParaRPr lang="en-IN" sz="2800" b="1" dirty="0">
+              <a:latin typeface="Arial" panose="020B0604020202020204" pitchFamily="34" charset="0"/>
+              <a:cs typeface="Arial" panose="020B0604020202020204" pitchFamily="34" charset="0"/>
+            </a:endParaRPr>
           </a:p>
           <a:p>
             <a:endParaRPr lang="en-US" sz="2800" dirty="0"/>
@@ -7759,13 +7116,7 @@
       </p:sp>
       <p:sp>
         <p:nvSpPr>
-          <p:cNvPr id="34" name="TextBox 33">
-            <a:extLst>
-              <a:ext uri="{FF2B5EF4-FFF2-40B4-BE49-F238E27FC236}">
-                <a16:creationId xmlns:a16="http://schemas.microsoft.com/office/drawing/2014/main" id="{17CAAAFF-C0C3-A14E-7F37-75BCB3DFABEC}"/>
-              </a:ext>
-            </a:extLst>
-          </p:cNvPr>
+          <p:cNvPr id="34" name="TextBox 33"/>
           <p:cNvSpPr txBox="1"/>
           <p:nvPr/>
         </p:nvSpPr>
@@ -7792,6 +7143,10 @@
               </a:rPr>
               <a:t>“How might we use technology to [solve the specific problem] so that [target users] can achieve [measurable outcome]?”</a:t>
             </a:r>
+            <a:endParaRPr lang="en-US" sz="2800" b="1" dirty="0">
+              <a:latin typeface="Times New Roman" panose="02020603050405020304" pitchFamily="18" charset="0"/>
+              <a:cs typeface="Times New Roman" panose="02020603050405020304" pitchFamily="18" charset="0"/>
+            </a:endParaRPr>
           </a:p>
           <a:p>
             <a:endParaRPr lang="en-US" sz="2800" dirty="0">
@@ -7824,6 +7179,10 @@
               </a:rPr>
               <a:t>Target Users </a:t>
             </a:r>
+            <a:endParaRPr lang="en-US" sz="2800" dirty="0">
+              <a:latin typeface="Times New Roman" panose="02020603050405020304" pitchFamily="18" charset="0"/>
+              <a:cs typeface="Times New Roman" panose="02020603050405020304" pitchFamily="18" charset="0"/>
+            </a:endParaRPr>
           </a:p>
           <a:p>
             <a:pPr marL="457200" lvl="0" indent="-457200">
@@ -7837,6 +7196,10 @@
               </a:rPr>
               <a:t>Core Problem </a:t>
             </a:r>
+            <a:endParaRPr lang="en-US" sz="2800" dirty="0">
+              <a:latin typeface="Times New Roman" panose="02020603050405020304" pitchFamily="18" charset="0"/>
+              <a:cs typeface="Times New Roman" panose="02020603050405020304" pitchFamily="18" charset="0"/>
+            </a:endParaRPr>
           </a:p>
           <a:p>
             <a:pPr marL="457200" lvl="0" indent="-457200">
@@ -7850,6 +7213,10 @@
               </a:rPr>
               <a:t>Root Cause </a:t>
             </a:r>
+            <a:endParaRPr lang="en-US" sz="2800" dirty="0">
+              <a:latin typeface="Times New Roman" panose="02020603050405020304" pitchFamily="18" charset="0"/>
+              <a:cs typeface="Times New Roman" panose="02020603050405020304" pitchFamily="18" charset="0"/>
+            </a:endParaRPr>
           </a:p>
           <a:p>
             <a:pPr marL="457200" lvl="0" indent="-457200">
@@ -7863,6 +7230,10 @@
               </a:rPr>
               <a:t>Existing Gap </a:t>
             </a:r>
+            <a:endParaRPr lang="en-US" sz="2800" dirty="0">
+              <a:latin typeface="Times New Roman" panose="02020603050405020304" pitchFamily="18" charset="0"/>
+              <a:cs typeface="Times New Roman" panose="02020603050405020304" pitchFamily="18" charset="0"/>
+            </a:endParaRPr>
           </a:p>
           <a:p>
             <a:pPr marL="457200" lvl="0" indent="-457200">
@@ -7876,21 +7247,20 @@
               </a:rPr>
               <a:t>Desired Outcome</a:t>
             </a:r>
-          </a:p>
-          <a:p>
             <a:endParaRPr lang="en-US" sz="2800" dirty="0">
               <a:latin typeface="Times New Roman" panose="02020603050405020304" pitchFamily="18" charset="0"/>
               <a:cs typeface="Times New Roman" panose="02020603050405020304" pitchFamily="18" charset="0"/>
             </a:endParaRPr>
           </a:p>
+          <a:p>
+            <a:endParaRPr lang="en-US" sz="2800" dirty="0">
+              <a:latin typeface="Times New Roman" panose="02020603050405020304" pitchFamily="18" charset="0"/>
+              <a:cs typeface="Times New Roman" panose="02020603050405020304" pitchFamily="18" charset="0"/>
+            </a:endParaRPr>
+          </a:p>
         </p:txBody>
       </p:sp>
     </p:spTree>
-    <p:extLst>
-      <p:ext uri="{BB962C8B-B14F-4D97-AF65-F5344CB8AC3E}">
-        <p14:creationId xmlns:p14="http://schemas.microsoft.com/office/powerpoint/2010/main" val="714038194"/>
-      </p:ext>
-    </p:extLst>
   </p:cSld>
   <p:clrMapOvr>
     <a:masterClrMapping/>
@@ -7917,20 +7287,14 @@
       </p:grpSpPr>
       <p:pic>
         <p:nvPicPr>
-          <p:cNvPr id="5" name="Picture 4">
-            <a:extLst>
-              <a:ext uri="{FF2B5EF4-FFF2-40B4-BE49-F238E27FC236}">
-                <a16:creationId xmlns:a16="http://schemas.microsoft.com/office/drawing/2014/main" id="{2D4C9A7C-BB24-FE1F-1FE8-8C045903849E}"/>
-              </a:ext>
-            </a:extLst>
-          </p:cNvPr>
+          <p:cNvPr id="5" name="Picture 4"/>
           <p:cNvPicPr>
             <a:picLocks noChangeAspect="1"/>
           </p:cNvPicPr>
           <p:nvPr/>
         </p:nvPicPr>
         <p:blipFill>
-          <a:blip r:embed="rId2">
+          <a:blip r:embed="rId1">
             <a:extLst>
               <a:ext uri="{28A0092B-C50C-407E-A947-70E740481C1C}">
                 <a14:useLocalDpi xmlns:a14="http://schemas.microsoft.com/office/drawing/2010/main" val="0"/>
@@ -7953,13 +7317,7 @@
       </p:pic>
       <p:sp>
         <p:nvSpPr>
-          <p:cNvPr id="7" name="TextBox 6">
-            <a:extLst>
-              <a:ext uri="{FF2B5EF4-FFF2-40B4-BE49-F238E27FC236}">
-                <a16:creationId xmlns:a16="http://schemas.microsoft.com/office/drawing/2014/main" id="{9FBAE679-9B02-A0B4-B1CF-934359E78F8A}"/>
-              </a:ext>
-            </a:extLst>
-          </p:cNvPr>
+          <p:cNvPr id="7" name="TextBox 6"/>
           <p:cNvSpPr txBox="1"/>
           <p:nvPr/>
         </p:nvSpPr>
@@ -7985,18 +7343,15 @@
               </a:rPr>
               <a:t>AI FUSION 2026</a:t>
             </a:r>
-          </a:p>
-        </p:txBody>
-      </p:sp>
-      <p:sp>
-        <p:nvSpPr>
-          <p:cNvPr id="9" name="Rectangle 8">
-            <a:extLst>
-              <a:ext uri="{FF2B5EF4-FFF2-40B4-BE49-F238E27FC236}">
-                <a16:creationId xmlns:a16="http://schemas.microsoft.com/office/drawing/2014/main" id="{11F551D6-DF0B-D7E0-5AF0-AACAC889EEEC}"/>
-              </a:ext>
-            </a:extLst>
-          </p:cNvPr>
+            <a:endParaRPr lang="en-US" b="1" dirty="0">
+              <a:latin typeface="Arial Narrow" panose="020B0606020202030204" pitchFamily="34" charset="0"/>
+            </a:endParaRPr>
+          </a:p>
+        </p:txBody>
+      </p:sp>
+      <p:sp>
+        <p:nvSpPr>
+          <p:cNvPr id="9" name="Rectangle 8"/>
           <p:cNvSpPr/>
           <p:nvPr/>
         </p:nvSpPr>
@@ -8036,13 +7391,7 @@
       </p:sp>
       <p:sp>
         <p:nvSpPr>
-          <p:cNvPr id="11" name="TextBox 10">
-            <a:extLst>
-              <a:ext uri="{FF2B5EF4-FFF2-40B4-BE49-F238E27FC236}">
-                <a16:creationId xmlns:a16="http://schemas.microsoft.com/office/drawing/2014/main" id="{2B33E45F-F0E2-E66C-C2A1-7073F1D74855}"/>
-              </a:ext>
-            </a:extLst>
-          </p:cNvPr>
+          <p:cNvPr id="11" name="TextBox 10"/>
           <p:cNvSpPr txBox="1"/>
           <p:nvPr/>
         </p:nvSpPr>
@@ -8069,18 +7418,16 @@
               </a:rPr>
               <a:t>@AI Fusion submission-Template</a:t>
             </a:r>
-          </a:p>
-        </p:txBody>
-      </p:sp>
-      <p:sp>
-        <p:nvSpPr>
-          <p:cNvPr id="13" name="Oval 12">
-            <a:extLst>
-              <a:ext uri="{FF2B5EF4-FFF2-40B4-BE49-F238E27FC236}">
-                <a16:creationId xmlns:a16="http://schemas.microsoft.com/office/drawing/2014/main" id="{99AE1134-F01C-32AF-CD6E-691CE54F1E16}"/>
-              </a:ext>
-            </a:extLst>
-          </p:cNvPr>
+            <a:endParaRPr lang="en-US" b="1" dirty="0">
+              <a:latin typeface="Times New Roman" panose="02020603050405020304" pitchFamily="18" charset="0"/>
+              <a:cs typeface="Times New Roman" panose="02020603050405020304" pitchFamily="18" charset="0"/>
+            </a:endParaRPr>
+          </a:p>
+        </p:txBody>
+      </p:sp>
+      <p:sp>
+        <p:nvSpPr>
+          <p:cNvPr id="13" name="Oval 12"/>
           <p:cNvSpPr/>
           <p:nvPr/>
         </p:nvSpPr>
@@ -8128,13 +7475,7 @@
       </p:sp>
       <p:sp>
         <p:nvSpPr>
-          <p:cNvPr id="15" name="TextBox 14">
-            <a:extLst>
-              <a:ext uri="{FF2B5EF4-FFF2-40B4-BE49-F238E27FC236}">
-                <a16:creationId xmlns:a16="http://schemas.microsoft.com/office/drawing/2014/main" id="{424B5744-CB9F-9E0D-FA55-F3123D048CA7}"/>
-              </a:ext>
-            </a:extLst>
-          </p:cNvPr>
+          <p:cNvPr id="15" name="TextBox 14"/>
           <p:cNvSpPr txBox="1"/>
           <p:nvPr/>
         </p:nvSpPr>
@@ -8158,18 +7499,13 @@
               <a:rPr lang="en-US" dirty="0"/>
               <a:t>TEAM NAME</a:t>
             </a:r>
-          </a:p>
-        </p:txBody>
-      </p:sp>
-      <p:sp>
-        <p:nvSpPr>
-          <p:cNvPr id="18" name="TextBox 17">
-            <a:extLst>
-              <a:ext uri="{FF2B5EF4-FFF2-40B4-BE49-F238E27FC236}">
-                <a16:creationId xmlns:a16="http://schemas.microsoft.com/office/drawing/2014/main" id="{FF4B9FE8-4EFA-0BEC-14D1-53DE9ED10C6D}"/>
-              </a:ext>
-            </a:extLst>
-          </p:cNvPr>
+            <a:endParaRPr lang="en-US" dirty="0"/>
+          </a:p>
+        </p:txBody>
+      </p:sp>
+      <p:sp>
+        <p:nvSpPr>
+          <p:cNvPr id="18" name="TextBox 17"/>
           <p:cNvSpPr txBox="1"/>
           <p:nvPr/>
         </p:nvSpPr>
@@ -8203,6 +7539,10 @@
               </a:rPr>
               <a:t> [Project Name]</a:t>
             </a:r>
+            <a:endParaRPr lang="en-US" sz="2400" dirty="0">
+              <a:latin typeface="Times New Roman" panose="02020603050405020304" pitchFamily="18" charset="0"/>
+              <a:cs typeface="Times New Roman" panose="02020603050405020304" pitchFamily="18" charset="0"/>
+            </a:endParaRPr>
           </a:p>
           <a:p>
             <a:endParaRPr lang="en-US" sz="2400" dirty="0">
@@ -8231,6 +7571,10 @@
               </a:rPr>
               <a:t>A smart, scalable and user-focused solution designed to solve [problem] through technology and intelligent automation.</a:t>
             </a:r>
+            <a:endParaRPr lang="en-US" sz="2400" dirty="0">
+              <a:latin typeface="Times New Roman" panose="02020603050405020304" pitchFamily="18" charset="0"/>
+              <a:cs typeface="Times New Roman" panose="02020603050405020304" pitchFamily="18" charset="0"/>
+            </a:endParaRPr>
           </a:p>
           <a:p>
             <a:endParaRPr lang="en-US" sz="2400" dirty="0">
@@ -8263,6 +7607,10 @@
               </a:rPr>
               <a:t>Identify the problem </a:t>
             </a:r>
+            <a:endParaRPr lang="en-US" sz="2400" dirty="0">
+              <a:latin typeface="Times New Roman" panose="02020603050405020304" pitchFamily="18" charset="0"/>
+              <a:cs typeface="Times New Roman" panose="02020603050405020304" pitchFamily="18" charset="0"/>
+            </a:endParaRPr>
           </a:p>
           <a:p>
             <a:pPr marL="342900" lvl="0" indent="-342900">
@@ -8276,6 +7624,10 @@
               </a:rPr>
               <a:t>Collect relevant data </a:t>
             </a:r>
+            <a:endParaRPr lang="en-US" sz="2400" dirty="0">
+              <a:latin typeface="Times New Roman" panose="02020603050405020304" pitchFamily="18" charset="0"/>
+              <a:cs typeface="Times New Roman" panose="02020603050405020304" pitchFamily="18" charset="0"/>
+            </a:endParaRPr>
           </a:p>
           <a:p>
             <a:pPr marL="342900" lvl="0" indent="-342900">
@@ -8289,6 +7641,10 @@
               </a:rPr>
               <a:t>Process and analyze information </a:t>
             </a:r>
+            <a:endParaRPr lang="en-US" sz="2400" dirty="0">
+              <a:latin typeface="Times New Roman" panose="02020603050405020304" pitchFamily="18" charset="0"/>
+              <a:cs typeface="Times New Roman" panose="02020603050405020304" pitchFamily="18" charset="0"/>
+            </a:endParaRPr>
           </a:p>
           <a:p>
             <a:pPr marL="342900" lvl="0" indent="-342900">
@@ -8302,6 +7658,10 @@
               </a:rPr>
               <a:t>Generate intelligent insights </a:t>
             </a:r>
+            <a:endParaRPr lang="en-US" sz="2400" dirty="0">
+              <a:latin typeface="Times New Roman" panose="02020603050405020304" pitchFamily="18" charset="0"/>
+              <a:cs typeface="Times New Roman" panose="02020603050405020304" pitchFamily="18" charset="0"/>
+            </a:endParaRPr>
           </a:p>
           <a:p>
             <a:pPr marL="342900" lvl="0" indent="-342900">
@@ -8315,6 +7675,10 @@
               </a:rPr>
               <a:t>Recommend or automate appropriate actions </a:t>
             </a:r>
+            <a:endParaRPr lang="en-US" sz="2400" dirty="0">
+              <a:latin typeface="Times New Roman" panose="02020603050405020304" pitchFamily="18" charset="0"/>
+              <a:cs typeface="Times New Roman" panose="02020603050405020304" pitchFamily="18" charset="0"/>
+            </a:endParaRPr>
           </a:p>
           <a:p>
             <a:pPr marL="342900" lvl="0" indent="-342900">
@@ -8328,24 +7692,22 @@
               </a:rPr>
               <a:t>Measure the resulting impact </a:t>
             </a:r>
-          </a:p>
-          <a:p>
             <a:endParaRPr lang="en-US" sz="2400" dirty="0">
               <a:latin typeface="Times New Roman" panose="02020603050405020304" pitchFamily="18" charset="0"/>
               <a:cs typeface="Times New Roman" panose="02020603050405020304" pitchFamily="18" charset="0"/>
             </a:endParaRPr>
           </a:p>
-        </p:txBody>
-      </p:sp>
-      <p:sp>
-        <p:nvSpPr>
-          <p:cNvPr id="20" name="TextBox 19">
-            <a:extLst>
-              <a:ext uri="{FF2B5EF4-FFF2-40B4-BE49-F238E27FC236}">
-                <a16:creationId xmlns:a16="http://schemas.microsoft.com/office/drawing/2014/main" id="{F08ABBA8-8867-E755-F87E-212CD50F5FED}"/>
-              </a:ext>
-            </a:extLst>
-          </p:cNvPr>
+          <a:p>
+            <a:endParaRPr lang="en-US" sz="2400" dirty="0">
+              <a:latin typeface="Times New Roman" panose="02020603050405020304" pitchFamily="18" charset="0"/>
+              <a:cs typeface="Times New Roman" panose="02020603050405020304" pitchFamily="18" charset="0"/>
+            </a:endParaRPr>
+          </a:p>
+        </p:txBody>
+      </p:sp>
+      <p:sp>
+        <p:nvSpPr>
+          <p:cNvPr id="20" name="TextBox 19"/>
           <p:cNvSpPr txBox="1"/>
           <p:nvPr/>
         </p:nvSpPr>
@@ -8369,6 +7731,7 @@
               <a:rPr lang="en-US" sz="2800" b="1" dirty="0"/>
               <a:t>OUR IDEA</a:t>
             </a:r>
+            <a:endParaRPr lang="en-US" sz="2800" b="1" dirty="0"/>
           </a:p>
           <a:p>
             <a:endParaRPr lang="en-US" sz="2800" dirty="0"/>
@@ -8376,11 +7739,6 @@
         </p:txBody>
       </p:sp>
     </p:spTree>
-    <p:extLst>
-      <p:ext uri="{BB962C8B-B14F-4D97-AF65-F5344CB8AC3E}">
-        <p14:creationId xmlns:p14="http://schemas.microsoft.com/office/powerpoint/2010/main" val="1323688812"/>
-      </p:ext>
-    </p:extLst>
   </p:cSld>
   <p:clrMapOvr>
     <a:masterClrMapping/>
@@ -8407,20 +7765,14 @@
       </p:grpSpPr>
       <p:pic>
         <p:nvPicPr>
-          <p:cNvPr id="5" name="Picture 4">
-            <a:extLst>
-              <a:ext uri="{FF2B5EF4-FFF2-40B4-BE49-F238E27FC236}">
-                <a16:creationId xmlns:a16="http://schemas.microsoft.com/office/drawing/2014/main" id="{AD8B96FC-E4A8-D097-3E67-20087B821AEC}"/>
-              </a:ext>
-            </a:extLst>
-          </p:cNvPr>
+          <p:cNvPr id="5" name="Picture 4"/>
           <p:cNvPicPr>
             <a:picLocks noChangeAspect="1"/>
           </p:cNvPicPr>
           <p:nvPr/>
         </p:nvPicPr>
         <p:blipFill>
-          <a:blip r:embed="rId2">
+          <a:blip r:embed="rId1">
             <a:extLst>
               <a:ext uri="{28A0092B-C50C-407E-A947-70E740481C1C}">
                 <a14:useLocalDpi xmlns:a14="http://schemas.microsoft.com/office/drawing/2010/main" val="0"/>
@@ -8443,13 +7795,7 @@
       </p:pic>
       <p:sp>
         <p:nvSpPr>
-          <p:cNvPr id="7" name="TextBox 6">
-            <a:extLst>
-              <a:ext uri="{FF2B5EF4-FFF2-40B4-BE49-F238E27FC236}">
-                <a16:creationId xmlns:a16="http://schemas.microsoft.com/office/drawing/2014/main" id="{60A6BB88-B1DF-4662-BF9E-F79814176A68}"/>
-              </a:ext>
-            </a:extLst>
-          </p:cNvPr>
+          <p:cNvPr id="7" name="TextBox 6"/>
           <p:cNvSpPr txBox="1"/>
           <p:nvPr/>
         </p:nvSpPr>
@@ -8475,18 +7821,15 @@
               </a:rPr>
               <a:t>AI FUSION 2026</a:t>
             </a:r>
-          </a:p>
-        </p:txBody>
-      </p:sp>
-      <p:sp>
-        <p:nvSpPr>
-          <p:cNvPr id="9" name="Rectangle 8">
-            <a:extLst>
-              <a:ext uri="{FF2B5EF4-FFF2-40B4-BE49-F238E27FC236}">
-                <a16:creationId xmlns:a16="http://schemas.microsoft.com/office/drawing/2014/main" id="{165492D6-93AF-56F0-BB79-A0F78A53DFCD}"/>
-              </a:ext>
-            </a:extLst>
-          </p:cNvPr>
+            <a:endParaRPr lang="en-US" b="1" dirty="0">
+              <a:latin typeface="Arial Narrow" panose="020B0606020202030204" pitchFamily="34" charset="0"/>
+            </a:endParaRPr>
+          </a:p>
+        </p:txBody>
+      </p:sp>
+      <p:sp>
+        <p:nvSpPr>
+          <p:cNvPr id="9" name="Rectangle 8"/>
           <p:cNvSpPr/>
           <p:nvPr/>
         </p:nvSpPr>
@@ -8526,13 +7869,7 @@
       </p:sp>
       <p:sp>
         <p:nvSpPr>
-          <p:cNvPr id="11" name="TextBox 10">
-            <a:extLst>
-              <a:ext uri="{FF2B5EF4-FFF2-40B4-BE49-F238E27FC236}">
-                <a16:creationId xmlns:a16="http://schemas.microsoft.com/office/drawing/2014/main" id="{3544B6F2-9260-A9CD-C8F6-7BC8E6A570A2}"/>
-              </a:ext>
-            </a:extLst>
-          </p:cNvPr>
+          <p:cNvPr id="11" name="TextBox 10"/>
           <p:cNvSpPr txBox="1"/>
           <p:nvPr/>
         </p:nvSpPr>
@@ -8559,18 +7896,16 @@
               </a:rPr>
               <a:t>@AI Fusion submission-Template</a:t>
             </a:r>
-          </a:p>
-        </p:txBody>
-      </p:sp>
-      <p:sp>
-        <p:nvSpPr>
-          <p:cNvPr id="13" name="Oval 12">
-            <a:extLst>
-              <a:ext uri="{FF2B5EF4-FFF2-40B4-BE49-F238E27FC236}">
-                <a16:creationId xmlns:a16="http://schemas.microsoft.com/office/drawing/2014/main" id="{D3237FA9-F8FE-1B26-C5DF-795392C67AFB}"/>
-              </a:ext>
-            </a:extLst>
-          </p:cNvPr>
+            <a:endParaRPr lang="en-US" b="1" dirty="0">
+              <a:latin typeface="Times New Roman" panose="02020603050405020304" pitchFamily="18" charset="0"/>
+              <a:cs typeface="Times New Roman" panose="02020603050405020304" pitchFamily="18" charset="0"/>
+            </a:endParaRPr>
+          </a:p>
+        </p:txBody>
+      </p:sp>
+      <p:sp>
+        <p:nvSpPr>
+          <p:cNvPr id="13" name="Oval 12"/>
           <p:cNvSpPr/>
           <p:nvPr/>
         </p:nvSpPr>
@@ -8618,13 +7953,7 @@
       </p:sp>
       <p:sp>
         <p:nvSpPr>
-          <p:cNvPr id="15" name="TextBox 14">
-            <a:extLst>
-              <a:ext uri="{FF2B5EF4-FFF2-40B4-BE49-F238E27FC236}">
-                <a16:creationId xmlns:a16="http://schemas.microsoft.com/office/drawing/2014/main" id="{44FE6D55-DB6B-85CD-B4CA-97884B014FD4}"/>
-              </a:ext>
-            </a:extLst>
-          </p:cNvPr>
+          <p:cNvPr id="15" name="TextBox 14"/>
           <p:cNvSpPr txBox="1"/>
           <p:nvPr/>
         </p:nvSpPr>
@@ -8648,18 +7977,13 @@
               <a:rPr lang="en-US" dirty="0"/>
               <a:t>TEAM NAME</a:t>
             </a:r>
-          </a:p>
-        </p:txBody>
-      </p:sp>
-      <p:sp>
-        <p:nvSpPr>
-          <p:cNvPr id="16" name="TextBox 15">
-            <a:extLst>
-              <a:ext uri="{FF2B5EF4-FFF2-40B4-BE49-F238E27FC236}">
-                <a16:creationId xmlns:a16="http://schemas.microsoft.com/office/drawing/2014/main" id="{436B3652-A2A3-C83D-183A-CD6C781A8947}"/>
-              </a:ext>
-            </a:extLst>
-          </p:cNvPr>
+            <a:endParaRPr lang="en-US" dirty="0"/>
+          </a:p>
+        </p:txBody>
+      </p:sp>
+      <p:sp>
+        <p:nvSpPr>
+          <p:cNvPr id="16" name="TextBox 15"/>
           <p:cNvSpPr txBox="1"/>
           <p:nvPr/>
         </p:nvSpPr>
@@ -8690,6 +8014,10 @@
               </a:rPr>
               <a:t>Addresses a clearly identified real-world need </a:t>
             </a:r>
+            <a:endParaRPr lang="en-US" sz="2400" dirty="0">
+              <a:latin typeface="Times New Roman" panose="02020603050405020304" pitchFamily="18" charset="0"/>
+              <a:cs typeface="Times New Roman" panose="02020603050405020304" pitchFamily="18" charset="0"/>
+            </a:endParaRPr>
           </a:p>
           <a:p>
             <a:pPr marL="285750" lvl="0" indent="-285750">
@@ -8703,6 +8031,10 @@
               </a:rPr>
               <a:t>Reduces limitations of existing approaches </a:t>
             </a:r>
+            <a:endParaRPr lang="en-US" sz="2400" dirty="0">
+              <a:latin typeface="Times New Roman" panose="02020603050405020304" pitchFamily="18" charset="0"/>
+              <a:cs typeface="Times New Roman" panose="02020603050405020304" pitchFamily="18" charset="0"/>
+            </a:endParaRPr>
           </a:p>
           <a:p>
             <a:pPr marL="285750" lvl="0" indent="-285750">
@@ -8716,6 +8048,10 @@
               </a:rPr>
               <a:t>Saves time, effort and resources </a:t>
             </a:r>
+            <a:endParaRPr lang="en-US" sz="2400" dirty="0">
+              <a:latin typeface="Times New Roman" panose="02020603050405020304" pitchFamily="18" charset="0"/>
+              <a:cs typeface="Times New Roman" panose="02020603050405020304" pitchFamily="18" charset="0"/>
+            </a:endParaRPr>
           </a:p>
           <a:p>
             <a:pPr marL="285750" lvl="0" indent="-285750">
@@ -8729,6 +8065,10 @@
               </a:rPr>
               <a:t>Improves accessibility and user experience </a:t>
             </a:r>
+            <a:endParaRPr lang="en-US" sz="2400" dirty="0">
+              <a:latin typeface="Times New Roman" panose="02020603050405020304" pitchFamily="18" charset="0"/>
+              <a:cs typeface="Times New Roman" panose="02020603050405020304" pitchFamily="18" charset="0"/>
+            </a:endParaRPr>
           </a:p>
           <a:p>
             <a:pPr marL="285750" lvl="0" indent="-285750">
@@ -8742,6 +8082,10 @@
               </a:rPr>
               <a:t>Introduces intelligent automation </a:t>
             </a:r>
+            <a:endParaRPr lang="en-US" sz="2400" dirty="0">
+              <a:latin typeface="Times New Roman" panose="02020603050405020304" pitchFamily="18" charset="0"/>
+              <a:cs typeface="Times New Roman" panose="02020603050405020304" pitchFamily="18" charset="0"/>
+            </a:endParaRPr>
           </a:p>
           <a:p>
             <a:pPr marL="285750" lvl="0" indent="-285750">
@@ -8755,6 +8099,10 @@
               </a:rPr>
               <a:t>Enables data-driven decision-making </a:t>
             </a:r>
+            <a:endParaRPr lang="en-US" sz="2400" dirty="0">
+              <a:latin typeface="Times New Roman" panose="02020603050405020304" pitchFamily="18" charset="0"/>
+              <a:cs typeface="Times New Roman" panose="02020603050405020304" pitchFamily="18" charset="0"/>
+            </a:endParaRPr>
           </a:p>
           <a:p>
             <a:pPr marL="285750" lvl="0" indent="-285750">
@@ -8768,6 +8116,10 @@
               </a:rPr>
               <a:t>Designed for scalability and real-world adoption </a:t>
             </a:r>
+            <a:endParaRPr lang="en-US" sz="2400" dirty="0">
+              <a:latin typeface="Times New Roman" panose="02020603050405020304" pitchFamily="18" charset="0"/>
+              <a:cs typeface="Times New Roman" panose="02020603050405020304" pitchFamily="18" charset="0"/>
+            </a:endParaRPr>
           </a:p>
           <a:p>
             <a:pPr marL="285750" lvl="0" indent="-285750">
@@ -8800,8 +8152,6 @@
               </a:rPr>
               <a:t>“Simple to use. Intelligent in action. Measurable in impact.”</a:t>
             </a:r>
-          </a:p>
-          <a:p>
             <a:endParaRPr lang="en-US" sz="2400" dirty="0">
               <a:latin typeface="Times New Roman" panose="02020603050405020304" pitchFamily="18" charset="0"/>
               <a:cs typeface="Times New Roman" panose="02020603050405020304" pitchFamily="18" charset="0"/>
@@ -8813,17 +8163,17 @@
               <a:cs typeface="Times New Roman" panose="02020603050405020304" pitchFamily="18" charset="0"/>
             </a:endParaRPr>
           </a:p>
-        </p:txBody>
-      </p:sp>
-      <p:sp>
-        <p:nvSpPr>
-          <p:cNvPr id="18" name="TextBox 17">
-            <a:extLst>
-              <a:ext uri="{FF2B5EF4-FFF2-40B4-BE49-F238E27FC236}">
-                <a16:creationId xmlns:a16="http://schemas.microsoft.com/office/drawing/2014/main" id="{FAFA8C1C-31F2-5059-8FB7-1078670C7B8C}"/>
-              </a:ext>
-            </a:extLst>
-          </p:cNvPr>
+          <a:p>
+            <a:endParaRPr lang="en-US" sz="2400" dirty="0">
+              <a:latin typeface="Times New Roman" panose="02020603050405020304" pitchFamily="18" charset="0"/>
+              <a:cs typeface="Times New Roman" panose="02020603050405020304" pitchFamily="18" charset="0"/>
+            </a:endParaRPr>
+          </a:p>
+        </p:txBody>
+      </p:sp>
+      <p:sp>
+        <p:nvSpPr>
+          <p:cNvPr id="18" name="TextBox 17"/>
           <p:cNvSpPr txBox="1"/>
           <p:nvPr/>
         </p:nvSpPr>
@@ -8847,6 +8197,7 @@
               <a:rPr lang="en-US" sz="2800" b="1" dirty="0"/>
               <a:t>WHY THIS IDEA?</a:t>
             </a:r>
+            <a:endParaRPr lang="en-US" sz="2800" b="1" dirty="0"/>
           </a:p>
           <a:p>
             <a:endParaRPr lang="en-US" sz="2800" dirty="0"/>
@@ -8854,11 +8205,6 @@
         </p:txBody>
       </p:sp>
     </p:spTree>
-    <p:extLst>
-      <p:ext uri="{BB962C8B-B14F-4D97-AF65-F5344CB8AC3E}">
-        <p14:creationId xmlns:p14="http://schemas.microsoft.com/office/powerpoint/2010/main" val="2441199072"/>
-      </p:ext>
-    </p:extLst>
   </p:cSld>
   <p:clrMapOvr>
     <a:masterClrMapping/>
@@ -8885,20 +8231,14 @@
       </p:grpSpPr>
       <p:pic>
         <p:nvPicPr>
-          <p:cNvPr id="5" name="Picture 4">
-            <a:extLst>
-              <a:ext uri="{FF2B5EF4-FFF2-40B4-BE49-F238E27FC236}">
-                <a16:creationId xmlns:a16="http://schemas.microsoft.com/office/drawing/2014/main" id="{565CB080-C1F5-FC20-E49B-0FCEE6E6BAAF}"/>
-              </a:ext>
-            </a:extLst>
-          </p:cNvPr>
+          <p:cNvPr id="5" name="Picture 4"/>
           <p:cNvPicPr>
             <a:picLocks noChangeAspect="1"/>
           </p:cNvPicPr>
           <p:nvPr/>
         </p:nvPicPr>
         <p:blipFill>
-          <a:blip r:embed="rId2">
+          <a:blip r:embed="rId1">
             <a:extLst>
               <a:ext uri="{28A0092B-C50C-407E-A947-70E740481C1C}">
                 <a14:useLocalDpi xmlns:a14="http://schemas.microsoft.com/office/drawing/2010/main" val="0"/>
@@ -8921,13 +8261,7 @@
       </p:pic>
       <p:sp>
         <p:nvSpPr>
-          <p:cNvPr id="7" name="TextBox 6">
-            <a:extLst>
-              <a:ext uri="{FF2B5EF4-FFF2-40B4-BE49-F238E27FC236}">
-                <a16:creationId xmlns:a16="http://schemas.microsoft.com/office/drawing/2014/main" id="{A429D212-E5BC-A79A-BA69-8F65CAA074DA}"/>
-              </a:ext>
-            </a:extLst>
-          </p:cNvPr>
+          <p:cNvPr id="7" name="TextBox 6"/>
           <p:cNvSpPr txBox="1"/>
           <p:nvPr/>
         </p:nvSpPr>
@@ -8953,18 +8287,15 @@
               </a:rPr>
               <a:t>AI FUSION 2026</a:t>
             </a:r>
-          </a:p>
-        </p:txBody>
-      </p:sp>
-      <p:sp>
-        <p:nvSpPr>
-          <p:cNvPr id="9" name="Rectangle 8">
-            <a:extLst>
-              <a:ext uri="{FF2B5EF4-FFF2-40B4-BE49-F238E27FC236}">
-                <a16:creationId xmlns:a16="http://schemas.microsoft.com/office/drawing/2014/main" id="{A563AF81-6AF9-C6A2-F11C-9565F9B68802}"/>
-              </a:ext>
-            </a:extLst>
-          </p:cNvPr>
+            <a:endParaRPr lang="en-US" b="1" dirty="0">
+              <a:latin typeface="Arial Narrow" panose="020B0606020202030204" pitchFamily="34" charset="0"/>
+            </a:endParaRPr>
+          </a:p>
+        </p:txBody>
+      </p:sp>
+      <p:sp>
+        <p:nvSpPr>
+          <p:cNvPr id="9" name="Rectangle 8"/>
           <p:cNvSpPr/>
           <p:nvPr/>
         </p:nvSpPr>
@@ -9004,13 +8335,7 @@
       </p:sp>
       <p:sp>
         <p:nvSpPr>
-          <p:cNvPr id="11" name="TextBox 10">
-            <a:extLst>
-              <a:ext uri="{FF2B5EF4-FFF2-40B4-BE49-F238E27FC236}">
-                <a16:creationId xmlns:a16="http://schemas.microsoft.com/office/drawing/2014/main" id="{1B1F5C64-B664-AADC-2530-DC88ADD51886}"/>
-              </a:ext>
-            </a:extLst>
-          </p:cNvPr>
+          <p:cNvPr id="11" name="TextBox 10"/>
           <p:cNvSpPr txBox="1"/>
           <p:nvPr/>
         </p:nvSpPr>
@@ -9037,18 +8362,16 @@
               </a:rPr>
               <a:t>@AI Fusion submission-Template</a:t>
             </a:r>
-          </a:p>
-        </p:txBody>
-      </p:sp>
-      <p:sp>
-        <p:nvSpPr>
-          <p:cNvPr id="13" name="Oval 12">
-            <a:extLst>
-              <a:ext uri="{FF2B5EF4-FFF2-40B4-BE49-F238E27FC236}">
-                <a16:creationId xmlns:a16="http://schemas.microsoft.com/office/drawing/2014/main" id="{BC319EE3-7AB5-5782-F698-E4A25FB6234A}"/>
-              </a:ext>
-            </a:extLst>
-          </p:cNvPr>
+            <a:endParaRPr lang="en-US" b="1" dirty="0">
+              <a:latin typeface="Times New Roman" panose="02020603050405020304" pitchFamily="18" charset="0"/>
+              <a:cs typeface="Times New Roman" panose="02020603050405020304" pitchFamily="18" charset="0"/>
+            </a:endParaRPr>
+          </a:p>
+        </p:txBody>
+      </p:sp>
+      <p:sp>
+        <p:nvSpPr>
+          <p:cNvPr id="13" name="Oval 12"/>
           <p:cNvSpPr/>
           <p:nvPr/>
         </p:nvSpPr>
@@ -9096,13 +8419,7 @@
       </p:sp>
       <p:sp>
         <p:nvSpPr>
-          <p:cNvPr id="15" name="TextBox 14">
-            <a:extLst>
-              <a:ext uri="{FF2B5EF4-FFF2-40B4-BE49-F238E27FC236}">
-                <a16:creationId xmlns:a16="http://schemas.microsoft.com/office/drawing/2014/main" id="{957CEF4C-4FC0-8983-A828-018334184722}"/>
-              </a:ext>
-            </a:extLst>
-          </p:cNvPr>
+          <p:cNvPr id="15" name="TextBox 14"/>
           <p:cNvSpPr txBox="1"/>
           <p:nvPr/>
         </p:nvSpPr>
@@ -9126,18 +8443,13 @@
               <a:rPr lang="en-US" dirty="0"/>
               <a:t>TEAM NAME</a:t>
             </a:r>
-          </a:p>
-        </p:txBody>
-      </p:sp>
-      <p:sp>
-        <p:nvSpPr>
-          <p:cNvPr id="18" name="TextBox 17">
-            <a:extLst>
-              <a:ext uri="{FF2B5EF4-FFF2-40B4-BE49-F238E27FC236}">
-                <a16:creationId xmlns:a16="http://schemas.microsoft.com/office/drawing/2014/main" id="{E5092C02-2A81-3308-643A-03B218224B0C}"/>
-              </a:ext>
-            </a:extLst>
-          </p:cNvPr>
+            <a:endParaRPr lang="en-US" dirty="0"/>
+          </a:p>
+        </p:txBody>
+      </p:sp>
+      <p:sp>
+        <p:nvSpPr>
+          <p:cNvPr id="18" name="TextBox 17"/>
           <p:cNvSpPr txBox="1"/>
           <p:nvPr/>
         </p:nvSpPr>
@@ -9164,6 +8476,10 @@
               </a:rPr>
               <a:t>User → Data/Input → Processing → AI/ML Analysis → Intelligent Decision → Action/Output → Impact</a:t>
             </a:r>
+            <a:endParaRPr lang="en-US" sz="2400" b="1" dirty="0">
+              <a:latin typeface="Times New Roman" panose="02020603050405020304" pitchFamily="18" charset="0"/>
+              <a:cs typeface="Times New Roman" panose="02020603050405020304" pitchFamily="18" charset="0"/>
+            </a:endParaRPr>
           </a:p>
           <a:p>
             <a:endParaRPr lang="en-US" sz="2400" dirty="0">
@@ -9196,6 +8512,10 @@
               </a:rPr>
               <a:t>User interacts with the platform </a:t>
             </a:r>
+            <a:endParaRPr lang="en-US" sz="2400" dirty="0">
+              <a:latin typeface="Times New Roman" panose="02020603050405020304" pitchFamily="18" charset="0"/>
+              <a:cs typeface="Times New Roman" panose="02020603050405020304" pitchFamily="18" charset="0"/>
+            </a:endParaRPr>
           </a:p>
           <a:p>
             <a:pPr marL="457200" lvl="0" indent="-457200">
@@ -9209,6 +8529,10 @@
               </a:rPr>
               <a:t>Required data is collected securely </a:t>
             </a:r>
+            <a:endParaRPr lang="en-US" sz="2400" dirty="0">
+              <a:latin typeface="Times New Roman" panose="02020603050405020304" pitchFamily="18" charset="0"/>
+              <a:cs typeface="Times New Roman" panose="02020603050405020304" pitchFamily="18" charset="0"/>
+            </a:endParaRPr>
           </a:p>
           <a:p>
             <a:pPr marL="457200" lvl="0" indent="-457200">
@@ -9222,6 +8546,10 @@
               </a:rPr>
               <a:t>Data is processed and analyzed </a:t>
             </a:r>
+            <a:endParaRPr lang="en-US" sz="2400" dirty="0">
+              <a:latin typeface="Times New Roman" panose="02020603050405020304" pitchFamily="18" charset="0"/>
+              <a:cs typeface="Times New Roman" panose="02020603050405020304" pitchFamily="18" charset="0"/>
+            </a:endParaRPr>
           </a:p>
           <a:p>
             <a:pPr marL="457200" lvl="0" indent="-457200">
@@ -9235,6 +8563,10 @@
               </a:rPr>
               <a:t>AI/ML generates meaningful insights </a:t>
             </a:r>
+            <a:endParaRPr lang="en-US" sz="2400" dirty="0">
+              <a:latin typeface="Times New Roman" panose="02020603050405020304" pitchFamily="18" charset="0"/>
+              <a:cs typeface="Times New Roman" panose="02020603050405020304" pitchFamily="18" charset="0"/>
+            </a:endParaRPr>
           </a:p>
           <a:p>
             <a:pPr marL="457200" lvl="0" indent="-457200">
@@ -9248,6 +8580,10 @@
               </a:rPr>
               <a:t>The system recommends or triggers an action </a:t>
             </a:r>
+            <a:endParaRPr lang="en-US" sz="2400" dirty="0">
+              <a:latin typeface="Times New Roman" panose="02020603050405020304" pitchFamily="18" charset="0"/>
+              <a:cs typeface="Times New Roman" panose="02020603050405020304" pitchFamily="18" charset="0"/>
+            </a:endParaRPr>
           </a:p>
           <a:p>
             <a:pPr marL="457200" lvl="0" indent="-457200">
@@ -9261,6 +8597,10 @@
               </a:rPr>
               <a:t>Users receive results, alerts or recommendations </a:t>
             </a:r>
+            <a:endParaRPr lang="en-US" sz="2400" dirty="0">
+              <a:latin typeface="Times New Roman" panose="02020603050405020304" pitchFamily="18" charset="0"/>
+              <a:cs typeface="Times New Roman" panose="02020603050405020304" pitchFamily="18" charset="0"/>
+            </a:endParaRPr>
           </a:p>
           <a:p>
             <a:pPr marL="457200" lvl="0" indent="-457200">
@@ -9274,24 +8614,22 @@
               </a:rPr>
               <a:t>Feedback continuously improves the system </a:t>
             </a:r>
-          </a:p>
-          <a:p>
             <a:endParaRPr lang="en-US" sz="2400" dirty="0">
               <a:latin typeface="Times New Roman" panose="02020603050405020304" pitchFamily="18" charset="0"/>
               <a:cs typeface="Times New Roman" panose="02020603050405020304" pitchFamily="18" charset="0"/>
             </a:endParaRPr>
           </a:p>
-        </p:txBody>
-      </p:sp>
-      <p:sp>
-        <p:nvSpPr>
-          <p:cNvPr id="20" name="TextBox 19">
-            <a:extLst>
-              <a:ext uri="{FF2B5EF4-FFF2-40B4-BE49-F238E27FC236}">
-                <a16:creationId xmlns:a16="http://schemas.microsoft.com/office/drawing/2014/main" id="{925425C4-D51F-88AF-D472-A229FF92AC33}"/>
-              </a:ext>
-            </a:extLst>
-          </p:cNvPr>
+          <a:p>
+            <a:endParaRPr lang="en-US" sz="2400" dirty="0">
+              <a:latin typeface="Times New Roman" panose="02020603050405020304" pitchFamily="18" charset="0"/>
+              <a:cs typeface="Times New Roman" panose="02020603050405020304" pitchFamily="18" charset="0"/>
+            </a:endParaRPr>
+          </a:p>
+        </p:txBody>
+      </p:sp>
+      <p:sp>
+        <p:nvSpPr>
+          <p:cNvPr id="20" name="TextBox 19"/>
           <p:cNvSpPr txBox="1"/>
           <p:nvPr/>
         </p:nvSpPr>
@@ -9315,6 +8653,7 @@
               <a:rPr lang="en-US" sz="2800" b="1" dirty="0"/>
               <a:t>PROPOSED SOLUTION</a:t>
             </a:r>
+            <a:endParaRPr lang="en-US" sz="2800" b="1" dirty="0"/>
           </a:p>
           <a:p>
             <a:endParaRPr lang="en-US" sz="2800" dirty="0"/>
@@ -9322,11 +8661,6 @@
         </p:txBody>
       </p:sp>
     </p:spTree>
-    <p:extLst>
-      <p:ext uri="{BB962C8B-B14F-4D97-AF65-F5344CB8AC3E}">
-        <p14:creationId xmlns:p14="http://schemas.microsoft.com/office/powerpoint/2010/main" val="2260272676"/>
-      </p:ext>
-    </p:extLst>
   </p:cSld>
   <p:clrMapOvr>
     <a:masterClrMapping/>
@@ -9353,20 +8687,14 @@
       </p:grpSpPr>
       <p:pic>
         <p:nvPicPr>
-          <p:cNvPr id="5" name="Picture 4">
-            <a:extLst>
-              <a:ext uri="{FF2B5EF4-FFF2-40B4-BE49-F238E27FC236}">
-                <a16:creationId xmlns:a16="http://schemas.microsoft.com/office/drawing/2014/main" id="{7EC6639D-AAE0-0895-17B5-F1A01F55C251}"/>
-              </a:ext>
-            </a:extLst>
-          </p:cNvPr>
+          <p:cNvPr id="5" name="Picture 4"/>
           <p:cNvPicPr>
             <a:picLocks noChangeAspect="1"/>
           </p:cNvPicPr>
           <p:nvPr/>
         </p:nvPicPr>
         <p:blipFill>
-          <a:blip r:embed="rId2">
+          <a:blip r:embed="rId1">
             <a:extLst>
               <a:ext uri="{28A0092B-C50C-407E-A947-70E740481C1C}">
                 <a14:useLocalDpi xmlns:a14="http://schemas.microsoft.com/office/drawing/2010/main" val="0"/>
@@ -9389,13 +8717,7 @@
       </p:pic>
       <p:sp>
         <p:nvSpPr>
-          <p:cNvPr id="7" name="TextBox 6">
-            <a:extLst>
-              <a:ext uri="{FF2B5EF4-FFF2-40B4-BE49-F238E27FC236}">
-                <a16:creationId xmlns:a16="http://schemas.microsoft.com/office/drawing/2014/main" id="{995926D3-DC39-0DBD-9816-D1C8DE139778}"/>
-              </a:ext>
-            </a:extLst>
-          </p:cNvPr>
+          <p:cNvPr id="7" name="TextBox 6"/>
           <p:cNvSpPr txBox="1"/>
           <p:nvPr/>
         </p:nvSpPr>
@@ -9421,18 +8743,15 @@
               </a:rPr>
               <a:t>AI FUSION 2026</a:t>
             </a:r>
-          </a:p>
-        </p:txBody>
-      </p:sp>
-      <p:sp>
-        <p:nvSpPr>
-          <p:cNvPr id="9" name="Rectangle 8">
-            <a:extLst>
-              <a:ext uri="{FF2B5EF4-FFF2-40B4-BE49-F238E27FC236}">
-                <a16:creationId xmlns:a16="http://schemas.microsoft.com/office/drawing/2014/main" id="{DBB1DD8B-B5E4-D404-0D73-B7858F42958D}"/>
-              </a:ext>
-            </a:extLst>
-          </p:cNvPr>
+            <a:endParaRPr lang="en-US" b="1" dirty="0">
+              <a:latin typeface="Arial Narrow" panose="020B0606020202030204" pitchFamily="34" charset="0"/>
+            </a:endParaRPr>
+          </a:p>
+        </p:txBody>
+      </p:sp>
+      <p:sp>
+        <p:nvSpPr>
+          <p:cNvPr id="9" name="Rectangle 8"/>
           <p:cNvSpPr/>
           <p:nvPr/>
         </p:nvSpPr>
@@ -9472,13 +8791,7 @@
       </p:sp>
       <p:sp>
         <p:nvSpPr>
-          <p:cNvPr id="11" name="TextBox 10">
-            <a:extLst>
-              <a:ext uri="{FF2B5EF4-FFF2-40B4-BE49-F238E27FC236}">
-                <a16:creationId xmlns:a16="http://schemas.microsoft.com/office/drawing/2014/main" id="{6B734779-9B0C-A762-96F2-5BEFFF55DBB3}"/>
-              </a:ext>
-            </a:extLst>
-          </p:cNvPr>
+          <p:cNvPr id="11" name="TextBox 10"/>
           <p:cNvSpPr txBox="1"/>
           <p:nvPr/>
         </p:nvSpPr>
@@ -9505,18 +8818,16 @@
               </a:rPr>
               <a:t>@AI Fusion submission-Template</a:t>
             </a:r>
-          </a:p>
-        </p:txBody>
-      </p:sp>
-      <p:sp>
-        <p:nvSpPr>
-          <p:cNvPr id="13" name="Oval 12">
-            <a:extLst>
-              <a:ext uri="{FF2B5EF4-FFF2-40B4-BE49-F238E27FC236}">
-                <a16:creationId xmlns:a16="http://schemas.microsoft.com/office/drawing/2014/main" id="{75E4D1CF-31FA-6749-7A42-7F9718AE023C}"/>
-              </a:ext>
-            </a:extLst>
-          </p:cNvPr>
+            <a:endParaRPr lang="en-US" b="1" dirty="0">
+              <a:latin typeface="Times New Roman" panose="02020603050405020304" pitchFamily="18" charset="0"/>
+              <a:cs typeface="Times New Roman" panose="02020603050405020304" pitchFamily="18" charset="0"/>
+            </a:endParaRPr>
+          </a:p>
+        </p:txBody>
+      </p:sp>
+      <p:sp>
+        <p:nvSpPr>
+          <p:cNvPr id="13" name="Oval 12"/>
           <p:cNvSpPr/>
           <p:nvPr/>
         </p:nvSpPr>
@@ -9564,13 +8875,7 @@
       </p:sp>
       <p:sp>
         <p:nvSpPr>
-          <p:cNvPr id="15" name="TextBox 14">
-            <a:extLst>
-              <a:ext uri="{FF2B5EF4-FFF2-40B4-BE49-F238E27FC236}">
-                <a16:creationId xmlns:a16="http://schemas.microsoft.com/office/drawing/2014/main" id="{E49B6E14-FB2B-78FF-4747-8D82B768759D}"/>
-              </a:ext>
-            </a:extLst>
-          </p:cNvPr>
+          <p:cNvPr id="15" name="TextBox 14"/>
           <p:cNvSpPr txBox="1"/>
           <p:nvPr/>
         </p:nvSpPr>
@@ -9594,18 +8899,13 @@
               <a:rPr lang="en-US" dirty="0"/>
               <a:t>TEAM NAME</a:t>
             </a:r>
-          </a:p>
-        </p:txBody>
-      </p:sp>
-      <p:sp>
-        <p:nvSpPr>
-          <p:cNvPr id="16" name="TextBox 15">
-            <a:extLst>
-              <a:ext uri="{FF2B5EF4-FFF2-40B4-BE49-F238E27FC236}">
-                <a16:creationId xmlns:a16="http://schemas.microsoft.com/office/drawing/2014/main" id="{0BE1656E-9FEA-A6A3-A710-ED54ABB396B5}"/>
-              </a:ext>
-            </a:extLst>
-          </p:cNvPr>
+            <a:endParaRPr lang="en-US" dirty="0"/>
+          </a:p>
+        </p:txBody>
+      </p:sp>
+      <p:sp>
+        <p:nvSpPr>
+          <p:cNvPr id="16" name="TextBox 15"/>
           <p:cNvSpPr txBox="1"/>
           <p:nvPr/>
         </p:nvSpPr>
@@ -9639,6 +8939,10 @@
               </a:rPr>
               <a:t> HTML, CSS, JavaScript / React</a:t>
             </a:r>
+            <a:endParaRPr lang="en-US" sz="2000" dirty="0">
+              <a:latin typeface="Times New Roman" panose="02020603050405020304" pitchFamily="18" charset="0"/>
+              <a:cs typeface="Times New Roman" panose="02020603050405020304" pitchFamily="18" charset="0"/>
+            </a:endParaRPr>
           </a:p>
           <a:p>
             <a:br>
@@ -9661,6 +8965,10 @@
               </a:rPr>
               <a:t> Python / Node.js</a:t>
             </a:r>
+            <a:endParaRPr lang="en-US" sz="2000" dirty="0">
+              <a:latin typeface="Times New Roman" panose="02020603050405020304" pitchFamily="18" charset="0"/>
+              <a:cs typeface="Times New Roman" panose="02020603050405020304" pitchFamily="18" charset="0"/>
+            </a:endParaRPr>
           </a:p>
           <a:p>
             <a:br>
@@ -9683,6 +8991,10 @@
               </a:rPr>
               <a:t> MySQL / MongoDB / Firebase</a:t>
             </a:r>
+            <a:endParaRPr lang="en-US" sz="2000" dirty="0">
+              <a:latin typeface="Times New Roman" panose="02020603050405020304" pitchFamily="18" charset="0"/>
+              <a:cs typeface="Times New Roman" panose="02020603050405020304" pitchFamily="18" charset="0"/>
+            </a:endParaRPr>
           </a:p>
           <a:p>
             <a:br>
@@ -9705,6 +9017,10 @@
               </a:rPr>
               <a:t> Python, Machine Learning, Generative AI</a:t>
             </a:r>
+            <a:endParaRPr lang="en-US" sz="2000" dirty="0">
+              <a:latin typeface="Times New Roman" panose="02020603050405020304" pitchFamily="18" charset="0"/>
+              <a:cs typeface="Times New Roman" panose="02020603050405020304" pitchFamily="18" charset="0"/>
+            </a:endParaRPr>
           </a:p>
           <a:p>
             <a:br>
@@ -9727,6 +9043,10 @@
               </a:rPr>
               <a:t> REST APIs</a:t>
             </a:r>
+            <a:endParaRPr lang="en-US" sz="2000" dirty="0">
+              <a:latin typeface="Times New Roman" panose="02020603050405020304" pitchFamily="18" charset="0"/>
+              <a:cs typeface="Times New Roman" panose="02020603050405020304" pitchFamily="18" charset="0"/>
+            </a:endParaRPr>
           </a:p>
           <a:p>
             <a:br>
@@ -9749,6 +9069,10 @@
               </a:rPr>
               <a:t> Firebase / AWS / Azure</a:t>
             </a:r>
+            <a:endParaRPr lang="en-US" sz="2000" dirty="0">
+              <a:latin typeface="Times New Roman" panose="02020603050405020304" pitchFamily="18" charset="0"/>
+              <a:cs typeface="Times New Roman" panose="02020603050405020304" pitchFamily="18" charset="0"/>
+            </a:endParaRPr>
           </a:p>
           <a:p>
             <a:br>
@@ -9771,24 +9095,22 @@
               </a:rPr>
               <a:t> Sensors / ESP32, where applicable</a:t>
             </a:r>
-          </a:p>
-          <a:p>
             <a:endParaRPr lang="en-US" sz="2000" dirty="0">
               <a:latin typeface="Times New Roman" panose="02020603050405020304" pitchFamily="18" charset="0"/>
               <a:cs typeface="Times New Roman" panose="02020603050405020304" pitchFamily="18" charset="0"/>
             </a:endParaRPr>
           </a:p>
-        </p:txBody>
-      </p:sp>
-      <p:sp>
-        <p:nvSpPr>
-          <p:cNvPr id="17" name="TextBox 16">
-            <a:extLst>
-              <a:ext uri="{FF2B5EF4-FFF2-40B4-BE49-F238E27FC236}">
-                <a16:creationId xmlns:a16="http://schemas.microsoft.com/office/drawing/2014/main" id="{75B2ED5C-22C6-DE9E-A888-10FAC59C7E13}"/>
-              </a:ext>
-            </a:extLst>
-          </p:cNvPr>
+          <a:p>
+            <a:endParaRPr lang="en-US" sz="2000" dirty="0">
+              <a:latin typeface="Times New Roman" panose="02020603050405020304" pitchFamily="18" charset="0"/>
+              <a:cs typeface="Times New Roman" panose="02020603050405020304" pitchFamily="18" charset="0"/>
+            </a:endParaRPr>
+          </a:p>
+        </p:txBody>
+      </p:sp>
+      <p:sp>
+        <p:nvSpPr>
+          <p:cNvPr id="17" name="TextBox 16"/>
           <p:cNvSpPr txBox="1"/>
           <p:nvPr/>
         </p:nvSpPr>
@@ -9812,6 +9134,7 @@
               <a:rPr lang="en-US" sz="2800" b="1" dirty="0"/>
               <a:t>TECHNOLOGY STACK</a:t>
             </a:r>
+            <a:endParaRPr lang="en-US" sz="2800" b="1" dirty="0"/>
           </a:p>
           <a:p>
             <a:endParaRPr lang="en-US" sz="2800" dirty="0"/>
@@ -9819,11 +9142,6 @@
         </p:txBody>
       </p:sp>
     </p:spTree>
-    <p:extLst>
-      <p:ext uri="{BB962C8B-B14F-4D97-AF65-F5344CB8AC3E}">
-        <p14:creationId xmlns:p14="http://schemas.microsoft.com/office/powerpoint/2010/main" val="22063808"/>
-      </p:ext>
-    </p:extLst>
   </p:cSld>
   <p:clrMapOvr>
     <a:masterClrMapping/>
@@ -9850,20 +9168,14 @@
       </p:grpSpPr>
       <p:pic>
         <p:nvPicPr>
-          <p:cNvPr id="5" name="Picture 4">
-            <a:extLst>
-              <a:ext uri="{FF2B5EF4-FFF2-40B4-BE49-F238E27FC236}">
-                <a16:creationId xmlns:a16="http://schemas.microsoft.com/office/drawing/2014/main" id="{282E470F-37D2-F189-5985-170995E65EB4}"/>
-              </a:ext>
-            </a:extLst>
-          </p:cNvPr>
+          <p:cNvPr id="5" name="Picture 4"/>
           <p:cNvPicPr>
             <a:picLocks noChangeAspect="1"/>
           </p:cNvPicPr>
           <p:nvPr/>
         </p:nvPicPr>
         <p:blipFill>
-          <a:blip r:embed="rId2">
+          <a:blip r:embed="rId1">
             <a:extLst>
               <a:ext uri="{28A0092B-C50C-407E-A947-70E740481C1C}">
                 <a14:useLocalDpi xmlns:a14="http://schemas.microsoft.com/office/drawing/2010/main" val="0"/>
@@ -9886,13 +9198,7 @@
       </p:pic>
       <p:sp>
         <p:nvSpPr>
-          <p:cNvPr id="7" name="TextBox 6">
-            <a:extLst>
-              <a:ext uri="{FF2B5EF4-FFF2-40B4-BE49-F238E27FC236}">
-                <a16:creationId xmlns:a16="http://schemas.microsoft.com/office/drawing/2014/main" id="{1EAEF9E9-4EA3-3354-F0E3-916ABECDD3D4}"/>
-              </a:ext>
-            </a:extLst>
-          </p:cNvPr>
+          <p:cNvPr id="7" name="TextBox 6"/>
           <p:cNvSpPr txBox="1"/>
           <p:nvPr/>
         </p:nvSpPr>
@@ -9918,18 +9224,15 @@
               </a:rPr>
               <a:t>AI FUSION 2026</a:t>
             </a:r>
-          </a:p>
-        </p:txBody>
-      </p:sp>
-      <p:sp>
-        <p:nvSpPr>
-          <p:cNvPr id="9" name="Rectangle 8">
-            <a:extLst>
-              <a:ext uri="{FF2B5EF4-FFF2-40B4-BE49-F238E27FC236}">
-                <a16:creationId xmlns:a16="http://schemas.microsoft.com/office/drawing/2014/main" id="{1D0CFF98-0AB0-8190-52DD-5D0CB15F60E2}"/>
-              </a:ext>
-            </a:extLst>
-          </p:cNvPr>
+            <a:endParaRPr lang="en-US" b="1" dirty="0">
+              <a:latin typeface="Arial Narrow" panose="020B0606020202030204" pitchFamily="34" charset="0"/>
+            </a:endParaRPr>
+          </a:p>
+        </p:txBody>
+      </p:sp>
+      <p:sp>
+        <p:nvSpPr>
+          <p:cNvPr id="9" name="Rectangle 8"/>
           <p:cNvSpPr/>
           <p:nvPr/>
         </p:nvSpPr>
@@ -9969,13 +9272,7 @@
       </p:sp>
       <p:sp>
         <p:nvSpPr>
-          <p:cNvPr id="11" name="TextBox 10">
-            <a:extLst>
-              <a:ext uri="{FF2B5EF4-FFF2-40B4-BE49-F238E27FC236}">
-                <a16:creationId xmlns:a16="http://schemas.microsoft.com/office/drawing/2014/main" id="{AA9AAC4E-B5B1-F95C-DA15-690A810B3642}"/>
-              </a:ext>
-            </a:extLst>
-          </p:cNvPr>
+          <p:cNvPr id="11" name="TextBox 10"/>
           <p:cNvSpPr txBox="1"/>
           <p:nvPr/>
         </p:nvSpPr>
@@ -10002,18 +9299,16 @@
               </a:rPr>
               <a:t>@AI Fusion submission-Template</a:t>
             </a:r>
-          </a:p>
-        </p:txBody>
-      </p:sp>
-      <p:sp>
-        <p:nvSpPr>
-          <p:cNvPr id="13" name="Oval 12">
-            <a:extLst>
-              <a:ext uri="{FF2B5EF4-FFF2-40B4-BE49-F238E27FC236}">
-                <a16:creationId xmlns:a16="http://schemas.microsoft.com/office/drawing/2014/main" id="{835AB756-FAC4-AF6F-CA15-A90BEBA3F036}"/>
-              </a:ext>
-            </a:extLst>
-          </p:cNvPr>
+            <a:endParaRPr lang="en-US" b="1" dirty="0">
+              <a:latin typeface="Times New Roman" panose="02020603050405020304" pitchFamily="18" charset="0"/>
+              <a:cs typeface="Times New Roman" panose="02020603050405020304" pitchFamily="18" charset="0"/>
+            </a:endParaRPr>
+          </a:p>
+        </p:txBody>
+      </p:sp>
+      <p:sp>
+        <p:nvSpPr>
+          <p:cNvPr id="13" name="Oval 12"/>
           <p:cNvSpPr/>
           <p:nvPr/>
         </p:nvSpPr>
@@ -10061,13 +9356,7 @@
       </p:sp>
       <p:sp>
         <p:nvSpPr>
-          <p:cNvPr id="15" name="TextBox 14">
-            <a:extLst>
-              <a:ext uri="{FF2B5EF4-FFF2-40B4-BE49-F238E27FC236}">
-                <a16:creationId xmlns:a16="http://schemas.microsoft.com/office/drawing/2014/main" id="{E12A8A22-D388-F947-15FC-2B920BA4FE77}"/>
-              </a:ext>
-            </a:extLst>
-          </p:cNvPr>
+          <p:cNvPr id="15" name="TextBox 14"/>
           <p:cNvSpPr txBox="1"/>
           <p:nvPr/>
         </p:nvSpPr>
@@ -10091,18 +9380,13 @@
               <a:rPr lang="en-US" dirty="0"/>
               <a:t>TEAM NAME</a:t>
             </a:r>
-          </a:p>
-        </p:txBody>
-      </p:sp>
-      <p:sp>
-        <p:nvSpPr>
-          <p:cNvPr id="16" name="TextBox 15">
-            <a:extLst>
-              <a:ext uri="{FF2B5EF4-FFF2-40B4-BE49-F238E27FC236}">
-                <a16:creationId xmlns:a16="http://schemas.microsoft.com/office/drawing/2014/main" id="{E5345FC8-854A-1E50-415C-67B86A7C50EA}"/>
-              </a:ext>
-            </a:extLst>
-          </p:cNvPr>
+            <a:endParaRPr lang="en-US" dirty="0"/>
+          </a:p>
+        </p:txBody>
+      </p:sp>
+      <p:sp>
+        <p:nvSpPr>
+          <p:cNvPr id="16" name="TextBox 15"/>
           <p:cNvSpPr txBox="1"/>
           <p:nvPr/>
         </p:nvSpPr>
@@ -10334,24 +9618,22 @@
               </a:rPr>
               <a:t> Monitoring, Feedback &amp; Improvement</a:t>
             </a:r>
-          </a:p>
-          <a:p>
             <a:endParaRPr lang="en-US" sz="2000" dirty="0">
               <a:latin typeface="Times New Roman" panose="02020603050405020304" pitchFamily="18" charset="0"/>
               <a:cs typeface="Times New Roman" panose="02020603050405020304" pitchFamily="18" charset="0"/>
             </a:endParaRPr>
           </a:p>
-        </p:txBody>
-      </p:sp>
-      <p:sp>
-        <p:nvSpPr>
-          <p:cNvPr id="17" name="TextBox 16">
-            <a:extLst>
-              <a:ext uri="{FF2B5EF4-FFF2-40B4-BE49-F238E27FC236}">
-                <a16:creationId xmlns:a16="http://schemas.microsoft.com/office/drawing/2014/main" id="{CCD33BF3-DA38-49C9-6C07-EF1539AC08B4}"/>
-              </a:ext>
-            </a:extLst>
-          </p:cNvPr>
+          <a:p>
+            <a:endParaRPr lang="en-US" sz="2000" dirty="0">
+              <a:latin typeface="Times New Roman" panose="02020603050405020304" pitchFamily="18" charset="0"/>
+              <a:cs typeface="Times New Roman" panose="02020603050405020304" pitchFamily="18" charset="0"/>
+            </a:endParaRPr>
+          </a:p>
+        </p:txBody>
+      </p:sp>
+      <p:sp>
+        <p:nvSpPr>
+          <p:cNvPr id="17" name="TextBox 16"/>
           <p:cNvSpPr txBox="1"/>
           <p:nvPr/>
         </p:nvSpPr>
@@ -10375,6 +9657,7 @@
               <a:rPr lang="en-US" sz="2800" b="1" dirty="0"/>
               <a:t>USER JOURNEY / WORKFLOW</a:t>
             </a:r>
+            <a:endParaRPr lang="en-US" sz="2800" b="1" dirty="0"/>
           </a:p>
           <a:p>
             <a:endParaRPr lang="en-US" sz="2800" dirty="0"/>
@@ -10382,11 +9665,6 @@
         </p:txBody>
       </p:sp>
     </p:spTree>
-    <p:extLst>
-      <p:ext uri="{BB962C8B-B14F-4D97-AF65-F5344CB8AC3E}">
-        <p14:creationId xmlns:p14="http://schemas.microsoft.com/office/powerpoint/2010/main" val="642843227"/>
-      </p:ext>
-    </p:extLst>
   </p:cSld>
   <p:clrMapOvr>
     <a:masterClrMapping/>
@@ -10413,20 +9691,14 @@
       </p:grpSpPr>
       <p:pic>
         <p:nvPicPr>
-          <p:cNvPr id="5" name="Picture 4">
-            <a:extLst>
-              <a:ext uri="{FF2B5EF4-FFF2-40B4-BE49-F238E27FC236}">
-                <a16:creationId xmlns:a16="http://schemas.microsoft.com/office/drawing/2014/main" id="{B1293E8E-3FB9-F17A-94A1-BFCCD5FDA1F4}"/>
-              </a:ext>
-            </a:extLst>
-          </p:cNvPr>
+          <p:cNvPr id="5" name="Picture 4"/>
           <p:cNvPicPr>
             <a:picLocks noChangeAspect="1"/>
           </p:cNvPicPr>
           <p:nvPr/>
         </p:nvPicPr>
         <p:blipFill>
-          <a:blip r:embed="rId2">
+          <a:blip r:embed="rId1">
             <a:extLst>
               <a:ext uri="{28A0092B-C50C-407E-A947-70E740481C1C}">
                 <a14:useLocalDpi xmlns:a14="http://schemas.microsoft.com/office/drawing/2010/main" val="0"/>
@@ -10449,13 +9721,7 @@
       </p:pic>
       <p:sp>
         <p:nvSpPr>
-          <p:cNvPr id="7" name="TextBox 6">
-            <a:extLst>
-              <a:ext uri="{FF2B5EF4-FFF2-40B4-BE49-F238E27FC236}">
-                <a16:creationId xmlns:a16="http://schemas.microsoft.com/office/drawing/2014/main" id="{1C0533AC-2705-1CE4-9DBD-D0647D7C0D21}"/>
-              </a:ext>
-            </a:extLst>
-          </p:cNvPr>
+          <p:cNvPr id="7" name="TextBox 6"/>
           <p:cNvSpPr txBox="1"/>
           <p:nvPr/>
         </p:nvSpPr>
@@ -10481,18 +9747,15 @@
               </a:rPr>
               <a:t>AI FUSION 2026</a:t>
             </a:r>
-          </a:p>
-        </p:txBody>
-      </p:sp>
-      <p:sp>
-        <p:nvSpPr>
-          <p:cNvPr id="9" name="Rectangle 8">
-            <a:extLst>
-              <a:ext uri="{FF2B5EF4-FFF2-40B4-BE49-F238E27FC236}">
-                <a16:creationId xmlns:a16="http://schemas.microsoft.com/office/drawing/2014/main" id="{32EA3FF1-0579-E98F-AF2F-82C3564CA1EC}"/>
-              </a:ext>
-            </a:extLst>
-          </p:cNvPr>
+            <a:endParaRPr lang="en-US" b="1" dirty="0">
+              <a:latin typeface="Arial Narrow" panose="020B0606020202030204" pitchFamily="34" charset="0"/>
+            </a:endParaRPr>
+          </a:p>
+        </p:txBody>
+      </p:sp>
+      <p:sp>
+        <p:nvSpPr>
+          <p:cNvPr id="9" name="Rectangle 8"/>
           <p:cNvSpPr/>
           <p:nvPr/>
         </p:nvSpPr>
@@ -10532,13 +9795,7 @@
       </p:sp>
       <p:sp>
         <p:nvSpPr>
-          <p:cNvPr id="11" name="TextBox 10">
-            <a:extLst>
-              <a:ext uri="{FF2B5EF4-FFF2-40B4-BE49-F238E27FC236}">
-                <a16:creationId xmlns:a16="http://schemas.microsoft.com/office/drawing/2014/main" id="{E6BD268B-4F3B-3395-E345-6CCF38D8FFE4}"/>
-              </a:ext>
-            </a:extLst>
-          </p:cNvPr>
+          <p:cNvPr id="11" name="TextBox 10"/>
           <p:cNvSpPr txBox="1"/>
           <p:nvPr/>
         </p:nvSpPr>
@@ -10565,18 +9822,16 @@
               </a:rPr>
               <a:t>@AI Fusion submission-Template</a:t>
             </a:r>
-          </a:p>
-        </p:txBody>
-      </p:sp>
-      <p:sp>
-        <p:nvSpPr>
-          <p:cNvPr id="13" name="Oval 12">
-            <a:extLst>
-              <a:ext uri="{FF2B5EF4-FFF2-40B4-BE49-F238E27FC236}">
-                <a16:creationId xmlns:a16="http://schemas.microsoft.com/office/drawing/2014/main" id="{C59F1C48-74FA-255C-B3FB-BD672E310AC0}"/>
-              </a:ext>
-            </a:extLst>
-          </p:cNvPr>
+            <a:endParaRPr lang="en-US" b="1" dirty="0">
+              <a:latin typeface="Times New Roman" panose="02020603050405020304" pitchFamily="18" charset="0"/>
+              <a:cs typeface="Times New Roman" panose="02020603050405020304" pitchFamily="18" charset="0"/>
+            </a:endParaRPr>
+          </a:p>
+        </p:txBody>
+      </p:sp>
+      <p:sp>
+        <p:nvSpPr>
+          <p:cNvPr id="13" name="Oval 12"/>
           <p:cNvSpPr/>
           <p:nvPr/>
         </p:nvSpPr>
@@ -10624,13 +9879,7 @@
       </p:sp>
       <p:sp>
         <p:nvSpPr>
-          <p:cNvPr id="15" name="TextBox 14">
-            <a:extLst>
-              <a:ext uri="{FF2B5EF4-FFF2-40B4-BE49-F238E27FC236}">
-                <a16:creationId xmlns:a16="http://schemas.microsoft.com/office/drawing/2014/main" id="{5C51513E-87FF-F3DA-EE5B-22BE683ADD26}"/>
-              </a:ext>
-            </a:extLst>
-          </p:cNvPr>
+          <p:cNvPr id="15" name="TextBox 14"/>
           <p:cNvSpPr txBox="1"/>
           <p:nvPr/>
         </p:nvSpPr>
@@ -10654,18 +9903,13 @@
               <a:rPr lang="en-US" dirty="0"/>
               <a:t>TEAM NAME</a:t>
             </a:r>
-          </a:p>
-        </p:txBody>
-      </p:sp>
-      <p:sp>
-        <p:nvSpPr>
-          <p:cNvPr id="16" name="TextBox 15">
-            <a:extLst>
-              <a:ext uri="{FF2B5EF4-FFF2-40B4-BE49-F238E27FC236}">
-                <a16:creationId xmlns:a16="http://schemas.microsoft.com/office/drawing/2014/main" id="{2230A566-5926-88A4-EE68-AC90928B7C8C}"/>
-              </a:ext>
-            </a:extLst>
-          </p:cNvPr>
+            <a:endParaRPr lang="en-US" dirty="0"/>
+          </a:p>
+        </p:txBody>
+      </p:sp>
+      <p:sp>
+        <p:nvSpPr>
+          <p:cNvPr id="16" name="TextBox 15"/>
           <p:cNvSpPr txBox="1"/>
           <p:nvPr/>
         </p:nvSpPr>
@@ -10709,6 +9953,10 @@
               </a:rPr>
               <a:t>Uses accessible and proven technologies </a:t>
             </a:r>
+            <a:endParaRPr lang="en-US" sz="2000" dirty="0">
+              <a:latin typeface="Times New Roman" panose="02020603050405020304" pitchFamily="18" charset="0"/>
+              <a:cs typeface="Times New Roman" panose="02020603050405020304" pitchFamily="18" charset="0"/>
+            </a:endParaRPr>
           </a:p>
           <a:p>
             <a:pPr marL="342900" lvl="0" indent="-342900">
@@ -10722,6 +9970,10 @@
               </a:rPr>
               <a:t>Modular and scalable architecture </a:t>
             </a:r>
+            <a:endParaRPr lang="en-US" sz="2000" dirty="0">
+              <a:latin typeface="Times New Roman" panose="02020603050405020304" pitchFamily="18" charset="0"/>
+              <a:cs typeface="Times New Roman" panose="02020603050405020304" pitchFamily="18" charset="0"/>
+            </a:endParaRPr>
           </a:p>
           <a:p>
             <a:pPr marL="342900" lvl="0" indent="-342900">
@@ -10735,6 +9987,10 @@
               </a:rPr>
               <a:t>Can be developed within the hackathon timeline </a:t>
             </a:r>
+            <a:endParaRPr lang="en-US" sz="2000" dirty="0">
+              <a:latin typeface="Times New Roman" panose="02020603050405020304" pitchFamily="18" charset="0"/>
+              <a:cs typeface="Times New Roman" panose="02020603050405020304" pitchFamily="18" charset="0"/>
+            </a:endParaRPr>
           </a:p>
           <a:p>
             <a:endParaRPr lang="en-US" sz="2000" b="1" dirty="0">
@@ -10767,6 +10023,10 @@
               </a:rPr>
               <a:t>Simple user workflow </a:t>
             </a:r>
+            <a:endParaRPr lang="en-US" sz="2000" dirty="0">
+              <a:latin typeface="Times New Roman" panose="02020603050405020304" pitchFamily="18" charset="0"/>
+              <a:cs typeface="Times New Roman" panose="02020603050405020304" pitchFamily="18" charset="0"/>
+            </a:endParaRPr>
           </a:p>
           <a:p>
             <a:pPr marL="342900" lvl="0" indent="-342900">
@@ -10780,6 +10040,10 @@
               </a:rPr>
               <a:t>Minimal infrastructure requirements </a:t>
             </a:r>
+            <a:endParaRPr lang="en-US" sz="2000" dirty="0">
+              <a:latin typeface="Times New Roman" panose="02020603050405020304" pitchFamily="18" charset="0"/>
+              <a:cs typeface="Times New Roman" panose="02020603050405020304" pitchFamily="18" charset="0"/>
+            </a:endParaRPr>
           </a:p>
           <a:p>
             <a:pPr marL="342900" lvl="0" indent="-342900">
@@ -10793,6 +10057,10 @@
               </a:rPr>
               <a:t>Easy integration with existing systems </a:t>
             </a:r>
+            <a:endParaRPr lang="en-US" sz="2000" dirty="0">
+              <a:latin typeface="Times New Roman" panose="02020603050405020304" pitchFamily="18" charset="0"/>
+              <a:cs typeface="Times New Roman" panose="02020603050405020304" pitchFamily="18" charset="0"/>
+            </a:endParaRPr>
           </a:p>
           <a:p>
             <a:endParaRPr lang="en-US" sz="2000" dirty="0">
@@ -10825,6 +10093,10 @@
               </a:rPr>
               <a:t>Cost-effective implementation </a:t>
             </a:r>
+            <a:endParaRPr lang="en-US" sz="2000" dirty="0">
+              <a:latin typeface="Times New Roman" panose="02020603050405020304" pitchFamily="18" charset="0"/>
+              <a:cs typeface="Times New Roman" panose="02020603050405020304" pitchFamily="18" charset="0"/>
+            </a:endParaRPr>
           </a:p>
           <a:p>
             <a:pPr marL="342900" lvl="0" indent="-342900">
@@ -10838,6 +10110,10 @@
               </a:rPr>
               <a:t>Cloud-based deployment potential </a:t>
             </a:r>
+            <a:endParaRPr lang="en-US" sz="2000" dirty="0">
+              <a:latin typeface="Times New Roman" panose="02020603050405020304" pitchFamily="18" charset="0"/>
+              <a:cs typeface="Times New Roman" panose="02020603050405020304" pitchFamily="18" charset="0"/>
+            </a:endParaRPr>
           </a:p>
           <a:p>
             <a:pPr marL="342900" lvl="0" indent="-342900">
@@ -10851,18 +10127,16 @@
               </a:rPr>
               <a:t>Reduced operational effort</a:t>
             </a:r>
-          </a:p>
-        </p:txBody>
-      </p:sp>
-      <p:sp>
-        <p:nvSpPr>
-          <p:cNvPr id="18" name="TextBox 17">
-            <a:extLst>
-              <a:ext uri="{FF2B5EF4-FFF2-40B4-BE49-F238E27FC236}">
-                <a16:creationId xmlns:a16="http://schemas.microsoft.com/office/drawing/2014/main" id="{38B5DE5D-63A6-0283-6516-7913523C53D8}"/>
-              </a:ext>
-            </a:extLst>
-          </p:cNvPr>
+            <a:endParaRPr lang="en-US" sz="2000" dirty="0">
+              <a:latin typeface="Times New Roman" panose="02020603050405020304" pitchFamily="18" charset="0"/>
+              <a:cs typeface="Times New Roman" panose="02020603050405020304" pitchFamily="18" charset="0"/>
+            </a:endParaRPr>
+          </a:p>
+        </p:txBody>
+      </p:sp>
+      <p:sp>
+        <p:nvSpPr>
+          <p:cNvPr id="18" name="TextBox 17"/>
           <p:cNvSpPr txBox="1"/>
           <p:nvPr/>
         </p:nvSpPr>
@@ -10886,21 +10160,17 @@
               <a:rPr lang="en-US" sz="2800" b="1" dirty="0"/>
               <a:t>Feasibility, Scalability &amp; Future Scope</a:t>
             </a:r>
-          </a:p>
-          <a:p>
             <a:endParaRPr lang="en-US" sz="2800" b="1" dirty="0"/>
           </a:p>
           <a:p>
+            <a:endParaRPr lang="en-US" sz="2800" b="1" dirty="0"/>
+          </a:p>
+          <a:p>
             <a:endParaRPr lang="en-US" sz="2800" dirty="0"/>
           </a:p>
         </p:txBody>
       </p:sp>
     </p:spTree>
-    <p:extLst>
-      <p:ext uri="{BB962C8B-B14F-4D97-AF65-F5344CB8AC3E}">
-        <p14:creationId xmlns:p14="http://schemas.microsoft.com/office/powerpoint/2010/main" val="1470210070"/>
-      </p:ext>
-    </p:extLst>
   </p:cSld>
   <p:clrMapOvr>
     <a:masterClrMapping/>
@@ -10951,7 +10221,7 @@
     </a:clrScheme>
     <a:fontScheme name="Office">
       <a:majorFont>
-        <a:latin typeface="Calibri Light" panose="020F0302020204030204"/>
+        <a:latin typeface="Calibri Light"/>
         <a:ea typeface=""/>
         <a:cs typeface=""/>
         <a:font script="Jpan" typeface="游ゴシック Light"/>
@@ -10984,26 +10254,9 @@
         <a:font script="Viet" typeface="Times New Roman"/>
         <a:font script="Uigh" typeface="Microsoft Uighur"/>
         <a:font script="Geor" typeface="Sylfaen"/>
-        <a:font script="Armn" typeface="Arial"/>
-        <a:font script="Bugi" typeface="Leelawadee UI"/>
-        <a:font script="Bopo" typeface="Microsoft JhengHei"/>
-        <a:font script="Java" typeface="Javanese Text"/>
-        <a:font script="Lisu" typeface="Segoe UI"/>
-        <a:font script="Mymr" typeface="Myanmar Text"/>
-        <a:font script="Nkoo" typeface="Ebrima"/>
-        <a:font script="Olck" typeface="Nirmala UI"/>
-        <a:font script="Osma" typeface="Ebrima"/>
-        <a:font script="Phag" typeface="Phagspa"/>
-        <a:font script="Syrn" typeface="Estrangelo Edessa"/>
-        <a:font script="Syrj" typeface="Estrangelo Edessa"/>
-        <a:font script="Syre" typeface="Estrangelo Edessa"/>
-        <a:font script="Sora" typeface="Nirmala UI"/>
-        <a:font script="Tale" typeface="Microsoft Tai Le"/>
-        <a:font script="Talu" typeface="Microsoft New Tai Lue"/>
-        <a:font script="Tfng" typeface="Ebrima"/>
       </a:majorFont>
       <a:minorFont>
-        <a:latin typeface="Calibri" panose="020F0502020204030204"/>
+        <a:latin typeface="Calibri"/>
         <a:ea typeface=""/>
         <a:cs typeface=""/>
         <a:font script="Jpan" typeface="游ゴシック"/>
@@ -11036,23 +10289,6 @@
         <a:font script="Viet" typeface="Arial"/>
         <a:font script="Uigh" typeface="Microsoft Uighur"/>
         <a:font script="Geor" typeface="Sylfaen"/>
-        <a:font script="Armn" typeface="Arial"/>
-        <a:font script="Bugi" typeface="Leelawadee UI"/>
-        <a:font script="Bopo" typeface="Microsoft JhengHei"/>
-        <a:font script="Java" typeface="Javanese Text"/>
-        <a:font script="Lisu" typeface="Segoe UI"/>
-        <a:font script="Mymr" typeface="Myanmar Text"/>
-        <a:font script="Nkoo" typeface="Ebrima"/>
-        <a:font script="Olck" typeface="Nirmala UI"/>
-        <a:font script="Osma" typeface="Ebrima"/>
-        <a:font script="Phag" typeface="Phagspa"/>
-        <a:font script="Syrn" typeface="Estrangelo Edessa"/>
-        <a:font script="Syrj" typeface="Estrangelo Edessa"/>
-        <a:font script="Syre" typeface="Estrangelo Edessa"/>
-        <a:font script="Sora" typeface="Nirmala UI"/>
-        <a:font script="Tale" typeface="Microsoft Tai Le"/>
-        <a:font script="Talu" typeface="Microsoft New Tai Lue"/>
-        <a:font script="Tfng" typeface="Ebrima"/>
       </a:minorFont>
     </a:fontScheme>
     <a:fmtScheme name="Office">
@@ -11193,8 +10429,6 @@
       </a:bgFillStyleLst>
     </a:fmtScheme>
   </a:themeElements>
-  <a:objectDefaults/>
-  <a:extraClrSchemeLst/>
   <a:extLst>
     <a:ext uri="{05A4C25C-085E-4340-85A3-A5531E510DB2}">
       <thm15:themeFamily xmlns:thm15="http://schemas.microsoft.com/office/thememl/2012/main" name="Office Theme" id="{62F939B6-93AF-4DB8-9C6B-D6C7DFDC589F}" vid="{4A3C46E8-61CC-4603-A589-7422A47A8E4A}"/>
@@ -11246,7 +10480,7 @@
     </a:clrScheme>
     <a:fontScheme name="Office">
       <a:majorFont>
-        <a:latin typeface="Calibri Light" panose="020F0302020204030204"/>
+        <a:latin typeface="Calibri Light"/>
         <a:ea typeface=""/>
         <a:cs typeface=""/>
         <a:font script="Jpan" typeface="游ゴシック Light"/>
@@ -11279,26 +10513,9 @@
         <a:font script="Viet" typeface="Times New Roman"/>
         <a:font script="Uigh" typeface="Microsoft Uighur"/>
         <a:font script="Geor" typeface="Sylfaen"/>
-        <a:font script="Armn" typeface="Arial"/>
-        <a:font script="Bugi" typeface="Leelawadee UI"/>
-        <a:font script="Bopo" typeface="Microsoft JhengHei"/>
-        <a:font script="Java" typeface="Javanese Text"/>
-        <a:font script="Lisu" typeface="Segoe UI"/>
-        <a:font script="Mymr" typeface="Myanmar Text"/>
-        <a:font script="Nkoo" typeface="Ebrima"/>
-        <a:font script="Olck" typeface="Nirmala UI"/>
-        <a:font script="Osma" typeface="Ebrima"/>
-        <a:font script="Phag" typeface="Phagspa"/>
-        <a:font script="Syrn" typeface="Estrangelo Edessa"/>
-        <a:font script="Syrj" typeface="Estrangelo Edessa"/>
-        <a:font script="Syre" typeface="Estrangelo Edessa"/>
-        <a:font script="Sora" typeface="Nirmala UI"/>
-        <a:font script="Tale" typeface="Microsoft Tai Le"/>
-        <a:font script="Talu" typeface="Microsoft New Tai Lue"/>
-        <a:font script="Tfng" typeface="Ebrima"/>
       </a:majorFont>
       <a:minorFont>
-        <a:latin typeface="Calibri" panose="020F0502020204030204"/>
+        <a:latin typeface="Calibri"/>
         <a:ea typeface=""/>
         <a:cs typeface=""/>
         <a:font script="Jpan" typeface="游ゴシック"/>
@@ -11331,23 +10548,6 @@
         <a:font script="Viet" typeface="Arial"/>
         <a:font script="Uigh" typeface="Microsoft Uighur"/>
         <a:font script="Geor" typeface="Sylfaen"/>
-        <a:font script="Armn" typeface="Arial"/>
-        <a:font script="Bugi" typeface="Leelawadee UI"/>
-        <a:font script="Bopo" typeface="Microsoft JhengHei"/>
-        <a:font script="Java" typeface="Javanese Text"/>
-        <a:font script="Lisu" typeface="Segoe UI"/>
-        <a:font script="Mymr" typeface="Myanmar Text"/>
-        <a:font script="Nkoo" typeface="Ebrima"/>
-        <a:font script="Olck" typeface="Nirmala UI"/>
-        <a:font script="Osma" typeface="Ebrima"/>
-        <a:font script="Phag" typeface="Phagspa"/>
-        <a:font script="Syrn" typeface="Estrangelo Edessa"/>
-        <a:font script="Syrj" typeface="Estrangelo Edessa"/>
-        <a:font script="Syre" typeface="Estrangelo Edessa"/>
-        <a:font script="Sora" typeface="Nirmala UI"/>
-        <a:font script="Tale" typeface="Microsoft Tai Le"/>
-        <a:font script="Talu" typeface="Microsoft New Tai Lue"/>
-        <a:font script="Tfng" typeface="Ebrima"/>
       </a:minorFont>
     </a:fontScheme>
     <a:fmtScheme name="Office">
@@ -11488,8 +10688,6 @@
       </a:bgFillStyleLst>
     </a:fmtScheme>
   </a:themeElements>
-  <a:objectDefaults/>
-  <a:extraClrSchemeLst/>
   <a:extLst>
     <a:ext uri="{05A4C25C-085E-4340-85A3-A5531E510DB2}">
       <thm15:themeFamily xmlns:thm15="http://schemas.microsoft.com/office/thememl/2012/main" name="Office Theme" id="{62F939B6-93AF-4DB8-9C6B-D6C7DFDC589F}" vid="{4A3C46E8-61CC-4603-A589-7422A47A8E4A}"/>
